--- a/output/wordlabs-stetho-3day.pptx
+++ b/output/wordlabs-stetho-3day.pptx
@@ -4240,7 +4240,7 @@
                 <a:ea typeface="Calibri" pitchFamily="34" charset="-122"/>
                 <a:cs typeface="Calibri" pitchFamily="34" charset="-120"/>
               </a:rPr>
-              <a:t>"chest; breast"</a:t>
+              <a:t>"chest, breast"</a:t>
             </a:r>
             <a:endParaRPr lang="en-US" sz="2200" dirty="0"/>
           </a:p>
@@ -5288,7 +5288,7 @@
                 <a:ea typeface="Calibri" pitchFamily="34" charset="-122"/>
                 <a:cs typeface="Calibri" pitchFamily="34" charset="-120"/>
               </a:rPr>
-              <a:t>Word Labs  •  wordlabs.app  •  Root: 'stetho' = chest; breast</a:t>
+              <a:t>Word Labs  •  wordlabs.app  •  Root: 'stetho' = chest, breast</a:t>
             </a:r>
             <a:endParaRPr lang="en-US" sz="800" dirty="0"/>
           </a:p>
@@ -5622,7 +5622,7 @@
                 <a:ea typeface="Trebuchet MS" pitchFamily="34" charset="-122"/>
                 <a:cs typeface="Trebuchet MS" pitchFamily="34" charset="-120"/>
               </a:rPr>
-              <a:t>0</a:t>
+              <a:t>1</a:t>
             </a:r>
             <a:pPr algn="ctr" indent="0" marL="0">
               <a:buNone/>
@@ -5928,7 +5928,7 @@
                 <a:ea typeface="Calibri" pitchFamily="34" charset="-122"/>
                 <a:cs typeface="Calibri" pitchFamily="34" charset="-120"/>
               </a:rPr>
-              <a:t>Word Labs  •  wordlabs.app  •  Root: 'stetho' = chest; breast</a:t>
+              <a:t>Word Labs  •  wordlabs.app  •  Root: 'stetho' = chest, breast</a:t>
             </a:r>
             <a:endParaRPr lang="en-US" sz="800" dirty="0"/>
           </a:p>
@@ -6071,7 +6071,7 @@
                 <a:ea typeface="Calibri" pitchFamily="34" charset="-122"/>
                 <a:cs typeface="Calibri" pitchFamily="34" charset="-120"/>
               </a:rPr>
-              <a:t> to perform a careful </a:t>
+              <a:t> carefully, and the </a:t>
             </a:r>
             <a:pPr algn="l" indent="0" marL="0">
               <a:buNone/>
@@ -6102,7 +6102,7 @@
                 <a:ea typeface="Calibri" pitchFamily="34" charset="-122"/>
                 <a:cs typeface="Calibri" pitchFamily="34" charset="-120"/>
               </a:rPr>
-              <a:t> check on the patient.</a:t>
+              <a:t> results were very clear.</a:t>
             </a:r>
             <a:endParaRPr lang="en-US" sz="1800" dirty="0"/>
           </a:p>
@@ -6716,7 +6716,7 @@
                 <a:ea typeface="Calibri" pitchFamily="34" charset="-122"/>
                 <a:cs typeface="Calibri" pitchFamily="34" charset="-120"/>
               </a:rPr>
-              <a:t>Word Labs  •  wordlabs.app  •  Root: 'stetho' = chest; breast</a:t>
+              <a:t>Word Labs  •  wordlabs.app  •  Root: 'stetho' = chest, breast</a:t>
             </a:r>
             <a:endParaRPr lang="en-US" sz="800" dirty="0"/>
           </a:p>
@@ -7543,7 +7543,7 @@
                 <a:ea typeface="Calibri" pitchFamily="34" charset="-122"/>
                 <a:cs typeface="Calibri" pitchFamily="34" charset="-120"/>
               </a:rPr>
-              <a:t>Word Labs  •  wordlabs.app  •  Root: 'stetho' = chest; breast</a:t>
+              <a:t>Word Labs  •  wordlabs.app  •  Root: 'stetho' = chest, breast</a:t>
             </a:r>
             <a:endParaRPr lang="en-US" sz="800" dirty="0"/>
           </a:p>
@@ -7972,7 +7972,7 @@
                 <a:ea typeface="Calibri" pitchFamily="34" charset="-122"/>
                 <a:cs typeface="Calibri" pitchFamily="34" charset="-120"/>
               </a:rPr>
-              <a:t>instrument for examining</a:t>
+              <a:t>instrument for viewing or examining</a:t>
             </a:r>
             <a:endParaRPr lang="en-US" sz="850" dirty="0"/>
           </a:p>
@@ -8528,7 +8528,7 @@
                 <a:ea typeface="Calibri" pitchFamily="34" charset="-122"/>
                 <a:cs typeface="Calibri" pitchFamily="34" charset="-120"/>
               </a:rPr>
-              <a:t>Word Labs  •  wordlabs.app  •  Root: 'stetho' = chest; breast</a:t>
+              <a:t>Word Labs  •  wordlabs.app  •  Root: 'stetho' = chest, breast</a:t>
             </a:r>
             <a:endParaRPr lang="en-US" sz="800" dirty="0"/>
           </a:p>
@@ -8957,7 +8957,7 @@
                 <a:ea typeface="Calibri" pitchFamily="34" charset="-122"/>
                 <a:cs typeface="Calibri" pitchFamily="34" charset="-120"/>
               </a:rPr>
-              <a:t>instrument for examining</a:t>
+              <a:t>instrument for viewing or examining</a:t>
             </a:r>
             <a:endParaRPr lang="en-US" sz="850" dirty="0"/>
           </a:p>
@@ -9750,7 +9750,7 @@
                 <a:ea typeface="Calibri" pitchFamily="34" charset="-122"/>
                 <a:cs typeface="Calibri" pitchFamily="34" charset="-120"/>
               </a:rPr>
-              <a:t>Word Labs  •  wordlabs.app  •  Root: 'stetho' = chest; breast</a:t>
+              <a:t>Word Labs  •  wordlabs.app  •  Root: 'stetho' = chest, breast</a:t>
             </a:r>
             <a:endParaRPr lang="en-US" sz="800" dirty="0"/>
           </a:p>
@@ -10179,7 +10179,7 @@
                 <a:ea typeface="Calibri" pitchFamily="34" charset="-122"/>
                 <a:cs typeface="Calibri" pitchFamily="34" charset="-120"/>
               </a:rPr>
-              <a:t>instrument for examining</a:t>
+              <a:t>instrument for viewing or examining</a:t>
             </a:r>
             <a:endParaRPr lang="en-US" sz="850" dirty="0"/>
           </a:p>
@@ -11500,7 +11500,7 @@
                 <a:ea typeface="Calibri" pitchFamily="34" charset="-122"/>
                 <a:cs typeface="Calibri" pitchFamily="34" charset="-120"/>
               </a:rPr>
-              <a:t>Word Labs  •  wordlabs.app  •  Root: 'stetho' = chest; breast</a:t>
+              <a:t>Word Labs  •  wordlabs.app  •  Root: 'stetho' = chest, breast</a:t>
             </a:r>
             <a:endParaRPr lang="en-US" sz="800" dirty="0"/>
           </a:p>
@@ -12327,7 +12327,7 @@
                 <a:ea typeface="Calibri" pitchFamily="34" charset="-122"/>
                 <a:cs typeface="Calibri" pitchFamily="34" charset="-120"/>
               </a:rPr>
-              <a:t>Word Labs  •  wordlabs.app  •  Root: 'stetho' = chest; breast</a:t>
+              <a:t>Word Labs  •  wordlabs.app  •  Root: 'stetho' = chest, breast</a:t>
             </a:r>
             <a:endParaRPr lang="en-US" sz="800" dirty="0"/>
           </a:p>
@@ -12756,7 +12756,7 @@
                 <a:ea typeface="Calibri" pitchFamily="34" charset="-122"/>
                 <a:cs typeface="Calibri" pitchFamily="34" charset="-120"/>
               </a:rPr>
-              <a:t>examine</a:t>
+              <a:t>examine or view</a:t>
             </a:r>
             <a:endParaRPr lang="en-US" sz="850" dirty="0"/>
           </a:p>
@@ -13424,7 +13424,7 @@
                 <a:ea typeface="Calibri" pitchFamily="34" charset="-122"/>
                 <a:cs typeface="Calibri" pitchFamily="34" charset="-120"/>
               </a:rPr>
-              <a:t>Word Labs  •  wordlabs.app  •  Root: 'stetho' = chest; breast</a:t>
+              <a:t>Word Labs  •  wordlabs.app  •  Root: 'stetho' = chest, breast</a:t>
             </a:r>
             <a:endParaRPr lang="en-US" sz="800" dirty="0"/>
           </a:p>
@@ -13853,7 +13853,7 @@
                 <a:ea typeface="Calibri" pitchFamily="34" charset="-122"/>
                 <a:cs typeface="Calibri" pitchFamily="34" charset="-120"/>
               </a:rPr>
-              <a:t>examine</a:t>
+              <a:t>examine or view</a:t>
             </a:r>
             <a:endParaRPr lang="en-US" sz="850" dirty="0"/>
           </a:p>
@@ -14772,7 +14772,7 @@
                 <a:ea typeface="Calibri" pitchFamily="34" charset="-122"/>
                 <a:cs typeface="Calibri" pitchFamily="34" charset="-120"/>
               </a:rPr>
-              <a:t>Root 'stetho' — chest; breast</a:t>
+              <a:t>Root 'stetho' — chest, breast</a:t>
             </a:r>
             <a:endParaRPr lang="en-US" sz="1600" dirty="0"/>
           </a:p>
@@ -15128,7 +15128,7 @@
                 <a:ea typeface="Calibri" pitchFamily="34" charset="-122"/>
                 <a:cs typeface="Calibri" pitchFamily="34" charset="-120"/>
               </a:rPr>
-              <a:t>Word Labs  •  wordlabs.app  •  Root: 'stetho' = chest; breast</a:t>
+              <a:t>Word Labs  •  wordlabs.app  •  Root: 'stetho' = chest, breast</a:t>
             </a:r>
             <a:endParaRPr lang="en-US" sz="800" dirty="0"/>
           </a:p>
@@ -15557,7 +15557,7 @@
                 <a:ea typeface="Calibri" pitchFamily="34" charset="-122"/>
                 <a:cs typeface="Calibri" pitchFamily="34" charset="-120"/>
               </a:rPr>
-              <a:t>examine</a:t>
+              <a:t>examine or view</a:t>
             </a:r>
             <a:endParaRPr lang="en-US" sz="850" dirty="0"/>
           </a:p>
@@ -17548,7 +17548,7 @@
                 <a:ea typeface="Calibri" pitchFamily="34" charset="-122"/>
                 <a:cs typeface="Calibri" pitchFamily="34" charset="-120"/>
               </a:rPr>
-              <a:t>Word Labs  •  wordlabs.app  •  Root: 'stetho' = chest; breast</a:t>
+              <a:t>Word Labs  •  wordlabs.app  •  Root: 'stetho' = chest, breast</a:t>
             </a:r>
             <a:endParaRPr lang="en-US" sz="800" dirty="0"/>
           </a:p>
@@ -17882,7 +17882,7 @@
                 <a:ea typeface="Trebuchet MS" pitchFamily="34" charset="-122"/>
                 <a:cs typeface="Trebuchet MS" pitchFamily="34" charset="-120"/>
               </a:rPr>
-              <a:t>1</a:t>
+              <a:t>2</a:t>
             </a:r>
             <a:pPr algn="ctr" indent="0" marL="0">
               <a:buNone/>
@@ -17896,7 +17896,7 @@
                 <a:ea typeface="Trebuchet MS" pitchFamily="34" charset="-122"/>
                 <a:cs typeface="Trebuchet MS" pitchFamily="34" charset="-120"/>
               </a:rPr>
-              <a:t>  punctuation mark</a:t>
+              <a:t>  punctuation marks</a:t>
             </a:r>
             <a:endParaRPr lang="en-US" sz="2800" dirty="0"/>
           </a:p>
@@ -18188,7 +18188,7 @@
                 <a:ea typeface="Calibri" pitchFamily="34" charset="-122"/>
                 <a:cs typeface="Calibri" pitchFamily="34" charset="-120"/>
               </a:rPr>
-              <a:t>Word Labs  •  wordlabs.app  •  Root: 'stetho' = chest; breast</a:t>
+              <a:t>Word Labs  •  wordlabs.app  •  Root: 'stetho' = chest, breast</a:t>
             </a:r>
             <a:endParaRPr lang="en-US" sz="800" dirty="0"/>
           </a:p>
@@ -18300,7 +18300,7 @@
                 <a:ea typeface="Calibri" pitchFamily="34" charset="-122"/>
                 <a:cs typeface="Calibri" pitchFamily="34" charset="-120"/>
               </a:rPr>
-              <a:t>During </a:t>
+              <a:t>She studied </a:t>
             </a:r>
             <a:pPr algn="l" indent="0" marL="0">
               <a:buNone/>
@@ -18317,7 +18317,7 @@
                 <a:ea typeface="Calibri" pitchFamily="34" charset="-122"/>
                 <a:cs typeface="Calibri" pitchFamily="34" charset="-120"/>
               </a:rPr>
-              <a:t>stethoscopy</a:t>
+              <a:t>stethometry</a:t>
             </a:r>
             <a:pPr algn="l" indent="0" marL="0">
               <a:buNone/>
@@ -18331,7 +18331,7 @@
                 <a:ea typeface="Calibri" pitchFamily="34" charset="-122"/>
                 <a:cs typeface="Calibri" pitchFamily="34" charset="-120"/>
               </a:rPr>
-              <a:t>, the doctor used a </a:t>
+              <a:t> at university; her </a:t>
             </a:r>
             <a:pPr algn="l" indent="0" marL="0">
               <a:buNone/>
@@ -18348,7 +18348,7 @@
                 <a:ea typeface="Calibri" pitchFamily="34" charset="-122"/>
                 <a:cs typeface="Calibri" pitchFamily="34" charset="-120"/>
               </a:rPr>
-              <a:t>stethoscope</a:t>
+              <a:t>electrostethoscope</a:t>
             </a:r>
             <a:pPr algn="l" indent="0" marL="0">
               <a:buNone/>
@@ -18362,7 +18362,7 @@
                 <a:ea typeface="Calibri" pitchFamily="34" charset="-122"/>
                 <a:cs typeface="Calibri" pitchFamily="34" charset="-120"/>
               </a:rPr>
-              <a:t> and noted the </a:t>
+              <a:t> was cutting-edge, and she recorded data </a:t>
             </a:r>
             <a:pPr algn="l" indent="0" marL="0">
               <a:buNone/>
@@ -18379,7 +18379,7 @@
                 <a:ea typeface="Calibri" pitchFamily="34" charset="-122"/>
                 <a:cs typeface="Calibri" pitchFamily="34" charset="-120"/>
               </a:rPr>
-              <a:t>stethoscopic</a:t>
+              <a:t>stethoscopically</a:t>
             </a:r>
             <a:pPr algn="l" indent="0" marL="0">
               <a:buNone/>
@@ -18393,7 +18393,7 @@
                 <a:ea typeface="Calibri" pitchFamily="34" charset="-122"/>
                 <a:cs typeface="Calibri" pitchFamily="34" charset="-120"/>
               </a:rPr>
-              <a:t> sounds were normal.</a:t>
+              <a:t>.</a:t>
             </a:r>
             <a:endParaRPr lang="en-US" sz="1800" dirty="0"/>
           </a:p>
@@ -18548,7 +18548,7 @@
                 <a:ea typeface="Trebuchet MS" pitchFamily="34" charset="-122"/>
                 <a:cs typeface="Trebuchet MS" pitchFamily="34" charset="-120"/>
               </a:rPr>
-              <a:t>stethoscopy</a:t>
+              <a:t>stethometry</a:t>
             </a:r>
             <a:endParaRPr lang="en-US" sz="1400" dirty="0"/>
           </a:p>
@@ -18676,7 +18676,7 @@
                 <a:ea typeface="Trebuchet MS" pitchFamily="34" charset="-122"/>
                 <a:cs typeface="Trebuchet MS" pitchFamily="34" charset="-120"/>
               </a:rPr>
-              <a:t>stethoscope</a:t>
+              <a:t>electrostethoscope</a:t>
             </a:r>
             <a:endParaRPr lang="en-US" sz="1400" dirty="0"/>
           </a:p>
@@ -18804,7 +18804,7 @@
                 <a:ea typeface="Trebuchet MS" pitchFamily="34" charset="-122"/>
                 <a:cs typeface="Trebuchet MS" pitchFamily="34" charset="-120"/>
               </a:rPr>
-              <a:t>stethoscopic</a:t>
+              <a:t>stethoscopically</a:t>
             </a:r>
             <a:endParaRPr lang="en-US" sz="1400" dirty="0"/>
           </a:p>
@@ -19135,7 +19135,7 @@
                 <a:ea typeface="Calibri" pitchFamily="34" charset="-122"/>
                 <a:cs typeface="Calibri" pitchFamily="34" charset="-120"/>
               </a:rPr>
-              <a:t>Word Labs  •  wordlabs.app  •  Root: 'stetho' = chest; breast</a:t>
+              <a:t>Word Labs  •  wordlabs.app  •  Root: 'stetho' = chest, breast</a:t>
             </a:r>
             <a:endParaRPr lang="en-US" sz="800" dirty="0"/>
           </a:p>
@@ -19274,7 +19274,7 @@
                 <a:ea typeface="Trebuchet MS" pitchFamily="34" charset="-122"/>
                 <a:cs typeface="Trebuchet MS" pitchFamily="34" charset="-120"/>
               </a:rPr>
-              <a:t>stethoscopy</a:t>
+              <a:t>stethometry</a:t>
             </a:r>
             <a:endParaRPr lang="en-US" sz="2800" dirty="0"/>
           </a:p>
@@ -19962,7 +19962,7 @@
                 <a:ea typeface="Calibri" pitchFamily="34" charset="-122"/>
                 <a:cs typeface="Calibri" pitchFamily="34" charset="-120"/>
               </a:rPr>
-              <a:t>Word Labs  •  wordlabs.app  •  Root: 'stetho' = chest; breast</a:t>
+              <a:t>Word Labs  •  wordlabs.app  •  Root: 'stetho' = chest, breast</a:t>
             </a:r>
             <a:endParaRPr lang="en-US" sz="800" dirty="0"/>
           </a:p>
@@ -20101,7 +20101,7 @@
                 <a:ea typeface="Trebuchet MS" pitchFamily="34" charset="-122"/>
                 <a:cs typeface="Trebuchet MS" pitchFamily="34" charset="-120"/>
               </a:rPr>
-              <a:t>stethoscopy</a:t>
+              <a:t>stethometry</a:t>
             </a:r>
             <a:endParaRPr lang="en-US" sz="2800" dirty="0"/>
           </a:p>
@@ -20181,7 +20181,7 @@
         </p:nvSpPr>
         <p:spPr>
           <a:xfrm>
-            <a:off x="2938272" y="2258568"/>
+            <a:off x="2221992" y="2258568"/>
             <a:ext cx="1828800" cy="292608"/>
           </a:xfrm>
           <a:prstGeom prst="rect">
@@ -20215,7 +20215,7 @@
         </p:nvSpPr>
         <p:spPr>
           <a:xfrm>
-            <a:off x="2938272" y="2258568"/>
+            <a:off x="2221992" y="2258568"/>
             <a:ext cx="1828800" cy="292608"/>
           </a:xfrm>
           <a:prstGeom prst="rect">
@@ -20254,7 +20254,7 @@
         </p:nvSpPr>
         <p:spPr>
           <a:xfrm>
-            <a:off x="2938272" y="2569464"/>
+            <a:off x="2221992" y="2569464"/>
             <a:ext cx="1828800" cy="201168"/>
           </a:xfrm>
           <a:prstGeom prst="rect">
@@ -20293,7 +20293,7 @@
         </p:nvSpPr>
         <p:spPr>
           <a:xfrm>
-            <a:off x="5803392" y="2258568"/>
+            <a:off x="4370832" y="2258568"/>
             <a:ext cx="1828800" cy="292608"/>
           </a:xfrm>
           <a:prstGeom prst="rect">
@@ -20327,7 +20327,7 @@
         </p:nvSpPr>
         <p:spPr>
           <a:xfrm>
-            <a:off x="5803392" y="2258568"/>
+            <a:off x="4370832" y="2258568"/>
             <a:ext cx="1828800" cy="292608"/>
           </a:xfrm>
           <a:prstGeom prst="rect">
@@ -20352,7 +20352,7 @@
                 <a:ea typeface="Trebuchet MS" pitchFamily="34" charset="-122"/>
                 <a:cs typeface="Trebuchet MS" pitchFamily="34" charset="-120"/>
               </a:rPr>
-              <a:t>scopy</a:t>
+              <a:t>metr</a:t>
             </a:r>
             <a:endParaRPr lang="en-US" sz="1300" dirty="0"/>
           </a:p>
@@ -20366,7 +20366,7 @@
         </p:nvSpPr>
         <p:spPr>
           <a:xfrm>
-            <a:off x="5803392" y="2569464"/>
+            <a:off x="4370832" y="2569464"/>
             <a:ext cx="1828800" cy="201168"/>
           </a:xfrm>
           <a:prstGeom prst="rect">
@@ -20391,7 +20391,7 @@
                 <a:ea typeface="Calibri" pitchFamily="34" charset="-122"/>
                 <a:cs typeface="Calibri" pitchFamily="34" charset="-120"/>
               </a:rPr>
-              <a:t>process of examining</a:t>
+              <a:t>measure</a:t>
             </a:r>
             <a:endParaRPr lang="en-US" sz="850" dirty="0"/>
           </a:p>
@@ -20400,6 +20400,118 @@
       <p:sp>
         <p:nvSpPr>
           <p:cNvPr id="22" name="Shape 20"/>
+          <p:cNvSpPr/>
+          <p:nvPr/>
+        </p:nvSpPr>
+        <p:spPr>
+          <a:xfrm>
+            <a:off x="6519672" y="2258568"/>
+            <a:ext cx="1828800" cy="292608"/>
+          </a:xfrm>
+          <a:prstGeom prst="rect">
+            <a:avLst>
+              <a:gd name="adj" fmla="val 25000"/>
+            </a:avLst>
+          </a:prstGeom>
+          <a:solidFill>
+            <a:srgbClr val="FCE7F3"/>
+          </a:solidFill>
+          <a:ln w="19050">
+            <a:solidFill>
+              <a:srgbClr val="DB2777"/>
+            </a:solidFill>
+            <a:prstDash val="solid"/>
+          </a:ln>
+          <a:effectLst>
+            <a:outerShdw sx="100000" sy="100000" kx="0" ky="0" algn="bl" rotWithShape="0" blurRad="101600" dist="38100" dir="8100000">
+              <a:srgbClr val="000000">
+                <a:alpha val="12000"/>
+              </a:srgbClr>
+            </a:outerShdw>
+          </a:effectLst>
+        </p:spPr>
+      </p:sp>
+      <p:sp>
+        <p:nvSpPr>
+          <p:cNvPr id="23" name="Text 21"/>
+          <p:cNvSpPr/>
+          <p:nvPr/>
+        </p:nvSpPr>
+        <p:spPr>
+          <a:xfrm>
+            <a:off x="6519672" y="2258568"/>
+            <a:ext cx="1828800" cy="292608"/>
+          </a:xfrm>
+          <a:prstGeom prst="rect">
+            <a:avLst/>
+          </a:prstGeom>
+          <a:noFill/>
+          <a:ln/>
+        </p:spPr>
+        <p:txBody>
+          <a:bodyPr wrap="square" lIns="0" tIns="0" rIns="0" bIns="0" rtlCol="0" anchor="ctr"/>
+          <a:lstStyle/>
+          <a:p>
+            <a:pPr algn="ctr" indent="0" marL="0">
+              <a:buNone/>
+            </a:pPr>
+            <a:r>
+              <a:rPr lang="en-US" sz="1300" b="1" dirty="0">
+                <a:solidFill>
+                  <a:srgbClr val="9D174D"/>
+                </a:solidFill>
+                <a:latin typeface="Trebuchet MS" pitchFamily="34" charset="0"/>
+                <a:ea typeface="Trebuchet MS" pitchFamily="34" charset="-122"/>
+                <a:cs typeface="Trebuchet MS" pitchFamily="34" charset="-120"/>
+              </a:rPr>
+              <a:t>y</a:t>
+            </a:r>
+            <a:endParaRPr lang="en-US" sz="1300" dirty="0"/>
+          </a:p>
+        </p:txBody>
+      </p:sp>
+      <p:sp>
+        <p:nvSpPr>
+          <p:cNvPr id="24" name="Text 22"/>
+          <p:cNvSpPr/>
+          <p:nvPr/>
+        </p:nvSpPr>
+        <p:spPr>
+          <a:xfrm>
+            <a:off x="6519672" y="2569464"/>
+            <a:ext cx="1828800" cy="201168"/>
+          </a:xfrm>
+          <a:prstGeom prst="rect">
+            <a:avLst/>
+          </a:prstGeom>
+          <a:noFill/>
+          <a:ln/>
+        </p:spPr>
+        <p:txBody>
+          <a:bodyPr wrap="square" lIns="0" tIns="0" rIns="0" bIns="0" rtlCol="0" anchor="t"/>
+          <a:lstStyle/>
+          <a:p>
+            <a:pPr algn="ctr" indent="0" marL="0">
+              <a:buNone/>
+            </a:pPr>
+            <a:r>
+              <a:rPr lang="en-US" sz="850" dirty="0">
+                <a:solidFill>
+                  <a:srgbClr val="475569"/>
+                </a:solidFill>
+                <a:latin typeface="Calibri" pitchFamily="34" charset="0"/>
+                <a:ea typeface="Calibri" pitchFamily="34" charset="-122"/>
+                <a:cs typeface="Calibri" pitchFamily="34" charset="-120"/>
+              </a:rPr>
+              <a:t>quality or process of</a:t>
+            </a:r>
+            <a:endParaRPr lang="en-US" sz="850" dirty="0"/>
+          </a:p>
+        </p:txBody>
+      </p:sp>
+      <p:sp>
+        <p:nvSpPr>
+          <p:cNvPr id="25" name="Shape 23"/>
           <p:cNvSpPr/>
           <p:nvPr/>
         </p:nvSpPr>
@@ -20426,7 +20538,7 @@
       </p:sp>
       <p:sp>
         <p:nvSpPr>
-          <p:cNvPr id="23" name="Text 21"/>
+          <p:cNvPr id="26" name="Text 24"/>
           <p:cNvSpPr/>
           <p:nvPr/>
         </p:nvSpPr>
@@ -20465,7 +20577,7 @@
       </p:sp>
       <p:sp>
         <p:nvSpPr>
-          <p:cNvPr id="24" name="Shape 22"/>
+          <p:cNvPr id="27" name="Shape 25"/>
           <p:cNvSpPr/>
           <p:nvPr/>
         </p:nvSpPr>
@@ -20492,7 +20604,7 @@
       </p:sp>
       <p:sp>
         <p:nvSpPr>
-          <p:cNvPr id="25" name="Text 23"/>
+          <p:cNvPr id="28" name="Text 26"/>
           <p:cNvSpPr/>
           <p:nvPr/>
         </p:nvSpPr>
@@ -20531,7 +20643,7 @@
       </p:sp>
       <p:sp>
         <p:nvSpPr>
-          <p:cNvPr id="26" name="Shape 24"/>
+          <p:cNvPr id="29" name="Shape 27"/>
           <p:cNvSpPr/>
           <p:nvPr/>
         </p:nvSpPr>
@@ -20558,7 +20670,7 @@
       </p:sp>
       <p:sp>
         <p:nvSpPr>
-          <p:cNvPr id="27" name="Text 25"/>
+          <p:cNvPr id="30" name="Text 28"/>
           <p:cNvSpPr/>
           <p:nvPr/>
         </p:nvSpPr>
@@ -20597,7 +20709,7 @@
       </p:sp>
       <p:sp>
         <p:nvSpPr>
-          <p:cNvPr id="28" name="Shape 26"/>
+          <p:cNvPr id="31" name="Shape 29"/>
           <p:cNvSpPr/>
           <p:nvPr/>
         </p:nvSpPr>
@@ -20624,7 +20736,7 @@
       </p:sp>
       <p:sp>
         <p:nvSpPr>
-          <p:cNvPr id="29" name="Text 27"/>
+          <p:cNvPr id="32" name="Text 30"/>
           <p:cNvSpPr/>
           <p:nvPr/>
         </p:nvSpPr>
@@ -20947,7 +21059,7 @@
                 <a:ea typeface="Calibri" pitchFamily="34" charset="-122"/>
                 <a:cs typeface="Calibri" pitchFamily="34" charset="-120"/>
               </a:rPr>
-              <a:t>Word Labs  •  wordlabs.app  •  Root: 'stetho' = chest; breast</a:t>
+              <a:t>Word Labs  •  wordlabs.app  •  Root: 'stetho' = chest, breast</a:t>
             </a:r>
             <a:endParaRPr lang="en-US" sz="800" dirty="0"/>
           </a:p>
@@ -21086,7 +21198,7 @@
                 <a:ea typeface="Trebuchet MS" pitchFamily="34" charset="-122"/>
                 <a:cs typeface="Trebuchet MS" pitchFamily="34" charset="-120"/>
               </a:rPr>
-              <a:t>stethoscopy</a:t>
+              <a:t>stethometry</a:t>
             </a:r>
             <a:endParaRPr lang="en-US" sz="2800" dirty="0"/>
           </a:p>
@@ -21166,7 +21278,7 @@
         </p:nvSpPr>
         <p:spPr>
           <a:xfrm>
-            <a:off x="2938272" y="2258568"/>
+            <a:off x="2221992" y="2258568"/>
             <a:ext cx="1828800" cy="292608"/>
           </a:xfrm>
           <a:prstGeom prst="rect">
@@ -21200,7 +21312,7 @@
         </p:nvSpPr>
         <p:spPr>
           <a:xfrm>
-            <a:off x="2938272" y="2258568"/>
+            <a:off x="2221992" y="2258568"/>
             <a:ext cx="1828800" cy="292608"/>
           </a:xfrm>
           <a:prstGeom prst="rect">
@@ -21239,7 +21351,7 @@
         </p:nvSpPr>
         <p:spPr>
           <a:xfrm>
-            <a:off x="2938272" y="2569464"/>
+            <a:off x="2221992" y="2569464"/>
             <a:ext cx="1828800" cy="201168"/>
           </a:xfrm>
           <a:prstGeom prst="rect">
@@ -21278,7 +21390,7 @@
         </p:nvSpPr>
         <p:spPr>
           <a:xfrm>
-            <a:off x="5803392" y="2258568"/>
+            <a:off x="4370832" y="2258568"/>
             <a:ext cx="1828800" cy="292608"/>
           </a:xfrm>
           <a:prstGeom prst="rect">
@@ -21312,7 +21424,7 @@
         </p:nvSpPr>
         <p:spPr>
           <a:xfrm>
-            <a:off x="5803392" y="2258568"/>
+            <a:off x="4370832" y="2258568"/>
             <a:ext cx="1828800" cy="292608"/>
           </a:xfrm>
           <a:prstGeom prst="rect">
@@ -21337,7 +21449,7 @@
                 <a:ea typeface="Trebuchet MS" pitchFamily="34" charset="-122"/>
                 <a:cs typeface="Trebuchet MS" pitchFamily="34" charset="-120"/>
               </a:rPr>
-              <a:t>scopy</a:t>
+              <a:t>metr</a:t>
             </a:r>
             <a:endParaRPr lang="en-US" sz="1300" dirty="0"/>
           </a:p>
@@ -21351,7 +21463,7 @@
         </p:nvSpPr>
         <p:spPr>
           <a:xfrm>
-            <a:off x="5803392" y="2569464"/>
+            <a:off x="4370832" y="2569464"/>
             <a:ext cx="1828800" cy="201168"/>
           </a:xfrm>
           <a:prstGeom prst="rect">
@@ -21376,7 +21488,7 @@
                 <a:ea typeface="Calibri" pitchFamily="34" charset="-122"/>
                 <a:cs typeface="Calibri" pitchFamily="34" charset="-120"/>
               </a:rPr>
-              <a:t>process of examining</a:t>
+              <a:t>measure</a:t>
             </a:r>
             <a:endParaRPr lang="en-US" sz="850" dirty="0"/>
           </a:p>
@@ -21385,6 +21497,118 @@
       <p:sp>
         <p:nvSpPr>
           <p:cNvPr id="22" name="Shape 20"/>
+          <p:cNvSpPr/>
+          <p:nvPr/>
+        </p:nvSpPr>
+        <p:spPr>
+          <a:xfrm>
+            <a:off x="6519672" y="2258568"/>
+            <a:ext cx="1828800" cy="292608"/>
+          </a:xfrm>
+          <a:prstGeom prst="rect">
+            <a:avLst>
+              <a:gd name="adj" fmla="val 25000"/>
+            </a:avLst>
+          </a:prstGeom>
+          <a:solidFill>
+            <a:srgbClr val="FCE7F3"/>
+          </a:solidFill>
+          <a:ln w="19050">
+            <a:solidFill>
+              <a:srgbClr val="DB2777"/>
+            </a:solidFill>
+            <a:prstDash val="solid"/>
+          </a:ln>
+          <a:effectLst>
+            <a:outerShdw sx="100000" sy="100000" kx="0" ky="0" algn="bl" rotWithShape="0" blurRad="101600" dist="38100" dir="8100000">
+              <a:srgbClr val="000000">
+                <a:alpha val="12000"/>
+              </a:srgbClr>
+            </a:outerShdw>
+          </a:effectLst>
+        </p:spPr>
+      </p:sp>
+      <p:sp>
+        <p:nvSpPr>
+          <p:cNvPr id="23" name="Text 21"/>
+          <p:cNvSpPr/>
+          <p:nvPr/>
+        </p:nvSpPr>
+        <p:spPr>
+          <a:xfrm>
+            <a:off x="6519672" y="2258568"/>
+            <a:ext cx="1828800" cy="292608"/>
+          </a:xfrm>
+          <a:prstGeom prst="rect">
+            <a:avLst/>
+          </a:prstGeom>
+          <a:noFill/>
+          <a:ln/>
+        </p:spPr>
+        <p:txBody>
+          <a:bodyPr wrap="square" lIns="0" tIns="0" rIns="0" bIns="0" rtlCol="0" anchor="ctr"/>
+          <a:lstStyle/>
+          <a:p>
+            <a:pPr algn="ctr" indent="0" marL="0">
+              <a:buNone/>
+            </a:pPr>
+            <a:r>
+              <a:rPr lang="en-US" sz="1300" b="1" dirty="0">
+                <a:solidFill>
+                  <a:srgbClr val="9D174D"/>
+                </a:solidFill>
+                <a:latin typeface="Trebuchet MS" pitchFamily="34" charset="0"/>
+                <a:ea typeface="Trebuchet MS" pitchFamily="34" charset="-122"/>
+                <a:cs typeface="Trebuchet MS" pitchFamily="34" charset="-120"/>
+              </a:rPr>
+              <a:t>y</a:t>
+            </a:r>
+            <a:endParaRPr lang="en-US" sz="1300" dirty="0"/>
+          </a:p>
+        </p:txBody>
+      </p:sp>
+      <p:sp>
+        <p:nvSpPr>
+          <p:cNvPr id="24" name="Text 22"/>
+          <p:cNvSpPr/>
+          <p:nvPr/>
+        </p:nvSpPr>
+        <p:spPr>
+          <a:xfrm>
+            <a:off x="6519672" y="2569464"/>
+            <a:ext cx="1828800" cy="201168"/>
+          </a:xfrm>
+          <a:prstGeom prst="rect">
+            <a:avLst/>
+          </a:prstGeom>
+          <a:noFill/>
+          <a:ln/>
+        </p:spPr>
+        <p:txBody>
+          <a:bodyPr wrap="square" lIns="0" tIns="0" rIns="0" bIns="0" rtlCol="0" anchor="t"/>
+          <a:lstStyle/>
+          <a:p>
+            <a:pPr algn="ctr" indent="0" marL="0">
+              <a:buNone/>
+            </a:pPr>
+            <a:r>
+              <a:rPr lang="en-US" sz="850" dirty="0">
+                <a:solidFill>
+                  <a:srgbClr val="475569"/>
+                </a:solidFill>
+                <a:latin typeface="Calibri" pitchFamily="34" charset="0"/>
+                <a:ea typeface="Calibri" pitchFamily="34" charset="-122"/>
+                <a:cs typeface="Calibri" pitchFamily="34" charset="-120"/>
+              </a:rPr>
+              <a:t>quality or process of</a:t>
+            </a:r>
+            <a:endParaRPr lang="en-US" sz="850" dirty="0"/>
+          </a:p>
+        </p:txBody>
+      </p:sp>
+      <p:sp>
+        <p:nvSpPr>
+          <p:cNvPr id="25" name="Shape 23"/>
           <p:cNvSpPr/>
           <p:nvPr/>
         </p:nvSpPr>
@@ -21411,7 +21635,7 @@
       </p:sp>
       <p:sp>
         <p:nvSpPr>
-          <p:cNvPr id="23" name="Text 21"/>
+          <p:cNvPr id="26" name="Text 24"/>
           <p:cNvSpPr/>
           <p:nvPr/>
         </p:nvSpPr>
@@ -21450,7 +21674,7 @@
       </p:sp>
       <p:sp>
         <p:nvSpPr>
-          <p:cNvPr id="24" name="Shape 22"/>
+          <p:cNvPr id="27" name="Shape 25"/>
           <p:cNvSpPr/>
           <p:nvPr/>
         </p:nvSpPr>
@@ -21477,7 +21701,7 @@
       </p:sp>
       <p:sp>
         <p:nvSpPr>
-          <p:cNvPr id="25" name="Shape 23"/>
+          <p:cNvPr id="28" name="Shape 26"/>
           <p:cNvSpPr/>
           <p:nvPr/>
         </p:nvSpPr>
@@ -21504,7 +21728,7 @@
       </p:sp>
       <p:sp>
         <p:nvSpPr>
-          <p:cNvPr id="26" name="Text 24"/>
+          <p:cNvPr id="29" name="Text 27"/>
           <p:cNvSpPr/>
           <p:nvPr/>
         </p:nvSpPr>
@@ -21543,7 +21767,7 @@
       </p:sp>
       <p:sp>
         <p:nvSpPr>
-          <p:cNvPr id="27" name="Text 25"/>
+          <p:cNvPr id="30" name="Text 28"/>
           <p:cNvSpPr/>
           <p:nvPr/>
         </p:nvSpPr>
@@ -21582,7 +21806,7 @@
       </p:sp>
       <p:sp>
         <p:nvSpPr>
-          <p:cNvPr id="28" name="Shape 26"/>
+          <p:cNvPr id="31" name="Shape 29"/>
           <p:cNvSpPr/>
           <p:nvPr/>
         </p:nvSpPr>
@@ -21609,7 +21833,7 @@
       </p:sp>
       <p:sp>
         <p:nvSpPr>
-          <p:cNvPr id="29" name="Text 27"/>
+          <p:cNvPr id="32" name="Text 30"/>
           <p:cNvSpPr/>
           <p:nvPr/>
         </p:nvSpPr>
@@ -21640,7 +21864,7 @@
                 <a:ea typeface="Trebuchet MS" pitchFamily="34" charset="-122"/>
                 <a:cs typeface="Trebuchet MS" pitchFamily="34" charset="-120"/>
               </a:rPr>
-              <a:t>os</a:t>
+              <a:t>o</a:t>
             </a:r>
             <a:endParaRPr lang="en-US" sz="1400" dirty="0"/>
           </a:p>
@@ -21648,7 +21872,7 @@
       </p:sp>
       <p:sp>
         <p:nvSpPr>
-          <p:cNvPr id="30" name="Text 28"/>
+          <p:cNvPr id="33" name="Text 31"/>
           <p:cNvSpPr/>
           <p:nvPr/>
         </p:nvSpPr>
@@ -21687,7 +21911,7 @@
       </p:sp>
       <p:sp>
         <p:nvSpPr>
-          <p:cNvPr id="31" name="Shape 29"/>
+          <p:cNvPr id="34" name="Shape 32"/>
           <p:cNvSpPr/>
           <p:nvPr/>
         </p:nvSpPr>
@@ -21714,7 +21938,7 @@
       </p:sp>
       <p:sp>
         <p:nvSpPr>
-          <p:cNvPr id="32" name="Text 30"/>
+          <p:cNvPr id="35" name="Text 33"/>
           <p:cNvSpPr/>
           <p:nvPr/>
         </p:nvSpPr>
@@ -21745,7 +21969,7 @@
                 <a:ea typeface="Trebuchet MS" pitchFamily="34" charset="-122"/>
                 <a:cs typeface="Trebuchet MS" pitchFamily="34" charset="-120"/>
               </a:rPr>
-              <a:t>co</a:t>
+              <a:t>met</a:t>
             </a:r>
             <a:endParaRPr lang="en-US" sz="1400" dirty="0"/>
           </a:p>
@@ -21753,7 +21977,7 @@
       </p:sp>
       <p:sp>
         <p:nvSpPr>
-          <p:cNvPr id="33" name="Text 31"/>
+          <p:cNvPr id="36" name="Text 34"/>
           <p:cNvSpPr/>
           <p:nvPr/>
         </p:nvSpPr>
@@ -21792,7 +22016,7 @@
       </p:sp>
       <p:sp>
         <p:nvSpPr>
-          <p:cNvPr id="34" name="Shape 32"/>
+          <p:cNvPr id="37" name="Shape 35"/>
           <p:cNvSpPr/>
           <p:nvPr/>
         </p:nvSpPr>
@@ -21819,7 +22043,7 @@
       </p:sp>
       <p:sp>
         <p:nvSpPr>
-          <p:cNvPr id="35" name="Text 33"/>
+          <p:cNvPr id="38" name="Text 36"/>
           <p:cNvSpPr/>
           <p:nvPr/>
         </p:nvSpPr>
@@ -21850,7 +22074,7 @@
                 <a:ea typeface="Trebuchet MS" pitchFamily="34" charset="-122"/>
                 <a:cs typeface="Trebuchet MS" pitchFamily="34" charset="-120"/>
               </a:rPr>
-              <a:t>py</a:t>
+              <a:t>ry</a:t>
             </a:r>
             <a:endParaRPr lang="en-US" sz="1400" dirty="0"/>
           </a:p>
@@ -21858,7 +22082,7 @@
       </p:sp>
       <p:sp>
         <p:nvSpPr>
-          <p:cNvPr id="36" name="Shape 34"/>
+          <p:cNvPr id="39" name="Shape 37"/>
           <p:cNvSpPr/>
           <p:nvPr/>
         </p:nvSpPr>
@@ -21885,7 +22109,7 @@
       </p:sp>
       <p:sp>
         <p:nvSpPr>
-          <p:cNvPr id="37" name="Text 35"/>
+          <p:cNvPr id="40" name="Text 38"/>
           <p:cNvSpPr/>
           <p:nvPr/>
         </p:nvSpPr>
@@ -21924,7 +22148,7 @@
       </p:sp>
       <p:sp>
         <p:nvSpPr>
-          <p:cNvPr id="38" name="Shape 36"/>
+          <p:cNvPr id="41" name="Shape 39"/>
           <p:cNvSpPr/>
           <p:nvPr/>
         </p:nvSpPr>
@@ -21951,7 +22175,7 @@
       </p:sp>
       <p:sp>
         <p:nvSpPr>
-          <p:cNvPr id="39" name="Text 37"/>
+          <p:cNvPr id="42" name="Text 40"/>
           <p:cNvSpPr/>
           <p:nvPr/>
         </p:nvSpPr>
@@ -22274,7 +22498,7 @@
                 <a:ea typeface="Calibri" pitchFamily="34" charset="-122"/>
                 <a:cs typeface="Calibri" pitchFamily="34" charset="-120"/>
               </a:rPr>
-              <a:t>Word Labs  •  wordlabs.app  •  Root: 'stetho' = chest; breast</a:t>
+              <a:t>Word Labs  •  wordlabs.app  •  Root: 'stetho' = chest, breast</a:t>
             </a:r>
             <a:endParaRPr lang="en-US" sz="800" dirty="0"/>
           </a:p>
@@ -22413,7 +22637,7 @@
                 <a:ea typeface="Trebuchet MS" pitchFamily="34" charset="-122"/>
                 <a:cs typeface="Trebuchet MS" pitchFamily="34" charset="-120"/>
               </a:rPr>
-              <a:t>stethoscopy</a:t>
+              <a:t>stethometry</a:t>
             </a:r>
             <a:endParaRPr lang="en-US" sz="2800" dirty="0"/>
           </a:p>
@@ -22493,7 +22717,7 @@
         </p:nvSpPr>
         <p:spPr>
           <a:xfrm>
-            <a:off x="2938272" y="2258568"/>
+            <a:off x="2221992" y="2258568"/>
             <a:ext cx="1828800" cy="292608"/>
           </a:xfrm>
           <a:prstGeom prst="rect">
@@ -22527,7 +22751,7 @@
         </p:nvSpPr>
         <p:spPr>
           <a:xfrm>
-            <a:off x="2938272" y="2258568"/>
+            <a:off x="2221992" y="2258568"/>
             <a:ext cx="1828800" cy="292608"/>
           </a:xfrm>
           <a:prstGeom prst="rect">
@@ -22566,7 +22790,7 @@
         </p:nvSpPr>
         <p:spPr>
           <a:xfrm>
-            <a:off x="2938272" y="2569464"/>
+            <a:off x="2221992" y="2569464"/>
             <a:ext cx="1828800" cy="201168"/>
           </a:xfrm>
           <a:prstGeom prst="rect">
@@ -22605,7 +22829,7 @@
         </p:nvSpPr>
         <p:spPr>
           <a:xfrm>
-            <a:off x="5803392" y="2258568"/>
+            <a:off x="4370832" y="2258568"/>
             <a:ext cx="1828800" cy="292608"/>
           </a:xfrm>
           <a:prstGeom prst="rect">
@@ -22639,7 +22863,7 @@
         </p:nvSpPr>
         <p:spPr>
           <a:xfrm>
-            <a:off x="5803392" y="2258568"/>
+            <a:off x="4370832" y="2258568"/>
             <a:ext cx="1828800" cy="292608"/>
           </a:xfrm>
           <a:prstGeom prst="rect">
@@ -22664,7 +22888,7 @@
                 <a:ea typeface="Trebuchet MS" pitchFamily="34" charset="-122"/>
                 <a:cs typeface="Trebuchet MS" pitchFamily="34" charset="-120"/>
               </a:rPr>
-              <a:t>scopy</a:t>
+              <a:t>metr</a:t>
             </a:r>
             <a:endParaRPr lang="en-US" sz="1300" dirty="0"/>
           </a:p>
@@ -22678,7 +22902,7 @@
         </p:nvSpPr>
         <p:spPr>
           <a:xfrm>
-            <a:off x="5803392" y="2569464"/>
+            <a:off x="4370832" y="2569464"/>
             <a:ext cx="1828800" cy="201168"/>
           </a:xfrm>
           <a:prstGeom prst="rect">
@@ -22703,7 +22927,7 @@
                 <a:ea typeface="Calibri" pitchFamily="34" charset="-122"/>
                 <a:cs typeface="Calibri" pitchFamily="34" charset="-120"/>
               </a:rPr>
-              <a:t>process of examining</a:t>
+              <a:t>measure</a:t>
             </a:r>
             <a:endParaRPr lang="en-US" sz="850" dirty="0"/>
           </a:p>
@@ -22712,6 +22936,118 @@
       <p:sp>
         <p:nvSpPr>
           <p:cNvPr id="22" name="Shape 20"/>
+          <p:cNvSpPr/>
+          <p:nvPr/>
+        </p:nvSpPr>
+        <p:spPr>
+          <a:xfrm>
+            <a:off x="6519672" y="2258568"/>
+            <a:ext cx="1828800" cy="292608"/>
+          </a:xfrm>
+          <a:prstGeom prst="rect">
+            <a:avLst>
+              <a:gd name="adj" fmla="val 25000"/>
+            </a:avLst>
+          </a:prstGeom>
+          <a:solidFill>
+            <a:srgbClr val="FCE7F3"/>
+          </a:solidFill>
+          <a:ln w="19050">
+            <a:solidFill>
+              <a:srgbClr val="DB2777"/>
+            </a:solidFill>
+            <a:prstDash val="solid"/>
+          </a:ln>
+          <a:effectLst>
+            <a:outerShdw sx="100000" sy="100000" kx="0" ky="0" algn="bl" rotWithShape="0" blurRad="101600" dist="38100" dir="8100000">
+              <a:srgbClr val="000000">
+                <a:alpha val="12000"/>
+              </a:srgbClr>
+            </a:outerShdw>
+          </a:effectLst>
+        </p:spPr>
+      </p:sp>
+      <p:sp>
+        <p:nvSpPr>
+          <p:cNvPr id="23" name="Text 21"/>
+          <p:cNvSpPr/>
+          <p:nvPr/>
+        </p:nvSpPr>
+        <p:spPr>
+          <a:xfrm>
+            <a:off x="6519672" y="2258568"/>
+            <a:ext cx="1828800" cy="292608"/>
+          </a:xfrm>
+          <a:prstGeom prst="rect">
+            <a:avLst/>
+          </a:prstGeom>
+          <a:noFill/>
+          <a:ln/>
+        </p:spPr>
+        <p:txBody>
+          <a:bodyPr wrap="square" lIns="0" tIns="0" rIns="0" bIns="0" rtlCol="0" anchor="ctr"/>
+          <a:lstStyle/>
+          <a:p>
+            <a:pPr algn="ctr" indent="0" marL="0">
+              <a:buNone/>
+            </a:pPr>
+            <a:r>
+              <a:rPr lang="en-US" sz="1300" b="1" dirty="0">
+                <a:solidFill>
+                  <a:srgbClr val="9D174D"/>
+                </a:solidFill>
+                <a:latin typeface="Trebuchet MS" pitchFamily="34" charset="0"/>
+                <a:ea typeface="Trebuchet MS" pitchFamily="34" charset="-122"/>
+                <a:cs typeface="Trebuchet MS" pitchFamily="34" charset="-120"/>
+              </a:rPr>
+              <a:t>y</a:t>
+            </a:r>
+            <a:endParaRPr lang="en-US" sz="1300" dirty="0"/>
+          </a:p>
+        </p:txBody>
+      </p:sp>
+      <p:sp>
+        <p:nvSpPr>
+          <p:cNvPr id="24" name="Text 22"/>
+          <p:cNvSpPr/>
+          <p:nvPr/>
+        </p:nvSpPr>
+        <p:spPr>
+          <a:xfrm>
+            <a:off x="6519672" y="2569464"/>
+            <a:ext cx="1828800" cy="201168"/>
+          </a:xfrm>
+          <a:prstGeom prst="rect">
+            <a:avLst/>
+          </a:prstGeom>
+          <a:noFill/>
+          <a:ln/>
+        </p:spPr>
+        <p:txBody>
+          <a:bodyPr wrap="square" lIns="0" tIns="0" rIns="0" bIns="0" rtlCol="0" anchor="t"/>
+          <a:lstStyle/>
+          <a:p>
+            <a:pPr algn="ctr" indent="0" marL="0">
+              <a:buNone/>
+            </a:pPr>
+            <a:r>
+              <a:rPr lang="en-US" sz="850" dirty="0">
+                <a:solidFill>
+                  <a:srgbClr val="475569"/>
+                </a:solidFill>
+                <a:latin typeface="Calibri" pitchFamily="34" charset="0"/>
+                <a:ea typeface="Calibri" pitchFamily="34" charset="-122"/>
+                <a:cs typeface="Calibri" pitchFamily="34" charset="-120"/>
+              </a:rPr>
+              <a:t>quality or process of</a:t>
+            </a:r>
+            <a:endParaRPr lang="en-US" sz="850" dirty="0"/>
+          </a:p>
+        </p:txBody>
+      </p:sp>
+      <p:sp>
+        <p:nvSpPr>
+          <p:cNvPr id="25" name="Shape 23"/>
           <p:cNvSpPr/>
           <p:nvPr/>
         </p:nvSpPr>
@@ -22738,7 +23074,7 @@
       </p:sp>
       <p:sp>
         <p:nvSpPr>
-          <p:cNvPr id="23" name="Text 21"/>
+          <p:cNvPr id="26" name="Text 24"/>
           <p:cNvSpPr/>
           <p:nvPr/>
         </p:nvSpPr>
@@ -22777,7 +23113,7 @@
       </p:sp>
       <p:sp>
         <p:nvSpPr>
-          <p:cNvPr id="24" name="Shape 22"/>
+          <p:cNvPr id="27" name="Shape 25"/>
           <p:cNvSpPr/>
           <p:nvPr/>
         </p:nvSpPr>
@@ -22804,7 +23140,7 @@
       </p:sp>
       <p:sp>
         <p:nvSpPr>
-          <p:cNvPr id="25" name="Shape 23"/>
+          <p:cNvPr id="28" name="Shape 26"/>
           <p:cNvSpPr/>
           <p:nvPr/>
         </p:nvSpPr>
@@ -22831,7 +23167,7 @@
       </p:sp>
       <p:sp>
         <p:nvSpPr>
-          <p:cNvPr id="26" name="Text 24"/>
+          <p:cNvPr id="29" name="Text 27"/>
           <p:cNvSpPr/>
           <p:nvPr/>
         </p:nvSpPr>
@@ -22870,7 +23206,7 @@
       </p:sp>
       <p:sp>
         <p:nvSpPr>
-          <p:cNvPr id="27" name="Text 25"/>
+          <p:cNvPr id="30" name="Text 28"/>
           <p:cNvSpPr/>
           <p:nvPr/>
         </p:nvSpPr>
@@ -22909,7 +23245,7 @@
       </p:sp>
       <p:sp>
         <p:nvSpPr>
-          <p:cNvPr id="28" name="Shape 26"/>
+          <p:cNvPr id="31" name="Shape 29"/>
           <p:cNvSpPr/>
           <p:nvPr/>
         </p:nvSpPr>
@@ -22936,7 +23272,7 @@
       </p:sp>
       <p:sp>
         <p:nvSpPr>
-          <p:cNvPr id="29" name="Text 27"/>
+          <p:cNvPr id="32" name="Text 30"/>
           <p:cNvSpPr/>
           <p:nvPr/>
         </p:nvSpPr>
@@ -22967,7 +23303,7 @@
                 <a:ea typeface="Trebuchet MS" pitchFamily="34" charset="-122"/>
                 <a:cs typeface="Trebuchet MS" pitchFamily="34" charset="-120"/>
               </a:rPr>
-              <a:t>os</a:t>
+              <a:t>o</a:t>
             </a:r>
             <a:endParaRPr lang="en-US" sz="1400" dirty="0"/>
           </a:p>
@@ -22975,7 +23311,7 @@
       </p:sp>
       <p:sp>
         <p:nvSpPr>
-          <p:cNvPr id="30" name="Text 28"/>
+          <p:cNvPr id="33" name="Text 31"/>
           <p:cNvSpPr/>
           <p:nvPr/>
         </p:nvSpPr>
@@ -23014,7 +23350,7 @@
       </p:sp>
       <p:sp>
         <p:nvSpPr>
-          <p:cNvPr id="31" name="Shape 29"/>
+          <p:cNvPr id="34" name="Shape 32"/>
           <p:cNvSpPr/>
           <p:nvPr/>
         </p:nvSpPr>
@@ -23041,7 +23377,7 @@
       </p:sp>
       <p:sp>
         <p:nvSpPr>
-          <p:cNvPr id="32" name="Text 30"/>
+          <p:cNvPr id="35" name="Text 33"/>
           <p:cNvSpPr/>
           <p:nvPr/>
         </p:nvSpPr>
@@ -23072,7 +23408,7 @@
                 <a:ea typeface="Trebuchet MS" pitchFamily="34" charset="-122"/>
                 <a:cs typeface="Trebuchet MS" pitchFamily="34" charset="-120"/>
               </a:rPr>
-              <a:t>co</a:t>
+              <a:t>met</a:t>
             </a:r>
             <a:endParaRPr lang="en-US" sz="1400" dirty="0"/>
           </a:p>
@@ -23080,7 +23416,7 @@
       </p:sp>
       <p:sp>
         <p:nvSpPr>
-          <p:cNvPr id="33" name="Text 31"/>
+          <p:cNvPr id="36" name="Text 34"/>
           <p:cNvSpPr/>
           <p:nvPr/>
         </p:nvSpPr>
@@ -23119,7 +23455,7 @@
       </p:sp>
       <p:sp>
         <p:nvSpPr>
-          <p:cNvPr id="34" name="Shape 32"/>
+          <p:cNvPr id="37" name="Shape 35"/>
           <p:cNvSpPr/>
           <p:nvPr/>
         </p:nvSpPr>
@@ -23146,7 +23482,7 @@
       </p:sp>
       <p:sp>
         <p:nvSpPr>
-          <p:cNvPr id="35" name="Text 33"/>
+          <p:cNvPr id="38" name="Text 36"/>
           <p:cNvSpPr/>
           <p:nvPr/>
         </p:nvSpPr>
@@ -23177,7 +23513,7 @@
                 <a:ea typeface="Trebuchet MS" pitchFamily="34" charset="-122"/>
                 <a:cs typeface="Trebuchet MS" pitchFamily="34" charset="-120"/>
               </a:rPr>
-              <a:t>py</a:t>
+              <a:t>ry</a:t>
             </a:r>
             <a:endParaRPr lang="en-US" sz="1400" dirty="0"/>
           </a:p>
@@ -23185,7 +23521,7 @@
       </p:sp>
       <p:sp>
         <p:nvSpPr>
-          <p:cNvPr id="36" name="Shape 34"/>
+          <p:cNvPr id="39" name="Shape 37"/>
           <p:cNvSpPr/>
           <p:nvPr/>
         </p:nvSpPr>
@@ -23212,7 +23548,7 @@
       </p:sp>
       <p:sp>
         <p:nvSpPr>
-          <p:cNvPr id="37" name="Text 35"/>
+          <p:cNvPr id="40" name="Text 38"/>
           <p:cNvSpPr/>
           <p:nvPr/>
         </p:nvSpPr>
@@ -23251,18 +23587,18 @@
       </p:sp>
       <p:sp>
         <p:nvSpPr>
-          <p:cNvPr id="38" name="Shape 36"/>
+          <p:cNvPr id="41" name="Shape 39"/>
           <p:cNvSpPr/>
           <p:nvPr/>
         </p:nvSpPr>
         <p:spPr>
           <a:xfrm>
             <a:off x="1874520" y="4096512"/>
-            <a:ext cx="6903720" cy="804672"/>
+            <a:ext cx="6903720" cy="658368"/>
           </a:xfrm>
           <a:prstGeom prst="rect">
             <a:avLst>
-              <a:gd name="adj" fmla="val 6818"/>
+              <a:gd name="adj" fmla="val 8333"/>
             </a:avLst>
           </a:prstGeom>
           <a:solidFill>
@@ -23278,18 +23614,18 @@
       </p:sp>
       <p:sp>
         <p:nvSpPr>
-          <p:cNvPr id="39" name="Shape 37"/>
-          <p:cNvSpPr/>
-          <p:nvPr/>
-        </p:nvSpPr>
-        <p:spPr>
-          <a:xfrm>
-            <a:off x="1951330" y="4169664"/>
-            <a:ext cx="676656" cy="384048"/>
+          <p:cNvPr id="42" name="Shape 40"/>
+          <p:cNvSpPr/>
+          <p:nvPr/>
+        </p:nvSpPr>
+        <p:spPr>
+          <a:xfrm>
+            <a:off x="1951828" y="4169664"/>
+            <a:ext cx="603504" cy="475488"/>
           </a:xfrm>
           <a:prstGeom prst="rect">
             <a:avLst>
-              <a:gd name="adj" fmla="val 9524"/>
+              <a:gd name="adj" fmla="val 7692"/>
             </a:avLst>
           </a:prstGeom>
           <a:solidFill>
@@ -23305,14 +23641,14 @@
       </p:sp>
       <p:sp>
         <p:nvSpPr>
-          <p:cNvPr id="40" name="Text 38"/>
-          <p:cNvSpPr/>
-          <p:nvPr/>
-        </p:nvSpPr>
-        <p:spPr>
-          <a:xfrm>
-            <a:off x="1951330" y="4169664"/>
-            <a:ext cx="676656" cy="384048"/>
+          <p:cNvPr id="43" name="Text 41"/>
+          <p:cNvSpPr/>
+          <p:nvPr/>
+        </p:nvSpPr>
+        <p:spPr>
+          <a:xfrm>
+            <a:off x="1951828" y="4169664"/>
+            <a:ext cx="603504" cy="475488"/>
           </a:xfrm>
           <a:prstGeom prst="rect">
             <a:avLst/>
@@ -23344,18 +23680,18 @@
       </p:sp>
       <p:sp>
         <p:nvSpPr>
-          <p:cNvPr id="41" name="Shape 39"/>
-          <p:cNvSpPr/>
-          <p:nvPr/>
-        </p:nvSpPr>
-        <p:spPr>
-          <a:xfrm>
-            <a:off x="2677363" y="4169664"/>
-            <a:ext cx="676656" cy="384048"/>
+          <p:cNvPr id="44" name="Shape 42"/>
+          <p:cNvSpPr/>
+          <p:nvPr/>
+        </p:nvSpPr>
+        <p:spPr>
+          <a:xfrm>
+            <a:off x="2605209" y="4169664"/>
+            <a:ext cx="603504" cy="475488"/>
           </a:xfrm>
           <a:prstGeom prst="rect">
             <a:avLst>
-              <a:gd name="adj" fmla="val 9524"/>
+              <a:gd name="adj" fmla="val 7692"/>
             </a:avLst>
           </a:prstGeom>
           <a:solidFill>
@@ -23371,14 +23707,14 @@
       </p:sp>
       <p:sp>
         <p:nvSpPr>
-          <p:cNvPr id="42" name="Text 40"/>
-          <p:cNvSpPr/>
-          <p:nvPr/>
-        </p:nvSpPr>
-        <p:spPr>
-          <a:xfrm>
-            <a:off x="2677363" y="4169664"/>
-            <a:ext cx="676656" cy="384048"/>
+          <p:cNvPr id="45" name="Text 43"/>
+          <p:cNvSpPr/>
+          <p:nvPr/>
+        </p:nvSpPr>
+        <p:spPr>
+          <a:xfrm>
+            <a:off x="2605209" y="4169664"/>
+            <a:ext cx="603504" cy="475488"/>
           </a:xfrm>
           <a:prstGeom prst="rect">
             <a:avLst/>
@@ -23410,18 +23746,18 @@
       </p:sp>
       <p:sp>
         <p:nvSpPr>
-          <p:cNvPr id="43" name="Shape 41"/>
-          <p:cNvSpPr/>
-          <p:nvPr/>
-        </p:nvSpPr>
-        <p:spPr>
-          <a:xfrm>
-            <a:off x="3403397" y="4169664"/>
-            <a:ext cx="676656" cy="384048"/>
+          <p:cNvPr id="46" name="Shape 44"/>
+          <p:cNvSpPr/>
+          <p:nvPr/>
+        </p:nvSpPr>
+        <p:spPr>
+          <a:xfrm>
+            <a:off x="3258589" y="4169664"/>
+            <a:ext cx="603504" cy="475488"/>
           </a:xfrm>
           <a:prstGeom prst="rect">
             <a:avLst>
-              <a:gd name="adj" fmla="val 9524"/>
+              <a:gd name="adj" fmla="val 7692"/>
             </a:avLst>
           </a:prstGeom>
           <a:solidFill>
@@ -23437,14 +23773,14 @@
       </p:sp>
       <p:sp>
         <p:nvSpPr>
-          <p:cNvPr id="44" name="Text 42"/>
-          <p:cNvSpPr/>
-          <p:nvPr/>
-        </p:nvSpPr>
-        <p:spPr>
-          <a:xfrm>
-            <a:off x="3403397" y="4169664"/>
-            <a:ext cx="676656" cy="384048"/>
+          <p:cNvPr id="47" name="Text 45"/>
+          <p:cNvSpPr/>
+          <p:nvPr/>
+        </p:nvSpPr>
+        <p:spPr>
+          <a:xfrm>
+            <a:off x="3258589" y="4169664"/>
+            <a:ext cx="603504" cy="475488"/>
           </a:xfrm>
           <a:prstGeom prst="rect">
             <a:avLst/>
@@ -23476,18 +23812,18 @@
       </p:sp>
       <p:sp>
         <p:nvSpPr>
-          <p:cNvPr id="45" name="Shape 43"/>
-          <p:cNvSpPr/>
-          <p:nvPr/>
-        </p:nvSpPr>
-        <p:spPr>
-          <a:xfrm>
-            <a:off x="4129430" y="4169664"/>
-            <a:ext cx="676656" cy="384048"/>
+          <p:cNvPr id="48" name="Shape 46"/>
+          <p:cNvSpPr/>
+          <p:nvPr/>
+        </p:nvSpPr>
+        <p:spPr>
+          <a:xfrm>
+            <a:off x="3911969" y="4169664"/>
+            <a:ext cx="603504" cy="475488"/>
           </a:xfrm>
           <a:prstGeom prst="rect">
             <a:avLst>
-              <a:gd name="adj" fmla="val 9524"/>
+              <a:gd name="adj" fmla="val 7692"/>
             </a:avLst>
           </a:prstGeom>
           <a:solidFill>
@@ -23503,14 +23839,14 @@
       </p:sp>
       <p:sp>
         <p:nvSpPr>
-          <p:cNvPr id="46" name="Text 44"/>
-          <p:cNvSpPr/>
-          <p:nvPr/>
-        </p:nvSpPr>
-        <p:spPr>
-          <a:xfrm>
-            <a:off x="4129430" y="4169664"/>
-            <a:ext cx="676656" cy="384048"/>
+          <p:cNvPr id="49" name="Text 47"/>
+          <p:cNvSpPr/>
+          <p:nvPr/>
+        </p:nvSpPr>
+        <p:spPr>
+          <a:xfrm>
+            <a:off x="3911969" y="4169664"/>
+            <a:ext cx="603504" cy="475488"/>
           </a:xfrm>
           <a:prstGeom prst="rect">
             <a:avLst/>
@@ -23542,18 +23878,18 @@
       </p:sp>
       <p:sp>
         <p:nvSpPr>
-          <p:cNvPr id="47" name="Shape 45"/>
-          <p:cNvSpPr/>
-          <p:nvPr/>
-        </p:nvSpPr>
-        <p:spPr>
-          <a:xfrm>
-            <a:off x="4855464" y="4169664"/>
-            <a:ext cx="676656" cy="384048"/>
+          <p:cNvPr id="50" name="Shape 48"/>
+          <p:cNvSpPr/>
+          <p:nvPr/>
+        </p:nvSpPr>
+        <p:spPr>
+          <a:xfrm>
+            <a:off x="4565350" y="4169664"/>
+            <a:ext cx="603504" cy="475488"/>
           </a:xfrm>
           <a:prstGeom prst="rect">
             <a:avLst>
-              <a:gd name="adj" fmla="val 9524"/>
+              <a:gd name="adj" fmla="val 7692"/>
             </a:avLst>
           </a:prstGeom>
           <a:solidFill>
@@ -23569,14 +23905,14 @@
       </p:sp>
       <p:sp>
         <p:nvSpPr>
-          <p:cNvPr id="48" name="Text 46"/>
-          <p:cNvSpPr/>
-          <p:nvPr/>
-        </p:nvSpPr>
-        <p:spPr>
-          <a:xfrm>
-            <a:off x="4855464" y="4169664"/>
-            <a:ext cx="676656" cy="384048"/>
+          <p:cNvPr id="51" name="Text 49"/>
+          <p:cNvSpPr/>
+          <p:nvPr/>
+        </p:nvSpPr>
+        <p:spPr>
+          <a:xfrm>
+            <a:off x="4565350" y="4169664"/>
+            <a:ext cx="603504" cy="475488"/>
           </a:xfrm>
           <a:prstGeom prst="rect">
             <a:avLst/>
@@ -23608,18 +23944,18 @@
       </p:sp>
       <p:sp>
         <p:nvSpPr>
-          <p:cNvPr id="49" name="Shape 47"/>
-          <p:cNvSpPr/>
-          <p:nvPr/>
-        </p:nvSpPr>
-        <p:spPr>
-          <a:xfrm>
-            <a:off x="5581498" y="4169664"/>
-            <a:ext cx="676656" cy="384048"/>
+          <p:cNvPr id="52" name="Shape 50"/>
+          <p:cNvSpPr/>
+          <p:nvPr/>
+        </p:nvSpPr>
+        <p:spPr>
+          <a:xfrm>
+            <a:off x="5218730" y="4169664"/>
+            <a:ext cx="603504" cy="475488"/>
           </a:xfrm>
           <a:prstGeom prst="rect">
             <a:avLst>
-              <a:gd name="adj" fmla="val 9524"/>
+              <a:gd name="adj" fmla="val 7692"/>
             </a:avLst>
           </a:prstGeom>
           <a:solidFill>
@@ -23635,14 +23971,14 @@
       </p:sp>
       <p:sp>
         <p:nvSpPr>
-          <p:cNvPr id="50" name="Text 48"/>
-          <p:cNvSpPr/>
-          <p:nvPr/>
-        </p:nvSpPr>
-        <p:spPr>
-          <a:xfrm>
-            <a:off x="5581498" y="4169664"/>
-            <a:ext cx="676656" cy="384048"/>
+          <p:cNvPr id="53" name="Text 51"/>
+          <p:cNvSpPr/>
+          <p:nvPr/>
+        </p:nvSpPr>
+        <p:spPr>
+          <a:xfrm>
+            <a:off x="5218730" y="4169664"/>
+            <a:ext cx="603504" cy="475488"/>
           </a:xfrm>
           <a:prstGeom prst="rect">
             <a:avLst/>
@@ -23666,7 +24002,7 @@
                 <a:ea typeface="Trebuchet MS" pitchFamily="34" charset="-122"/>
                 <a:cs typeface="Trebuchet MS" pitchFamily="34" charset="-120"/>
               </a:rPr>
-              <a:t>sc</a:t>
+              <a:t>m</a:t>
             </a:r>
             <a:endParaRPr lang="en-US" sz="900" dirty="0"/>
           </a:p>
@@ -23674,57 +24010,18 @@
       </p:sp>
       <p:sp>
         <p:nvSpPr>
-          <p:cNvPr id="51" name="Text 49"/>
-          <p:cNvSpPr/>
-          <p:nvPr/>
-        </p:nvSpPr>
-        <p:spPr>
-          <a:xfrm>
-            <a:off x="5581498" y="4572000"/>
-            <a:ext cx="676656" cy="219456"/>
-          </a:xfrm>
-          <a:prstGeom prst="rect">
-            <a:avLst/>
-          </a:prstGeom>
-          <a:noFill/>
-          <a:ln/>
-        </p:spPr>
-        <p:txBody>
-          <a:bodyPr wrap="square" lIns="0" tIns="0" rIns="0" bIns="0" rtlCol="0" anchor="t"/>
-          <a:lstStyle/>
-          <a:p>
-            <a:pPr algn="ctr" indent="0" marL="0">
-              <a:buNone/>
-            </a:pPr>
-            <a:r>
-              <a:rPr lang="en-US" sz="750" i="1" dirty="0">
-                <a:solidFill>
-                  <a:srgbClr val="94A3B8"/>
-                </a:solidFill>
-                <a:latin typeface="Calibri" pitchFamily="34" charset="0"/>
-                <a:ea typeface="Calibri" pitchFamily="34" charset="-122"/>
-                <a:cs typeface="Calibri" pitchFamily="34" charset="-120"/>
-              </a:rPr>
-              <a:t>/sk/</a:t>
-            </a:r>
-            <a:endParaRPr lang="en-US" sz="750" dirty="0"/>
-          </a:p>
-        </p:txBody>
-      </p:sp>
-      <p:sp>
-        <p:nvSpPr>
-          <p:cNvPr id="52" name="Shape 50"/>
-          <p:cNvSpPr/>
-          <p:nvPr/>
-        </p:nvSpPr>
-        <p:spPr>
-          <a:xfrm>
-            <a:off x="6307531" y="4169664"/>
-            <a:ext cx="676656" cy="384048"/>
+          <p:cNvPr id="54" name="Shape 52"/>
+          <p:cNvSpPr/>
+          <p:nvPr/>
+        </p:nvSpPr>
+        <p:spPr>
+          <a:xfrm>
+            <a:off x="5872111" y="4169664"/>
+            <a:ext cx="603504" cy="475488"/>
           </a:xfrm>
           <a:prstGeom prst="rect">
             <a:avLst>
-              <a:gd name="adj" fmla="val 9524"/>
+              <a:gd name="adj" fmla="val 7692"/>
             </a:avLst>
           </a:prstGeom>
           <a:solidFill>
@@ -23740,14 +24037,14 @@
       </p:sp>
       <p:sp>
         <p:nvSpPr>
-          <p:cNvPr id="53" name="Text 51"/>
-          <p:cNvSpPr/>
-          <p:nvPr/>
-        </p:nvSpPr>
-        <p:spPr>
-          <a:xfrm>
-            <a:off x="6307531" y="4169664"/>
-            <a:ext cx="676656" cy="384048"/>
+          <p:cNvPr id="55" name="Text 53"/>
+          <p:cNvSpPr/>
+          <p:nvPr/>
+        </p:nvSpPr>
+        <p:spPr>
+          <a:xfrm>
+            <a:off x="5872111" y="4169664"/>
+            <a:ext cx="603504" cy="475488"/>
           </a:xfrm>
           <a:prstGeom prst="rect">
             <a:avLst/>
@@ -23771,7 +24068,7 @@
                 <a:ea typeface="Trebuchet MS" pitchFamily="34" charset="-122"/>
                 <a:cs typeface="Trebuchet MS" pitchFamily="34" charset="-120"/>
               </a:rPr>
-              <a:t>o</a:t>
+              <a:t>e</a:t>
             </a:r>
             <a:endParaRPr lang="en-US" sz="900" dirty="0"/>
           </a:p>
@@ -23779,18 +24076,18 @@
       </p:sp>
       <p:sp>
         <p:nvSpPr>
-          <p:cNvPr id="54" name="Shape 52"/>
-          <p:cNvSpPr/>
-          <p:nvPr/>
-        </p:nvSpPr>
-        <p:spPr>
-          <a:xfrm>
-            <a:off x="7033565" y="4169664"/>
-            <a:ext cx="676656" cy="384048"/>
+          <p:cNvPr id="56" name="Shape 54"/>
+          <p:cNvSpPr/>
+          <p:nvPr/>
+        </p:nvSpPr>
+        <p:spPr>
+          <a:xfrm>
+            <a:off x="6525491" y="4169664"/>
+            <a:ext cx="603504" cy="475488"/>
           </a:xfrm>
           <a:prstGeom prst="rect">
             <a:avLst>
-              <a:gd name="adj" fmla="val 9524"/>
+              <a:gd name="adj" fmla="val 7692"/>
             </a:avLst>
           </a:prstGeom>
           <a:solidFill>
@@ -23806,14 +24103,14 @@
       </p:sp>
       <p:sp>
         <p:nvSpPr>
-          <p:cNvPr id="55" name="Text 53"/>
-          <p:cNvSpPr/>
-          <p:nvPr/>
-        </p:nvSpPr>
-        <p:spPr>
-          <a:xfrm>
-            <a:off x="7033565" y="4169664"/>
-            <a:ext cx="676656" cy="384048"/>
+          <p:cNvPr id="57" name="Text 55"/>
+          <p:cNvSpPr/>
+          <p:nvPr/>
+        </p:nvSpPr>
+        <p:spPr>
+          <a:xfrm>
+            <a:off x="6525491" y="4169664"/>
+            <a:ext cx="603504" cy="475488"/>
           </a:xfrm>
           <a:prstGeom prst="rect">
             <a:avLst/>
@@ -23837,7 +24134,7 @@
                 <a:ea typeface="Trebuchet MS" pitchFamily="34" charset="-122"/>
                 <a:cs typeface="Trebuchet MS" pitchFamily="34" charset="-120"/>
               </a:rPr>
-              <a:t>p</a:t>
+              <a:t>t</a:t>
             </a:r>
             <a:endParaRPr lang="en-US" sz="900" dirty="0"/>
           </a:p>
@@ -23845,18 +24142,18 @@
       </p:sp>
       <p:sp>
         <p:nvSpPr>
-          <p:cNvPr id="56" name="Shape 54"/>
-          <p:cNvSpPr/>
-          <p:nvPr/>
-        </p:nvSpPr>
-        <p:spPr>
-          <a:xfrm>
-            <a:off x="7759598" y="4169664"/>
-            <a:ext cx="676656" cy="384048"/>
+          <p:cNvPr id="58" name="Shape 56"/>
+          <p:cNvSpPr/>
+          <p:nvPr/>
+        </p:nvSpPr>
+        <p:spPr>
+          <a:xfrm>
+            <a:off x="7178871" y="4169664"/>
+            <a:ext cx="603504" cy="475488"/>
           </a:xfrm>
           <a:prstGeom prst="rect">
             <a:avLst>
-              <a:gd name="adj" fmla="val 9524"/>
+              <a:gd name="adj" fmla="val 7692"/>
             </a:avLst>
           </a:prstGeom>
           <a:solidFill>
@@ -23872,14 +24169,80 @@
       </p:sp>
       <p:sp>
         <p:nvSpPr>
-          <p:cNvPr id="57" name="Text 55"/>
-          <p:cNvSpPr/>
-          <p:nvPr/>
-        </p:nvSpPr>
-        <p:spPr>
-          <a:xfrm>
-            <a:off x="7759598" y="4169664"/>
-            <a:ext cx="676656" cy="384048"/>
+          <p:cNvPr id="59" name="Text 57"/>
+          <p:cNvSpPr/>
+          <p:nvPr/>
+        </p:nvSpPr>
+        <p:spPr>
+          <a:xfrm>
+            <a:off x="7178871" y="4169664"/>
+            <a:ext cx="603504" cy="475488"/>
+          </a:xfrm>
+          <a:prstGeom prst="rect">
+            <a:avLst/>
+          </a:prstGeom>
+          <a:noFill/>
+          <a:ln/>
+        </p:spPr>
+        <p:txBody>
+          <a:bodyPr wrap="square" lIns="0" tIns="0" rIns="0" bIns="0" rtlCol="0" anchor="ctr"/>
+          <a:lstStyle/>
+          <a:p>
+            <a:pPr algn="ctr" indent="0" marL="0">
+              <a:buNone/>
+            </a:pPr>
+            <a:r>
+              <a:rPr lang="en-US" sz="900" b="1" dirty="0">
+                <a:solidFill>
+                  <a:srgbClr val="9D174D"/>
+                </a:solidFill>
+                <a:latin typeface="Trebuchet MS" pitchFamily="34" charset="0"/>
+                <a:ea typeface="Trebuchet MS" pitchFamily="34" charset="-122"/>
+                <a:cs typeface="Trebuchet MS" pitchFamily="34" charset="-120"/>
+              </a:rPr>
+              <a:t>r</a:t>
+            </a:r>
+            <a:endParaRPr lang="en-US" sz="900" dirty="0"/>
+          </a:p>
+        </p:txBody>
+      </p:sp>
+      <p:sp>
+        <p:nvSpPr>
+          <p:cNvPr id="60" name="Shape 58"/>
+          <p:cNvSpPr/>
+          <p:nvPr/>
+        </p:nvSpPr>
+        <p:spPr>
+          <a:xfrm>
+            <a:off x="7832252" y="4169664"/>
+            <a:ext cx="603504" cy="475488"/>
+          </a:xfrm>
+          <a:prstGeom prst="rect">
+            <a:avLst>
+              <a:gd name="adj" fmla="val 7692"/>
+            </a:avLst>
+          </a:prstGeom>
+          <a:solidFill>
+            <a:srgbClr val="FFFFFF"/>
+          </a:solidFill>
+          <a:ln w="12700">
+            <a:solidFill>
+              <a:srgbClr val="DB2777"/>
+            </a:solidFill>
+            <a:prstDash val="solid"/>
+          </a:ln>
+        </p:spPr>
+      </p:sp>
+      <p:sp>
+        <p:nvSpPr>
+          <p:cNvPr id="61" name="Text 59"/>
+          <p:cNvSpPr/>
+          <p:nvPr/>
+        </p:nvSpPr>
+        <p:spPr>
+          <a:xfrm>
+            <a:off x="7832252" y="4169664"/>
+            <a:ext cx="603504" cy="475488"/>
           </a:xfrm>
           <a:prstGeom prst="rect">
             <a:avLst/>
@@ -24195,7 +24558,7 @@
                 <a:ea typeface="Calibri" pitchFamily="34" charset="-122"/>
                 <a:cs typeface="Calibri" pitchFamily="34" charset="-120"/>
               </a:rPr>
-              <a:t>Word Labs  •  wordlabs.app  •  Root: 'stetho' = chest; breast</a:t>
+              <a:t>Word Labs  •  wordlabs.app  •  Root: 'stetho' = chest, breast</a:t>
             </a:r>
             <a:endParaRPr lang="en-US" sz="800" dirty="0"/>
           </a:p>
@@ -24334,7 +24697,7 @@
                 <a:ea typeface="Trebuchet MS" pitchFamily="34" charset="-122"/>
                 <a:cs typeface="Trebuchet MS" pitchFamily="34" charset="-120"/>
               </a:rPr>
-              <a:t>stethoscope</a:t>
+              <a:t>electrostethoscope</a:t>
             </a:r>
             <a:endParaRPr lang="en-US" sz="2800" dirty="0"/>
           </a:p>
@@ -25022,7 +25385,7 @@
                 <a:ea typeface="Calibri" pitchFamily="34" charset="-122"/>
                 <a:cs typeface="Calibri" pitchFamily="34" charset="-120"/>
               </a:rPr>
-              <a:t>Word Labs  •  wordlabs.app  •  Root: 'stetho' = chest; breast</a:t>
+              <a:t>Word Labs  •  wordlabs.app  •  Root: 'stetho' = chest, breast</a:t>
             </a:r>
             <a:endParaRPr lang="en-US" sz="800" dirty="0"/>
           </a:p>
@@ -25161,7 +25524,7 @@
                 <a:ea typeface="Trebuchet MS" pitchFamily="34" charset="-122"/>
                 <a:cs typeface="Trebuchet MS" pitchFamily="34" charset="-120"/>
               </a:rPr>
-              <a:t>stethoscope</a:t>
+              <a:t>electrostethoscope</a:t>
             </a:r>
             <a:endParaRPr lang="en-US" sz="2800" dirty="0"/>
           </a:p>
@@ -25241,7 +25604,7 @@
         </p:nvSpPr>
         <p:spPr>
           <a:xfrm>
-            <a:off x="2938272" y="2258568"/>
+            <a:off x="2221992" y="2258568"/>
             <a:ext cx="1828800" cy="292608"/>
           </a:xfrm>
           <a:prstGeom prst="rect">
@@ -25250,11 +25613,11 @@
             </a:avLst>
           </a:prstGeom>
           <a:solidFill>
-            <a:srgbClr val="CCFBF1"/>
+            <a:srgbClr val="DDD6FE"/>
           </a:solidFill>
           <a:ln w="19050">
             <a:solidFill>
-              <a:srgbClr val="0D9488"/>
+              <a:srgbClr val="7C3AED"/>
             </a:solidFill>
             <a:prstDash val="solid"/>
           </a:ln>
@@ -25275,7 +25638,7 @@
         </p:nvSpPr>
         <p:spPr>
           <a:xfrm>
-            <a:off x="2938272" y="2258568"/>
+            <a:off x="2221992" y="2258568"/>
             <a:ext cx="1828800" cy="292608"/>
           </a:xfrm>
           <a:prstGeom prst="rect">
@@ -25294,13 +25657,13 @@
             <a:r>
               <a:rPr lang="en-US" sz="1300" b="1" dirty="0">
                 <a:solidFill>
-                  <a:srgbClr val="0F766E"/>
+                  <a:srgbClr val="4C1D95"/>
                 </a:solidFill>
                 <a:latin typeface="Trebuchet MS" pitchFamily="34" charset="0"/>
                 <a:ea typeface="Trebuchet MS" pitchFamily="34" charset="-122"/>
                 <a:cs typeface="Trebuchet MS" pitchFamily="34" charset="-120"/>
               </a:rPr>
-              <a:t>stetho</a:t>
+              <a:t>electro</a:t>
             </a:r>
             <a:endParaRPr lang="en-US" sz="1300" dirty="0"/>
           </a:p>
@@ -25314,7 +25677,7 @@
         </p:nvSpPr>
         <p:spPr>
           <a:xfrm>
-            <a:off x="2938272" y="2569464"/>
+            <a:off x="2221992" y="2569464"/>
             <a:ext cx="1828800" cy="201168"/>
           </a:xfrm>
           <a:prstGeom prst="rect">
@@ -25339,7 +25702,7 @@
                 <a:ea typeface="Calibri" pitchFamily="34" charset="-122"/>
                 <a:cs typeface="Calibri" pitchFamily="34" charset="-120"/>
               </a:rPr>
-              <a:t>chest</a:t>
+              <a:t>electric, relating to electricity</a:t>
             </a:r>
             <a:endParaRPr lang="en-US" sz="850" dirty="0"/>
           </a:p>
@@ -25353,7 +25716,7 @@
         </p:nvSpPr>
         <p:spPr>
           <a:xfrm>
-            <a:off x="5803392" y="2258568"/>
+            <a:off x="4370832" y="2258568"/>
             <a:ext cx="1828800" cy="292608"/>
           </a:xfrm>
           <a:prstGeom prst="rect">
@@ -25362,11 +25725,11 @@
             </a:avLst>
           </a:prstGeom>
           <a:solidFill>
-            <a:srgbClr val="FCE7F3"/>
+            <a:srgbClr val="CCFBF1"/>
           </a:solidFill>
           <a:ln w="19050">
             <a:solidFill>
-              <a:srgbClr val="DB2777"/>
+              <a:srgbClr val="0D9488"/>
             </a:solidFill>
             <a:prstDash val="solid"/>
           </a:ln>
@@ -25387,7 +25750,7 @@
         </p:nvSpPr>
         <p:spPr>
           <a:xfrm>
-            <a:off x="5803392" y="2258568"/>
+            <a:off x="4370832" y="2258568"/>
             <a:ext cx="1828800" cy="292608"/>
           </a:xfrm>
           <a:prstGeom prst="rect">
@@ -25406,13 +25769,13 @@
             <a:r>
               <a:rPr lang="en-US" sz="1300" b="1" dirty="0">
                 <a:solidFill>
-                  <a:srgbClr val="9D174D"/>
+                  <a:srgbClr val="0F766E"/>
                 </a:solidFill>
                 <a:latin typeface="Trebuchet MS" pitchFamily="34" charset="0"/>
                 <a:ea typeface="Trebuchet MS" pitchFamily="34" charset="-122"/>
                 <a:cs typeface="Trebuchet MS" pitchFamily="34" charset="-120"/>
               </a:rPr>
-              <a:t>scope</a:t>
+              <a:t>stetho</a:t>
             </a:r>
             <a:endParaRPr lang="en-US" sz="1300" dirty="0"/>
           </a:p>
@@ -25426,7 +25789,7 @@
         </p:nvSpPr>
         <p:spPr>
           <a:xfrm>
-            <a:off x="5803392" y="2569464"/>
+            <a:off x="4370832" y="2569464"/>
             <a:ext cx="1828800" cy="201168"/>
           </a:xfrm>
           <a:prstGeom prst="rect">
@@ -25451,6 +25814,118 @@
                 <a:ea typeface="Calibri" pitchFamily="34" charset="-122"/>
                 <a:cs typeface="Calibri" pitchFamily="34" charset="-120"/>
               </a:rPr>
+              <a:t>chest</a:t>
+            </a:r>
+            <a:endParaRPr lang="en-US" sz="850" dirty="0"/>
+          </a:p>
+        </p:txBody>
+      </p:sp>
+      <p:sp>
+        <p:nvSpPr>
+          <p:cNvPr id="22" name="Shape 20"/>
+          <p:cNvSpPr/>
+          <p:nvPr/>
+        </p:nvSpPr>
+        <p:spPr>
+          <a:xfrm>
+            <a:off x="6519672" y="2258568"/>
+            <a:ext cx="1828800" cy="292608"/>
+          </a:xfrm>
+          <a:prstGeom prst="rect">
+            <a:avLst>
+              <a:gd name="adj" fmla="val 25000"/>
+            </a:avLst>
+          </a:prstGeom>
+          <a:solidFill>
+            <a:srgbClr val="FCE7F3"/>
+          </a:solidFill>
+          <a:ln w="19050">
+            <a:solidFill>
+              <a:srgbClr val="DB2777"/>
+            </a:solidFill>
+            <a:prstDash val="solid"/>
+          </a:ln>
+          <a:effectLst>
+            <a:outerShdw sx="100000" sy="100000" kx="0" ky="0" algn="bl" rotWithShape="0" blurRad="101600" dist="38100" dir="8100000">
+              <a:srgbClr val="000000">
+                <a:alpha val="12000"/>
+              </a:srgbClr>
+            </a:outerShdw>
+          </a:effectLst>
+        </p:spPr>
+      </p:sp>
+      <p:sp>
+        <p:nvSpPr>
+          <p:cNvPr id="23" name="Text 21"/>
+          <p:cNvSpPr/>
+          <p:nvPr/>
+        </p:nvSpPr>
+        <p:spPr>
+          <a:xfrm>
+            <a:off x="6519672" y="2258568"/>
+            <a:ext cx="1828800" cy="292608"/>
+          </a:xfrm>
+          <a:prstGeom prst="rect">
+            <a:avLst/>
+          </a:prstGeom>
+          <a:noFill/>
+          <a:ln/>
+        </p:spPr>
+        <p:txBody>
+          <a:bodyPr wrap="square" lIns="0" tIns="0" rIns="0" bIns="0" rtlCol="0" anchor="ctr"/>
+          <a:lstStyle/>
+          <a:p>
+            <a:pPr algn="ctr" indent="0" marL="0">
+              <a:buNone/>
+            </a:pPr>
+            <a:r>
+              <a:rPr lang="en-US" sz="1300" b="1" dirty="0">
+                <a:solidFill>
+                  <a:srgbClr val="9D174D"/>
+                </a:solidFill>
+                <a:latin typeface="Trebuchet MS" pitchFamily="34" charset="0"/>
+                <a:ea typeface="Trebuchet MS" pitchFamily="34" charset="-122"/>
+                <a:cs typeface="Trebuchet MS" pitchFamily="34" charset="-120"/>
+              </a:rPr>
+              <a:t>scope</a:t>
+            </a:r>
+            <a:endParaRPr lang="en-US" sz="1300" dirty="0"/>
+          </a:p>
+        </p:txBody>
+      </p:sp>
+      <p:sp>
+        <p:nvSpPr>
+          <p:cNvPr id="24" name="Text 22"/>
+          <p:cNvSpPr/>
+          <p:nvPr/>
+        </p:nvSpPr>
+        <p:spPr>
+          <a:xfrm>
+            <a:off x="6519672" y="2569464"/>
+            <a:ext cx="1828800" cy="201168"/>
+          </a:xfrm>
+          <a:prstGeom prst="rect">
+            <a:avLst/>
+          </a:prstGeom>
+          <a:noFill/>
+          <a:ln/>
+        </p:spPr>
+        <p:txBody>
+          <a:bodyPr wrap="square" lIns="0" tIns="0" rIns="0" bIns="0" rtlCol="0" anchor="t"/>
+          <a:lstStyle/>
+          <a:p>
+            <a:pPr algn="ctr" indent="0" marL="0">
+              <a:buNone/>
+            </a:pPr>
+            <a:r>
+              <a:rPr lang="en-US" sz="850" dirty="0">
+                <a:solidFill>
+                  <a:srgbClr val="475569"/>
+                </a:solidFill>
+                <a:latin typeface="Calibri" pitchFamily="34" charset="0"/>
+                <a:ea typeface="Calibri" pitchFamily="34" charset="-122"/>
+                <a:cs typeface="Calibri" pitchFamily="34" charset="-120"/>
+              </a:rPr>
               <a:t>instrument for examining</a:t>
             </a:r>
             <a:endParaRPr lang="en-US" sz="850" dirty="0"/>
@@ -25459,7 +25934,7 @@
       </p:sp>
       <p:sp>
         <p:nvSpPr>
-          <p:cNvPr id="22" name="Shape 20"/>
+          <p:cNvPr id="25" name="Shape 23"/>
           <p:cNvSpPr/>
           <p:nvPr/>
         </p:nvSpPr>
@@ -25486,7 +25961,7 @@
       </p:sp>
       <p:sp>
         <p:nvSpPr>
-          <p:cNvPr id="23" name="Text 21"/>
+          <p:cNvPr id="26" name="Text 24"/>
           <p:cNvSpPr/>
           <p:nvPr/>
         </p:nvSpPr>
@@ -25525,7 +26000,7 @@
       </p:sp>
       <p:sp>
         <p:nvSpPr>
-          <p:cNvPr id="24" name="Shape 22"/>
+          <p:cNvPr id="27" name="Shape 25"/>
           <p:cNvSpPr/>
           <p:nvPr/>
         </p:nvSpPr>
@@ -25552,7 +26027,7 @@
       </p:sp>
       <p:sp>
         <p:nvSpPr>
-          <p:cNvPr id="25" name="Text 23"/>
+          <p:cNvPr id="28" name="Text 26"/>
           <p:cNvSpPr/>
           <p:nvPr/>
         </p:nvSpPr>
@@ -25591,7 +26066,7 @@
       </p:sp>
       <p:sp>
         <p:nvSpPr>
-          <p:cNvPr id="26" name="Shape 24"/>
+          <p:cNvPr id="29" name="Shape 27"/>
           <p:cNvSpPr/>
           <p:nvPr/>
         </p:nvSpPr>
@@ -25618,7 +26093,7 @@
       </p:sp>
       <p:sp>
         <p:nvSpPr>
-          <p:cNvPr id="27" name="Text 25"/>
+          <p:cNvPr id="30" name="Text 28"/>
           <p:cNvSpPr/>
           <p:nvPr/>
         </p:nvSpPr>
@@ -25657,7 +26132,7 @@
       </p:sp>
       <p:sp>
         <p:nvSpPr>
-          <p:cNvPr id="28" name="Shape 26"/>
+          <p:cNvPr id="31" name="Shape 29"/>
           <p:cNvSpPr/>
           <p:nvPr/>
         </p:nvSpPr>
@@ -25684,7 +26159,7 @@
       </p:sp>
       <p:sp>
         <p:nvSpPr>
-          <p:cNvPr id="29" name="Text 27"/>
+          <p:cNvPr id="32" name="Text 30"/>
           <p:cNvSpPr/>
           <p:nvPr/>
         </p:nvSpPr>
@@ -26007,7 +26482,7 @@
                 <a:ea typeface="Calibri" pitchFamily="34" charset="-122"/>
                 <a:cs typeface="Calibri" pitchFamily="34" charset="-120"/>
               </a:rPr>
-              <a:t>Word Labs  •  wordlabs.app  •  Root: 'stetho' = chest; breast</a:t>
+              <a:t>Word Labs  •  wordlabs.app  •  Root: 'stetho' = chest, breast</a:t>
             </a:r>
             <a:endParaRPr lang="en-US" sz="800" dirty="0"/>
           </a:p>
@@ -26080,7 +26555,7 @@
                 <a:ea typeface="Trebuchet MS" pitchFamily="34" charset="-122"/>
                 <a:cs typeface="Trebuchet MS" pitchFamily="34" charset="-120"/>
               </a:rPr>
-              <a:t>We are learning that the root 'stetho' means 'chest; breast'.</a:t>
+              <a:t>We are learning that the root 'stetho' means 'chest, breast'.</a:t>
             </a:r>
             <a:endParaRPr lang="en-US" sz="2000" dirty="0"/>
           </a:p>
@@ -26726,7 +27201,7 @@
                 <a:ea typeface="Calibri" pitchFamily="34" charset="-122"/>
                 <a:cs typeface="Calibri" pitchFamily="34" charset="-120"/>
               </a:rPr>
-              <a:t>Word Labs  •  wordlabs.app  •  Root: 'stetho' = chest; breast</a:t>
+              <a:t>Word Labs  •  wordlabs.app  •  Root: 'stetho' = chest, breast</a:t>
             </a:r>
             <a:endParaRPr lang="en-US" sz="800" dirty="0"/>
           </a:p>
@@ -26865,7 +27340,7 @@
                 <a:ea typeface="Trebuchet MS" pitchFamily="34" charset="-122"/>
                 <a:cs typeface="Trebuchet MS" pitchFamily="34" charset="-120"/>
               </a:rPr>
-              <a:t>stethoscope</a:t>
+              <a:t>electrostethoscope</a:t>
             </a:r>
             <a:endParaRPr lang="en-US" sz="2800" dirty="0"/>
           </a:p>
@@ -26945,7 +27420,7 @@
         </p:nvSpPr>
         <p:spPr>
           <a:xfrm>
-            <a:off x="2938272" y="2258568"/>
+            <a:off x="2221992" y="2258568"/>
             <a:ext cx="1828800" cy="292608"/>
           </a:xfrm>
           <a:prstGeom prst="rect">
@@ -26954,11 +27429,11 @@
             </a:avLst>
           </a:prstGeom>
           <a:solidFill>
-            <a:srgbClr val="CCFBF1"/>
+            <a:srgbClr val="DDD6FE"/>
           </a:solidFill>
           <a:ln w="19050">
             <a:solidFill>
-              <a:srgbClr val="0D9488"/>
+              <a:srgbClr val="7C3AED"/>
             </a:solidFill>
             <a:prstDash val="solid"/>
           </a:ln>
@@ -26979,7 +27454,7 @@
         </p:nvSpPr>
         <p:spPr>
           <a:xfrm>
-            <a:off x="2938272" y="2258568"/>
+            <a:off x="2221992" y="2258568"/>
             <a:ext cx="1828800" cy="292608"/>
           </a:xfrm>
           <a:prstGeom prst="rect">
@@ -26998,13 +27473,13 @@
             <a:r>
               <a:rPr lang="en-US" sz="1300" b="1" dirty="0">
                 <a:solidFill>
-                  <a:srgbClr val="0F766E"/>
+                  <a:srgbClr val="4C1D95"/>
                 </a:solidFill>
                 <a:latin typeface="Trebuchet MS" pitchFamily="34" charset="0"/>
                 <a:ea typeface="Trebuchet MS" pitchFamily="34" charset="-122"/>
                 <a:cs typeface="Trebuchet MS" pitchFamily="34" charset="-120"/>
               </a:rPr>
-              <a:t>stetho</a:t>
+              <a:t>electro</a:t>
             </a:r>
             <a:endParaRPr lang="en-US" sz="1300" dirty="0"/>
           </a:p>
@@ -27018,7 +27493,7 @@
         </p:nvSpPr>
         <p:spPr>
           <a:xfrm>
-            <a:off x="2938272" y="2569464"/>
+            <a:off x="2221992" y="2569464"/>
             <a:ext cx="1828800" cy="201168"/>
           </a:xfrm>
           <a:prstGeom prst="rect">
@@ -27043,7 +27518,7 @@
                 <a:ea typeface="Calibri" pitchFamily="34" charset="-122"/>
                 <a:cs typeface="Calibri" pitchFamily="34" charset="-120"/>
               </a:rPr>
-              <a:t>chest</a:t>
+              <a:t>electric, relating to electricity</a:t>
             </a:r>
             <a:endParaRPr lang="en-US" sz="850" dirty="0"/>
           </a:p>
@@ -27057,7 +27532,7 @@
         </p:nvSpPr>
         <p:spPr>
           <a:xfrm>
-            <a:off x="5803392" y="2258568"/>
+            <a:off x="4370832" y="2258568"/>
             <a:ext cx="1828800" cy="292608"/>
           </a:xfrm>
           <a:prstGeom prst="rect">
@@ -27066,11 +27541,11 @@
             </a:avLst>
           </a:prstGeom>
           <a:solidFill>
-            <a:srgbClr val="FCE7F3"/>
+            <a:srgbClr val="CCFBF1"/>
           </a:solidFill>
           <a:ln w="19050">
             <a:solidFill>
-              <a:srgbClr val="DB2777"/>
+              <a:srgbClr val="0D9488"/>
             </a:solidFill>
             <a:prstDash val="solid"/>
           </a:ln>
@@ -27091,7 +27566,7 @@
         </p:nvSpPr>
         <p:spPr>
           <a:xfrm>
-            <a:off x="5803392" y="2258568"/>
+            <a:off x="4370832" y="2258568"/>
             <a:ext cx="1828800" cy="292608"/>
           </a:xfrm>
           <a:prstGeom prst="rect">
@@ -27110,13 +27585,13 @@
             <a:r>
               <a:rPr lang="en-US" sz="1300" b="1" dirty="0">
                 <a:solidFill>
-                  <a:srgbClr val="9D174D"/>
+                  <a:srgbClr val="0F766E"/>
                 </a:solidFill>
                 <a:latin typeface="Trebuchet MS" pitchFamily="34" charset="0"/>
                 <a:ea typeface="Trebuchet MS" pitchFamily="34" charset="-122"/>
                 <a:cs typeface="Trebuchet MS" pitchFamily="34" charset="-120"/>
               </a:rPr>
-              <a:t>scope</a:t>
+              <a:t>stetho</a:t>
             </a:r>
             <a:endParaRPr lang="en-US" sz="1300" dirty="0"/>
           </a:p>
@@ -27130,7 +27605,7 @@
         </p:nvSpPr>
         <p:spPr>
           <a:xfrm>
-            <a:off x="5803392" y="2569464"/>
+            <a:off x="4370832" y="2569464"/>
             <a:ext cx="1828800" cy="201168"/>
           </a:xfrm>
           <a:prstGeom prst="rect">
@@ -27155,6 +27630,118 @@
                 <a:ea typeface="Calibri" pitchFamily="34" charset="-122"/>
                 <a:cs typeface="Calibri" pitchFamily="34" charset="-120"/>
               </a:rPr>
+              <a:t>chest</a:t>
+            </a:r>
+            <a:endParaRPr lang="en-US" sz="850" dirty="0"/>
+          </a:p>
+        </p:txBody>
+      </p:sp>
+      <p:sp>
+        <p:nvSpPr>
+          <p:cNvPr id="22" name="Shape 20"/>
+          <p:cNvSpPr/>
+          <p:nvPr/>
+        </p:nvSpPr>
+        <p:spPr>
+          <a:xfrm>
+            <a:off x="6519672" y="2258568"/>
+            <a:ext cx="1828800" cy="292608"/>
+          </a:xfrm>
+          <a:prstGeom prst="rect">
+            <a:avLst>
+              <a:gd name="adj" fmla="val 25000"/>
+            </a:avLst>
+          </a:prstGeom>
+          <a:solidFill>
+            <a:srgbClr val="FCE7F3"/>
+          </a:solidFill>
+          <a:ln w="19050">
+            <a:solidFill>
+              <a:srgbClr val="DB2777"/>
+            </a:solidFill>
+            <a:prstDash val="solid"/>
+          </a:ln>
+          <a:effectLst>
+            <a:outerShdw sx="100000" sy="100000" kx="0" ky="0" algn="bl" rotWithShape="0" blurRad="101600" dist="38100" dir="8100000">
+              <a:srgbClr val="000000">
+                <a:alpha val="12000"/>
+              </a:srgbClr>
+            </a:outerShdw>
+          </a:effectLst>
+        </p:spPr>
+      </p:sp>
+      <p:sp>
+        <p:nvSpPr>
+          <p:cNvPr id="23" name="Text 21"/>
+          <p:cNvSpPr/>
+          <p:nvPr/>
+        </p:nvSpPr>
+        <p:spPr>
+          <a:xfrm>
+            <a:off x="6519672" y="2258568"/>
+            <a:ext cx="1828800" cy="292608"/>
+          </a:xfrm>
+          <a:prstGeom prst="rect">
+            <a:avLst/>
+          </a:prstGeom>
+          <a:noFill/>
+          <a:ln/>
+        </p:spPr>
+        <p:txBody>
+          <a:bodyPr wrap="square" lIns="0" tIns="0" rIns="0" bIns="0" rtlCol="0" anchor="ctr"/>
+          <a:lstStyle/>
+          <a:p>
+            <a:pPr algn="ctr" indent="0" marL="0">
+              <a:buNone/>
+            </a:pPr>
+            <a:r>
+              <a:rPr lang="en-US" sz="1300" b="1" dirty="0">
+                <a:solidFill>
+                  <a:srgbClr val="9D174D"/>
+                </a:solidFill>
+                <a:latin typeface="Trebuchet MS" pitchFamily="34" charset="0"/>
+                <a:ea typeface="Trebuchet MS" pitchFamily="34" charset="-122"/>
+                <a:cs typeface="Trebuchet MS" pitchFamily="34" charset="-120"/>
+              </a:rPr>
+              <a:t>scope</a:t>
+            </a:r>
+            <a:endParaRPr lang="en-US" sz="1300" dirty="0"/>
+          </a:p>
+        </p:txBody>
+      </p:sp>
+      <p:sp>
+        <p:nvSpPr>
+          <p:cNvPr id="24" name="Text 22"/>
+          <p:cNvSpPr/>
+          <p:nvPr/>
+        </p:nvSpPr>
+        <p:spPr>
+          <a:xfrm>
+            <a:off x="6519672" y="2569464"/>
+            <a:ext cx="1828800" cy="201168"/>
+          </a:xfrm>
+          <a:prstGeom prst="rect">
+            <a:avLst/>
+          </a:prstGeom>
+          <a:noFill/>
+          <a:ln/>
+        </p:spPr>
+        <p:txBody>
+          <a:bodyPr wrap="square" lIns="0" tIns="0" rIns="0" bIns="0" rtlCol="0" anchor="t"/>
+          <a:lstStyle/>
+          <a:p>
+            <a:pPr algn="ctr" indent="0" marL="0">
+              <a:buNone/>
+            </a:pPr>
+            <a:r>
+              <a:rPr lang="en-US" sz="850" dirty="0">
+                <a:solidFill>
+                  <a:srgbClr val="475569"/>
+                </a:solidFill>
+                <a:latin typeface="Calibri" pitchFamily="34" charset="0"/>
+                <a:ea typeface="Calibri" pitchFamily="34" charset="-122"/>
+                <a:cs typeface="Calibri" pitchFamily="34" charset="-120"/>
+              </a:rPr>
               <a:t>instrument for examining</a:t>
             </a:r>
             <a:endParaRPr lang="en-US" sz="850" dirty="0"/>
@@ -27163,7 +27750,7 @@
       </p:sp>
       <p:sp>
         <p:nvSpPr>
-          <p:cNvPr id="22" name="Shape 20"/>
+          <p:cNvPr id="25" name="Shape 23"/>
           <p:cNvSpPr/>
           <p:nvPr/>
         </p:nvSpPr>
@@ -27190,7 +27777,7 @@
       </p:sp>
       <p:sp>
         <p:nvSpPr>
-          <p:cNvPr id="23" name="Text 21"/>
+          <p:cNvPr id="26" name="Text 24"/>
           <p:cNvSpPr/>
           <p:nvPr/>
         </p:nvSpPr>
@@ -27229,7 +27816,7 @@
       </p:sp>
       <p:sp>
         <p:nvSpPr>
-          <p:cNvPr id="24" name="Shape 22"/>
+          <p:cNvPr id="27" name="Shape 25"/>
           <p:cNvSpPr/>
           <p:nvPr/>
         </p:nvSpPr>
@@ -27256,14 +27843,14 @@
       </p:sp>
       <p:sp>
         <p:nvSpPr>
-          <p:cNvPr id="25" name="Shape 23"/>
-          <p:cNvSpPr/>
-          <p:nvPr/>
-        </p:nvSpPr>
-        <p:spPr>
-          <a:xfrm>
-            <a:off x="2313432" y="3364992"/>
-            <a:ext cx="1645920" cy="475488"/>
+          <p:cNvPr id="28" name="Shape 26"/>
+          <p:cNvSpPr/>
+          <p:nvPr/>
+        </p:nvSpPr>
+        <p:spPr>
+          <a:xfrm>
+            <a:off x="1980329" y="3364992"/>
+            <a:ext cx="1005840" cy="475488"/>
           </a:xfrm>
           <a:prstGeom prst="rect">
             <a:avLst>
@@ -27283,14 +27870,14 @@
       </p:sp>
       <p:sp>
         <p:nvSpPr>
-          <p:cNvPr id="26" name="Text 24"/>
-          <p:cNvSpPr/>
-          <p:nvPr/>
-        </p:nvSpPr>
-        <p:spPr>
-          <a:xfrm>
-            <a:off x="2313432" y="3364992"/>
-            <a:ext cx="1645920" cy="475488"/>
+          <p:cNvPr id="29" name="Text 27"/>
+          <p:cNvSpPr/>
+          <p:nvPr/>
+        </p:nvSpPr>
+        <p:spPr>
+          <a:xfrm>
+            <a:off x="1980329" y="3364992"/>
+            <a:ext cx="1005840" cy="475488"/>
           </a:xfrm>
           <a:prstGeom prst="rect">
             <a:avLst/>
@@ -27314,7 +27901,7 @@
                 <a:ea typeface="Trebuchet MS" pitchFamily="34" charset="-122"/>
                 <a:cs typeface="Trebuchet MS" pitchFamily="34" charset="-120"/>
               </a:rPr>
-              <a:t>steth</a:t>
+              <a:t>e</a:t>
             </a:r>
             <a:endParaRPr lang="en-US" sz="1400" dirty="0"/>
           </a:p>
@@ -27322,14 +27909,14 @@
       </p:sp>
       <p:sp>
         <p:nvSpPr>
-          <p:cNvPr id="27" name="Text 25"/>
-          <p:cNvSpPr/>
-          <p:nvPr/>
-        </p:nvSpPr>
-        <p:spPr>
-          <a:xfrm>
-            <a:off x="3959352" y="3364992"/>
-            <a:ext cx="411480" cy="475488"/>
+          <p:cNvPr id="30" name="Text 28"/>
+          <p:cNvSpPr/>
+          <p:nvPr/>
+        </p:nvSpPr>
+        <p:spPr>
+          <a:xfrm>
+            <a:off x="2986169" y="3364992"/>
+            <a:ext cx="78377" cy="475488"/>
           </a:xfrm>
           <a:prstGeom prst="rect">
             <a:avLst/>
@@ -27361,14 +27948,14 @@
       </p:sp>
       <p:sp>
         <p:nvSpPr>
-          <p:cNvPr id="28" name="Shape 26"/>
-          <p:cNvSpPr/>
-          <p:nvPr/>
-        </p:nvSpPr>
-        <p:spPr>
-          <a:xfrm>
-            <a:off x="4370832" y="3364992"/>
-            <a:ext cx="1645920" cy="475488"/>
+          <p:cNvPr id="31" name="Shape 29"/>
+          <p:cNvSpPr/>
+          <p:nvPr/>
+        </p:nvSpPr>
+        <p:spPr>
+          <a:xfrm>
+            <a:off x="3064546" y="3364992"/>
+            <a:ext cx="1005840" cy="475488"/>
           </a:xfrm>
           <a:prstGeom prst="rect">
             <a:avLst>
@@ -27388,14 +27975,14 @@
       </p:sp>
       <p:sp>
         <p:nvSpPr>
-          <p:cNvPr id="29" name="Text 27"/>
-          <p:cNvSpPr/>
-          <p:nvPr/>
-        </p:nvSpPr>
-        <p:spPr>
-          <a:xfrm>
-            <a:off x="4370832" y="3364992"/>
-            <a:ext cx="1645920" cy="475488"/>
+          <p:cNvPr id="32" name="Text 30"/>
+          <p:cNvSpPr/>
+          <p:nvPr/>
+        </p:nvSpPr>
+        <p:spPr>
+          <a:xfrm>
+            <a:off x="3064546" y="3364992"/>
+            <a:ext cx="1005840" cy="475488"/>
           </a:xfrm>
           <a:prstGeom prst="rect">
             <a:avLst/>
@@ -27419,7 +28006,7 @@
                 <a:ea typeface="Trebuchet MS" pitchFamily="34" charset="-122"/>
                 <a:cs typeface="Trebuchet MS" pitchFamily="34" charset="-120"/>
               </a:rPr>
-              <a:t>o</a:t>
+              <a:t>lec</a:t>
             </a:r>
             <a:endParaRPr lang="en-US" sz="1400" dirty="0"/>
           </a:p>
@@ -27427,14 +28014,14 @@
       </p:sp>
       <p:sp>
         <p:nvSpPr>
-          <p:cNvPr id="30" name="Text 28"/>
-          <p:cNvSpPr/>
-          <p:nvPr/>
-        </p:nvSpPr>
-        <p:spPr>
-          <a:xfrm>
-            <a:off x="6016752" y="3364992"/>
-            <a:ext cx="411480" cy="475488"/>
+          <p:cNvPr id="33" name="Text 31"/>
+          <p:cNvSpPr/>
+          <p:nvPr/>
+        </p:nvSpPr>
+        <p:spPr>
+          <a:xfrm>
+            <a:off x="4070386" y="3364992"/>
+            <a:ext cx="78377" cy="475488"/>
           </a:xfrm>
           <a:prstGeom prst="rect">
             <a:avLst/>
@@ -27466,14 +28053,14 @@
       </p:sp>
       <p:sp>
         <p:nvSpPr>
-          <p:cNvPr id="31" name="Shape 29"/>
-          <p:cNvSpPr/>
-          <p:nvPr/>
-        </p:nvSpPr>
-        <p:spPr>
-          <a:xfrm>
-            <a:off x="6428232" y="3364992"/>
-            <a:ext cx="1645920" cy="475488"/>
+          <p:cNvPr id="34" name="Shape 32"/>
+          <p:cNvSpPr/>
+          <p:nvPr/>
+        </p:nvSpPr>
+        <p:spPr>
+          <a:xfrm>
+            <a:off x="4148763" y="3364992"/>
+            <a:ext cx="1005840" cy="475488"/>
           </a:xfrm>
           <a:prstGeom prst="rect">
             <a:avLst>
@@ -27493,14 +28080,14 @@
       </p:sp>
       <p:sp>
         <p:nvSpPr>
-          <p:cNvPr id="32" name="Text 30"/>
-          <p:cNvSpPr/>
-          <p:nvPr/>
-        </p:nvSpPr>
-        <p:spPr>
-          <a:xfrm>
-            <a:off x="6428232" y="3364992"/>
-            <a:ext cx="1645920" cy="475488"/>
+          <p:cNvPr id="35" name="Text 33"/>
+          <p:cNvSpPr/>
+          <p:nvPr/>
+        </p:nvSpPr>
+        <p:spPr>
+          <a:xfrm>
+            <a:off x="4148763" y="3364992"/>
+            <a:ext cx="1005840" cy="475488"/>
           </a:xfrm>
           <a:prstGeom prst="rect">
             <a:avLst/>
@@ -27524,6 +28111,321 @@
                 <a:ea typeface="Trebuchet MS" pitchFamily="34" charset="-122"/>
                 <a:cs typeface="Trebuchet MS" pitchFamily="34" charset="-120"/>
               </a:rPr>
+              <a:t>tro</a:t>
+            </a:r>
+            <a:endParaRPr lang="en-US" sz="1400" dirty="0"/>
+          </a:p>
+        </p:txBody>
+      </p:sp>
+      <p:sp>
+        <p:nvSpPr>
+          <p:cNvPr id="36" name="Text 34"/>
+          <p:cNvSpPr/>
+          <p:nvPr/>
+        </p:nvSpPr>
+        <p:spPr>
+          <a:xfrm>
+            <a:off x="5154603" y="3364992"/>
+            <a:ext cx="78377" cy="475488"/>
+          </a:xfrm>
+          <a:prstGeom prst="rect">
+            <a:avLst/>
+          </a:prstGeom>
+          <a:noFill/>
+          <a:ln/>
+        </p:spPr>
+        <p:txBody>
+          <a:bodyPr wrap="square" lIns="0" tIns="0" rIns="0" bIns="0" rtlCol="0" anchor="ctr"/>
+          <a:lstStyle/>
+          <a:p>
+            <a:pPr algn="ctr" indent="0" marL="0">
+              <a:buNone/>
+            </a:pPr>
+            <a:r>
+              <a:rPr lang="en-US" sz="1600" b="1" dirty="0">
+                <a:solidFill>
+                  <a:srgbClr val="0D9488"/>
+                </a:solidFill>
+                <a:latin typeface="Trebuchet MS" pitchFamily="34" charset="0"/>
+                <a:ea typeface="Trebuchet MS" pitchFamily="34" charset="-122"/>
+                <a:cs typeface="Trebuchet MS" pitchFamily="34" charset="-120"/>
+              </a:rPr>
+              <a:t>·</a:t>
+            </a:r>
+            <a:endParaRPr lang="en-US" sz="1600" dirty="0"/>
+          </a:p>
+        </p:txBody>
+      </p:sp>
+      <p:sp>
+        <p:nvSpPr>
+          <p:cNvPr id="37" name="Shape 35"/>
+          <p:cNvSpPr/>
+          <p:nvPr/>
+        </p:nvSpPr>
+        <p:spPr>
+          <a:xfrm>
+            <a:off x="5232981" y="3364992"/>
+            <a:ext cx="1005840" cy="475488"/>
+          </a:xfrm>
+          <a:prstGeom prst="rect">
+            <a:avLst>
+              <a:gd name="adj" fmla="val 9615"/>
+            </a:avLst>
+          </a:prstGeom>
+          <a:solidFill>
+            <a:srgbClr val="FFFFFF"/>
+          </a:solidFill>
+          <a:ln w="12700">
+            <a:solidFill>
+              <a:srgbClr val="0D9488"/>
+            </a:solidFill>
+            <a:prstDash val="solid"/>
+          </a:ln>
+        </p:spPr>
+      </p:sp>
+      <p:sp>
+        <p:nvSpPr>
+          <p:cNvPr id="38" name="Text 36"/>
+          <p:cNvSpPr/>
+          <p:nvPr/>
+        </p:nvSpPr>
+        <p:spPr>
+          <a:xfrm>
+            <a:off x="5232981" y="3364992"/>
+            <a:ext cx="1005840" cy="475488"/>
+          </a:xfrm>
+          <a:prstGeom prst="rect">
+            <a:avLst/>
+          </a:prstGeom>
+          <a:noFill/>
+          <a:ln/>
+        </p:spPr>
+        <p:txBody>
+          <a:bodyPr wrap="square" lIns="0" tIns="0" rIns="0" bIns="0" rtlCol="0" anchor="ctr"/>
+          <a:lstStyle/>
+          <a:p>
+            <a:pPr algn="ctr" indent="0" marL="0">
+              <a:buNone/>
+            </a:pPr>
+            <a:r>
+              <a:rPr lang="en-US" sz="1400" b="1" dirty="0">
+                <a:solidFill>
+                  <a:srgbClr val="0D9488"/>
+                </a:solidFill>
+                <a:latin typeface="Trebuchet MS" pitchFamily="34" charset="0"/>
+                <a:ea typeface="Trebuchet MS" pitchFamily="34" charset="-122"/>
+                <a:cs typeface="Trebuchet MS" pitchFamily="34" charset="-120"/>
+              </a:rPr>
+              <a:t>steth</a:t>
+            </a:r>
+            <a:endParaRPr lang="en-US" sz="1400" dirty="0"/>
+          </a:p>
+        </p:txBody>
+      </p:sp>
+      <p:sp>
+        <p:nvSpPr>
+          <p:cNvPr id="39" name="Text 37"/>
+          <p:cNvSpPr/>
+          <p:nvPr/>
+        </p:nvSpPr>
+        <p:spPr>
+          <a:xfrm>
+            <a:off x="6238821" y="3364992"/>
+            <a:ext cx="78377" cy="475488"/>
+          </a:xfrm>
+          <a:prstGeom prst="rect">
+            <a:avLst/>
+          </a:prstGeom>
+          <a:noFill/>
+          <a:ln/>
+        </p:spPr>
+        <p:txBody>
+          <a:bodyPr wrap="square" lIns="0" tIns="0" rIns="0" bIns="0" rtlCol="0" anchor="ctr"/>
+          <a:lstStyle/>
+          <a:p>
+            <a:pPr algn="ctr" indent="0" marL="0">
+              <a:buNone/>
+            </a:pPr>
+            <a:r>
+              <a:rPr lang="en-US" sz="1600" b="1" dirty="0">
+                <a:solidFill>
+                  <a:srgbClr val="0D9488"/>
+                </a:solidFill>
+                <a:latin typeface="Trebuchet MS" pitchFamily="34" charset="0"/>
+                <a:ea typeface="Trebuchet MS" pitchFamily="34" charset="-122"/>
+                <a:cs typeface="Trebuchet MS" pitchFamily="34" charset="-120"/>
+              </a:rPr>
+              <a:t>·</a:t>
+            </a:r>
+            <a:endParaRPr lang="en-US" sz="1600" dirty="0"/>
+          </a:p>
+        </p:txBody>
+      </p:sp>
+      <p:sp>
+        <p:nvSpPr>
+          <p:cNvPr id="40" name="Shape 38"/>
+          <p:cNvSpPr/>
+          <p:nvPr/>
+        </p:nvSpPr>
+        <p:spPr>
+          <a:xfrm>
+            <a:off x="6317198" y="3364992"/>
+            <a:ext cx="1005840" cy="475488"/>
+          </a:xfrm>
+          <a:prstGeom prst="rect">
+            <a:avLst>
+              <a:gd name="adj" fmla="val 9615"/>
+            </a:avLst>
+          </a:prstGeom>
+          <a:solidFill>
+            <a:srgbClr val="FFFFFF"/>
+          </a:solidFill>
+          <a:ln w="12700">
+            <a:solidFill>
+              <a:srgbClr val="0D9488"/>
+            </a:solidFill>
+            <a:prstDash val="solid"/>
+          </a:ln>
+        </p:spPr>
+      </p:sp>
+      <p:sp>
+        <p:nvSpPr>
+          <p:cNvPr id="41" name="Text 39"/>
+          <p:cNvSpPr/>
+          <p:nvPr/>
+        </p:nvSpPr>
+        <p:spPr>
+          <a:xfrm>
+            <a:off x="6317198" y="3364992"/>
+            <a:ext cx="1005840" cy="475488"/>
+          </a:xfrm>
+          <a:prstGeom prst="rect">
+            <a:avLst/>
+          </a:prstGeom>
+          <a:noFill/>
+          <a:ln/>
+        </p:spPr>
+        <p:txBody>
+          <a:bodyPr wrap="square" lIns="0" tIns="0" rIns="0" bIns="0" rtlCol="0" anchor="ctr"/>
+          <a:lstStyle/>
+          <a:p>
+            <a:pPr algn="ctr" indent="0" marL="0">
+              <a:buNone/>
+            </a:pPr>
+            <a:r>
+              <a:rPr lang="en-US" sz="1400" b="1" dirty="0">
+                <a:solidFill>
+                  <a:srgbClr val="0D9488"/>
+                </a:solidFill>
+                <a:latin typeface="Trebuchet MS" pitchFamily="34" charset="0"/>
+                <a:ea typeface="Trebuchet MS" pitchFamily="34" charset="-122"/>
+                <a:cs typeface="Trebuchet MS" pitchFamily="34" charset="-120"/>
+              </a:rPr>
+              <a:t>o</a:t>
+            </a:r>
+            <a:endParaRPr lang="en-US" sz="1400" dirty="0"/>
+          </a:p>
+        </p:txBody>
+      </p:sp>
+      <p:sp>
+        <p:nvSpPr>
+          <p:cNvPr id="42" name="Text 40"/>
+          <p:cNvSpPr/>
+          <p:nvPr/>
+        </p:nvSpPr>
+        <p:spPr>
+          <a:xfrm>
+            <a:off x="7323038" y="3364992"/>
+            <a:ext cx="78377" cy="475488"/>
+          </a:xfrm>
+          <a:prstGeom prst="rect">
+            <a:avLst/>
+          </a:prstGeom>
+          <a:noFill/>
+          <a:ln/>
+        </p:spPr>
+        <p:txBody>
+          <a:bodyPr wrap="square" lIns="0" tIns="0" rIns="0" bIns="0" rtlCol="0" anchor="ctr"/>
+          <a:lstStyle/>
+          <a:p>
+            <a:pPr algn="ctr" indent="0" marL="0">
+              <a:buNone/>
+            </a:pPr>
+            <a:r>
+              <a:rPr lang="en-US" sz="1600" b="1" dirty="0">
+                <a:solidFill>
+                  <a:srgbClr val="0D9488"/>
+                </a:solidFill>
+                <a:latin typeface="Trebuchet MS" pitchFamily="34" charset="0"/>
+                <a:ea typeface="Trebuchet MS" pitchFamily="34" charset="-122"/>
+                <a:cs typeface="Trebuchet MS" pitchFamily="34" charset="-120"/>
+              </a:rPr>
+              <a:t>·</a:t>
+            </a:r>
+            <a:endParaRPr lang="en-US" sz="1600" dirty="0"/>
+          </a:p>
+        </p:txBody>
+      </p:sp>
+      <p:sp>
+        <p:nvSpPr>
+          <p:cNvPr id="43" name="Shape 41"/>
+          <p:cNvSpPr/>
+          <p:nvPr/>
+        </p:nvSpPr>
+        <p:spPr>
+          <a:xfrm>
+            <a:off x="7401415" y="3364992"/>
+            <a:ext cx="1005840" cy="475488"/>
+          </a:xfrm>
+          <a:prstGeom prst="rect">
+            <a:avLst>
+              <a:gd name="adj" fmla="val 9615"/>
+            </a:avLst>
+          </a:prstGeom>
+          <a:solidFill>
+            <a:srgbClr val="FFFFFF"/>
+          </a:solidFill>
+          <a:ln w="12700">
+            <a:solidFill>
+              <a:srgbClr val="0D9488"/>
+            </a:solidFill>
+            <a:prstDash val="solid"/>
+          </a:ln>
+        </p:spPr>
+      </p:sp>
+      <p:sp>
+        <p:nvSpPr>
+          <p:cNvPr id="44" name="Text 42"/>
+          <p:cNvSpPr/>
+          <p:nvPr/>
+        </p:nvSpPr>
+        <p:spPr>
+          <a:xfrm>
+            <a:off x="7401415" y="3364992"/>
+            <a:ext cx="1005840" cy="475488"/>
+          </a:xfrm>
+          <a:prstGeom prst="rect">
+            <a:avLst/>
+          </a:prstGeom>
+          <a:noFill/>
+          <a:ln/>
+        </p:spPr>
+        <p:txBody>
+          <a:bodyPr wrap="square" lIns="0" tIns="0" rIns="0" bIns="0" rtlCol="0" anchor="ctr"/>
+          <a:lstStyle/>
+          <a:p>
+            <a:pPr algn="ctr" indent="0" marL="0">
+              <a:buNone/>
+            </a:pPr>
+            <a:r>
+              <a:rPr lang="en-US" sz="1400" b="1" dirty="0">
+                <a:solidFill>
+                  <a:srgbClr val="0D9488"/>
+                </a:solidFill>
+                <a:latin typeface="Trebuchet MS" pitchFamily="34" charset="0"/>
+                <a:ea typeface="Trebuchet MS" pitchFamily="34" charset="-122"/>
+                <a:cs typeface="Trebuchet MS" pitchFamily="34" charset="-120"/>
+              </a:rPr>
               <a:t>scope</a:t>
             </a:r>
             <a:endParaRPr lang="en-US" sz="1400" dirty="0"/>
@@ -27532,7 +28434,7 @@
       </p:sp>
       <p:sp>
         <p:nvSpPr>
-          <p:cNvPr id="33" name="Shape 31"/>
+          <p:cNvPr id="45" name="Shape 43"/>
           <p:cNvSpPr/>
           <p:nvPr/>
         </p:nvSpPr>
@@ -27559,7 +28461,7 @@
       </p:sp>
       <p:sp>
         <p:nvSpPr>
-          <p:cNvPr id="34" name="Text 32"/>
+          <p:cNvPr id="46" name="Text 44"/>
           <p:cNvSpPr/>
           <p:nvPr/>
         </p:nvSpPr>
@@ -27598,7 +28500,7 @@
       </p:sp>
       <p:sp>
         <p:nvSpPr>
-          <p:cNvPr id="35" name="Shape 33"/>
+          <p:cNvPr id="47" name="Shape 45"/>
           <p:cNvSpPr/>
           <p:nvPr/>
         </p:nvSpPr>
@@ -27625,7 +28527,7 @@
       </p:sp>
       <p:sp>
         <p:nvSpPr>
-          <p:cNvPr id="36" name="Text 34"/>
+          <p:cNvPr id="48" name="Text 46"/>
           <p:cNvSpPr/>
           <p:nvPr/>
         </p:nvSpPr>
@@ -27948,7 +28850,7 @@
                 <a:ea typeface="Calibri" pitchFamily="34" charset="-122"/>
                 <a:cs typeface="Calibri" pitchFamily="34" charset="-120"/>
               </a:rPr>
-              <a:t>Word Labs  •  wordlabs.app  •  Root: 'stetho' = chest; breast</a:t>
+              <a:t>Word Labs  •  wordlabs.app  •  Root: 'stetho' = chest, breast</a:t>
             </a:r>
             <a:endParaRPr lang="en-US" sz="800" dirty="0"/>
           </a:p>
@@ -28087,7 +28989,7 @@
                 <a:ea typeface="Trebuchet MS" pitchFamily="34" charset="-122"/>
                 <a:cs typeface="Trebuchet MS" pitchFamily="34" charset="-120"/>
               </a:rPr>
-              <a:t>stethoscope</a:t>
+              <a:t>electrostethoscope</a:t>
             </a:r>
             <a:endParaRPr lang="en-US" sz="2800" dirty="0"/>
           </a:p>
@@ -28167,7 +29069,7 @@
         </p:nvSpPr>
         <p:spPr>
           <a:xfrm>
-            <a:off x="2938272" y="2258568"/>
+            <a:off x="2221992" y="2258568"/>
             <a:ext cx="1828800" cy="292608"/>
           </a:xfrm>
           <a:prstGeom prst="rect">
@@ -28176,11 +29078,11 @@
             </a:avLst>
           </a:prstGeom>
           <a:solidFill>
-            <a:srgbClr val="CCFBF1"/>
+            <a:srgbClr val="DDD6FE"/>
           </a:solidFill>
           <a:ln w="19050">
             <a:solidFill>
-              <a:srgbClr val="0D9488"/>
+              <a:srgbClr val="7C3AED"/>
             </a:solidFill>
             <a:prstDash val="solid"/>
           </a:ln>
@@ -28201,7 +29103,7 @@
         </p:nvSpPr>
         <p:spPr>
           <a:xfrm>
-            <a:off x="2938272" y="2258568"/>
+            <a:off x="2221992" y="2258568"/>
             <a:ext cx="1828800" cy="292608"/>
           </a:xfrm>
           <a:prstGeom prst="rect">
@@ -28220,13 +29122,13 @@
             <a:r>
               <a:rPr lang="en-US" sz="1300" b="1" dirty="0">
                 <a:solidFill>
-                  <a:srgbClr val="0F766E"/>
+                  <a:srgbClr val="4C1D95"/>
                 </a:solidFill>
                 <a:latin typeface="Trebuchet MS" pitchFamily="34" charset="0"/>
                 <a:ea typeface="Trebuchet MS" pitchFamily="34" charset="-122"/>
                 <a:cs typeface="Trebuchet MS" pitchFamily="34" charset="-120"/>
               </a:rPr>
-              <a:t>stetho</a:t>
+              <a:t>electro</a:t>
             </a:r>
             <a:endParaRPr lang="en-US" sz="1300" dirty="0"/>
           </a:p>
@@ -28240,7 +29142,7 @@
         </p:nvSpPr>
         <p:spPr>
           <a:xfrm>
-            <a:off x="2938272" y="2569464"/>
+            <a:off x="2221992" y="2569464"/>
             <a:ext cx="1828800" cy="201168"/>
           </a:xfrm>
           <a:prstGeom prst="rect">
@@ -28265,7 +29167,7 @@
                 <a:ea typeface="Calibri" pitchFamily="34" charset="-122"/>
                 <a:cs typeface="Calibri" pitchFamily="34" charset="-120"/>
               </a:rPr>
-              <a:t>chest</a:t>
+              <a:t>electric, relating to electricity</a:t>
             </a:r>
             <a:endParaRPr lang="en-US" sz="850" dirty="0"/>
           </a:p>
@@ -28279,7 +29181,7 @@
         </p:nvSpPr>
         <p:spPr>
           <a:xfrm>
-            <a:off x="5803392" y="2258568"/>
+            <a:off x="4370832" y="2258568"/>
             <a:ext cx="1828800" cy="292608"/>
           </a:xfrm>
           <a:prstGeom prst="rect">
@@ -28288,11 +29190,11 @@
             </a:avLst>
           </a:prstGeom>
           <a:solidFill>
-            <a:srgbClr val="FCE7F3"/>
+            <a:srgbClr val="CCFBF1"/>
           </a:solidFill>
           <a:ln w="19050">
             <a:solidFill>
-              <a:srgbClr val="DB2777"/>
+              <a:srgbClr val="0D9488"/>
             </a:solidFill>
             <a:prstDash val="solid"/>
           </a:ln>
@@ -28313,7 +29215,7 @@
         </p:nvSpPr>
         <p:spPr>
           <a:xfrm>
-            <a:off x="5803392" y="2258568"/>
+            <a:off x="4370832" y="2258568"/>
             <a:ext cx="1828800" cy="292608"/>
           </a:xfrm>
           <a:prstGeom prst="rect">
@@ -28332,13 +29234,13 @@
             <a:r>
               <a:rPr lang="en-US" sz="1300" b="1" dirty="0">
                 <a:solidFill>
-                  <a:srgbClr val="9D174D"/>
+                  <a:srgbClr val="0F766E"/>
                 </a:solidFill>
                 <a:latin typeface="Trebuchet MS" pitchFamily="34" charset="0"/>
                 <a:ea typeface="Trebuchet MS" pitchFamily="34" charset="-122"/>
                 <a:cs typeface="Trebuchet MS" pitchFamily="34" charset="-120"/>
               </a:rPr>
-              <a:t>scope</a:t>
+              <a:t>stetho</a:t>
             </a:r>
             <a:endParaRPr lang="en-US" sz="1300" dirty="0"/>
           </a:p>
@@ -28352,7 +29254,7 @@
         </p:nvSpPr>
         <p:spPr>
           <a:xfrm>
-            <a:off x="5803392" y="2569464"/>
+            <a:off x="4370832" y="2569464"/>
             <a:ext cx="1828800" cy="201168"/>
           </a:xfrm>
           <a:prstGeom prst="rect">
@@ -28377,6 +29279,118 @@
                 <a:ea typeface="Calibri" pitchFamily="34" charset="-122"/>
                 <a:cs typeface="Calibri" pitchFamily="34" charset="-120"/>
               </a:rPr>
+              <a:t>chest</a:t>
+            </a:r>
+            <a:endParaRPr lang="en-US" sz="850" dirty="0"/>
+          </a:p>
+        </p:txBody>
+      </p:sp>
+      <p:sp>
+        <p:nvSpPr>
+          <p:cNvPr id="22" name="Shape 20"/>
+          <p:cNvSpPr/>
+          <p:nvPr/>
+        </p:nvSpPr>
+        <p:spPr>
+          <a:xfrm>
+            <a:off x="6519672" y="2258568"/>
+            <a:ext cx="1828800" cy="292608"/>
+          </a:xfrm>
+          <a:prstGeom prst="rect">
+            <a:avLst>
+              <a:gd name="adj" fmla="val 25000"/>
+            </a:avLst>
+          </a:prstGeom>
+          <a:solidFill>
+            <a:srgbClr val="FCE7F3"/>
+          </a:solidFill>
+          <a:ln w="19050">
+            <a:solidFill>
+              <a:srgbClr val="DB2777"/>
+            </a:solidFill>
+            <a:prstDash val="solid"/>
+          </a:ln>
+          <a:effectLst>
+            <a:outerShdw sx="100000" sy="100000" kx="0" ky="0" algn="bl" rotWithShape="0" blurRad="101600" dist="38100" dir="8100000">
+              <a:srgbClr val="000000">
+                <a:alpha val="12000"/>
+              </a:srgbClr>
+            </a:outerShdw>
+          </a:effectLst>
+        </p:spPr>
+      </p:sp>
+      <p:sp>
+        <p:nvSpPr>
+          <p:cNvPr id="23" name="Text 21"/>
+          <p:cNvSpPr/>
+          <p:nvPr/>
+        </p:nvSpPr>
+        <p:spPr>
+          <a:xfrm>
+            <a:off x="6519672" y="2258568"/>
+            <a:ext cx="1828800" cy="292608"/>
+          </a:xfrm>
+          <a:prstGeom prst="rect">
+            <a:avLst/>
+          </a:prstGeom>
+          <a:noFill/>
+          <a:ln/>
+        </p:spPr>
+        <p:txBody>
+          <a:bodyPr wrap="square" lIns="0" tIns="0" rIns="0" bIns="0" rtlCol="0" anchor="ctr"/>
+          <a:lstStyle/>
+          <a:p>
+            <a:pPr algn="ctr" indent="0" marL="0">
+              <a:buNone/>
+            </a:pPr>
+            <a:r>
+              <a:rPr lang="en-US" sz="1300" b="1" dirty="0">
+                <a:solidFill>
+                  <a:srgbClr val="9D174D"/>
+                </a:solidFill>
+                <a:latin typeface="Trebuchet MS" pitchFamily="34" charset="0"/>
+                <a:ea typeface="Trebuchet MS" pitchFamily="34" charset="-122"/>
+                <a:cs typeface="Trebuchet MS" pitchFamily="34" charset="-120"/>
+              </a:rPr>
+              <a:t>scope</a:t>
+            </a:r>
+            <a:endParaRPr lang="en-US" sz="1300" dirty="0"/>
+          </a:p>
+        </p:txBody>
+      </p:sp>
+      <p:sp>
+        <p:nvSpPr>
+          <p:cNvPr id="24" name="Text 22"/>
+          <p:cNvSpPr/>
+          <p:nvPr/>
+        </p:nvSpPr>
+        <p:spPr>
+          <a:xfrm>
+            <a:off x="6519672" y="2569464"/>
+            <a:ext cx="1828800" cy="201168"/>
+          </a:xfrm>
+          <a:prstGeom prst="rect">
+            <a:avLst/>
+          </a:prstGeom>
+          <a:noFill/>
+          <a:ln/>
+        </p:spPr>
+        <p:txBody>
+          <a:bodyPr wrap="square" lIns="0" tIns="0" rIns="0" bIns="0" rtlCol="0" anchor="t"/>
+          <a:lstStyle/>
+          <a:p>
+            <a:pPr algn="ctr" indent="0" marL="0">
+              <a:buNone/>
+            </a:pPr>
+            <a:r>
+              <a:rPr lang="en-US" sz="850" dirty="0">
+                <a:solidFill>
+                  <a:srgbClr val="475569"/>
+                </a:solidFill>
+                <a:latin typeface="Calibri" pitchFamily="34" charset="0"/>
+                <a:ea typeface="Calibri" pitchFamily="34" charset="-122"/>
+                <a:cs typeface="Calibri" pitchFamily="34" charset="-120"/>
+              </a:rPr>
               <a:t>instrument for examining</a:t>
             </a:r>
             <a:endParaRPr lang="en-US" sz="850" dirty="0"/>
@@ -28385,7 +29399,7 @@
       </p:sp>
       <p:sp>
         <p:nvSpPr>
-          <p:cNvPr id="22" name="Shape 20"/>
+          <p:cNvPr id="25" name="Shape 23"/>
           <p:cNvSpPr/>
           <p:nvPr/>
         </p:nvSpPr>
@@ -28412,7 +29426,7 @@
       </p:sp>
       <p:sp>
         <p:nvSpPr>
-          <p:cNvPr id="23" name="Text 21"/>
+          <p:cNvPr id="26" name="Text 24"/>
           <p:cNvSpPr/>
           <p:nvPr/>
         </p:nvSpPr>
@@ -28451,7 +29465,7 @@
       </p:sp>
       <p:sp>
         <p:nvSpPr>
-          <p:cNvPr id="24" name="Shape 22"/>
+          <p:cNvPr id="27" name="Shape 25"/>
           <p:cNvSpPr/>
           <p:nvPr/>
         </p:nvSpPr>
@@ -28478,14 +29492,14 @@
       </p:sp>
       <p:sp>
         <p:nvSpPr>
-          <p:cNvPr id="25" name="Shape 23"/>
-          <p:cNvSpPr/>
-          <p:nvPr/>
-        </p:nvSpPr>
-        <p:spPr>
-          <a:xfrm>
-            <a:off x="2313432" y="3364992"/>
-            <a:ext cx="1645920" cy="475488"/>
+          <p:cNvPr id="28" name="Shape 26"/>
+          <p:cNvSpPr/>
+          <p:nvPr/>
+        </p:nvSpPr>
+        <p:spPr>
+          <a:xfrm>
+            <a:off x="1980329" y="3364992"/>
+            <a:ext cx="1005840" cy="475488"/>
           </a:xfrm>
           <a:prstGeom prst="rect">
             <a:avLst>
@@ -28505,14 +29519,14 @@
       </p:sp>
       <p:sp>
         <p:nvSpPr>
-          <p:cNvPr id="26" name="Text 24"/>
-          <p:cNvSpPr/>
-          <p:nvPr/>
-        </p:nvSpPr>
-        <p:spPr>
-          <a:xfrm>
-            <a:off x="2313432" y="3364992"/>
-            <a:ext cx="1645920" cy="475488"/>
+          <p:cNvPr id="29" name="Text 27"/>
+          <p:cNvSpPr/>
+          <p:nvPr/>
+        </p:nvSpPr>
+        <p:spPr>
+          <a:xfrm>
+            <a:off x="1980329" y="3364992"/>
+            <a:ext cx="1005840" cy="475488"/>
           </a:xfrm>
           <a:prstGeom prst="rect">
             <a:avLst/>
@@ -28536,7 +29550,7 @@
                 <a:ea typeface="Trebuchet MS" pitchFamily="34" charset="-122"/>
                 <a:cs typeface="Trebuchet MS" pitchFamily="34" charset="-120"/>
               </a:rPr>
-              <a:t>steth</a:t>
+              <a:t>e</a:t>
             </a:r>
             <a:endParaRPr lang="en-US" sz="1400" dirty="0"/>
           </a:p>
@@ -28544,14 +29558,14 @@
       </p:sp>
       <p:sp>
         <p:nvSpPr>
-          <p:cNvPr id="27" name="Text 25"/>
-          <p:cNvSpPr/>
-          <p:nvPr/>
-        </p:nvSpPr>
-        <p:spPr>
-          <a:xfrm>
-            <a:off x="3959352" y="3364992"/>
-            <a:ext cx="411480" cy="475488"/>
+          <p:cNvPr id="30" name="Text 28"/>
+          <p:cNvSpPr/>
+          <p:nvPr/>
+        </p:nvSpPr>
+        <p:spPr>
+          <a:xfrm>
+            <a:off x="2986169" y="3364992"/>
+            <a:ext cx="78377" cy="475488"/>
           </a:xfrm>
           <a:prstGeom prst="rect">
             <a:avLst/>
@@ -28583,14 +29597,14 @@
       </p:sp>
       <p:sp>
         <p:nvSpPr>
-          <p:cNvPr id="28" name="Shape 26"/>
-          <p:cNvSpPr/>
-          <p:nvPr/>
-        </p:nvSpPr>
-        <p:spPr>
-          <a:xfrm>
-            <a:off x="4370832" y="3364992"/>
-            <a:ext cx="1645920" cy="475488"/>
+          <p:cNvPr id="31" name="Shape 29"/>
+          <p:cNvSpPr/>
+          <p:nvPr/>
+        </p:nvSpPr>
+        <p:spPr>
+          <a:xfrm>
+            <a:off x="3064546" y="3364992"/>
+            <a:ext cx="1005840" cy="475488"/>
           </a:xfrm>
           <a:prstGeom prst="rect">
             <a:avLst>
@@ -28610,14 +29624,14 @@
       </p:sp>
       <p:sp>
         <p:nvSpPr>
-          <p:cNvPr id="29" name="Text 27"/>
-          <p:cNvSpPr/>
-          <p:nvPr/>
-        </p:nvSpPr>
-        <p:spPr>
-          <a:xfrm>
-            <a:off x="4370832" y="3364992"/>
-            <a:ext cx="1645920" cy="475488"/>
+          <p:cNvPr id="32" name="Text 30"/>
+          <p:cNvSpPr/>
+          <p:nvPr/>
+        </p:nvSpPr>
+        <p:spPr>
+          <a:xfrm>
+            <a:off x="3064546" y="3364992"/>
+            <a:ext cx="1005840" cy="475488"/>
           </a:xfrm>
           <a:prstGeom prst="rect">
             <a:avLst/>
@@ -28641,7 +29655,7 @@
                 <a:ea typeface="Trebuchet MS" pitchFamily="34" charset="-122"/>
                 <a:cs typeface="Trebuchet MS" pitchFamily="34" charset="-120"/>
               </a:rPr>
-              <a:t>o</a:t>
+              <a:t>lec</a:t>
             </a:r>
             <a:endParaRPr lang="en-US" sz="1400" dirty="0"/>
           </a:p>
@@ -28649,14 +29663,14 @@
       </p:sp>
       <p:sp>
         <p:nvSpPr>
-          <p:cNvPr id="30" name="Text 28"/>
-          <p:cNvSpPr/>
-          <p:nvPr/>
-        </p:nvSpPr>
-        <p:spPr>
-          <a:xfrm>
-            <a:off x="6016752" y="3364992"/>
-            <a:ext cx="411480" cy="475488"/>
+          <p:cNvPr id="33" name="Text 31"/>
+          <p:cNvSpPr/>
+          <p:nvPr/>
+        </p:nvSpPr>
+        <p:spPr>
+          <a:xfrm>
+            <a:off x="4070386" y="3364992"/>
+            <a:ext cx="78377" cy="475488"/>
           </a:xfrm>
           <a:prstGeom prst="rect">
             <a:avLst/>
@@ -28688,14 +29702,14 @@
       </p:sp>
       <p:sp>
         <p:nvSpPr>
-          <p:cNvPr id="31" name="Shape 29"/>
-          <p:cNvSpPr/>
-          <p:nvPr/>
-        </p:nvSpPr>
-        <p:spPr>
-          <a:xfrm>
-            <a:off x="6428232" y="3364992"/>
-            <a:ext cx="1645920" cy="475488"/>
+          <p:cNvPr id="34" name="Shape 32"/>
+          <p:cNvSpPr/>
+          <p:nvPr/>
+        </p:nvSpPr>
+        <p:spPr>
+          <a:xfrm>
+            <a:off x="4148763" y="3364992"/>
+            <a:ext cx="1005840" cy="475488"/>
           </a:xfrm>
           <a:prstGeom prst="rect">
             <a:avLst>
@@ -28715,14 +29729,14 @@
       </p:sp>
       <p:sp>
         <p:nvSpPr>
-          <p:cNvPr id="32" name="Text 30"/>
-          <p:cNvSpPr/>
-          <p:nvPr/>
-        </p:nvSpPr>
-        <p:spPr>
-          <a:xfrm>
-            <a:off x="6428232" y="3364992"/>
-            <a:ext cx="1645920" cy="475488"/>
+          <p:cNvPr id="35" name="Text 33"/>
+          <p:cNvSpPr/>
+          <p:nvPr/>
+        </p:nvSpPr>
+        <p:spPr>
+          <a:xfrm>
+            <a:off x="4148763" y="3364992"/>
+            <a:ext cx="1005840" cy="475488"/>
           </a:xfrm>
           <a:prstGeom prst="rect">
             <a:avLst/>
@@ -28746,6 +29760,321 @@
                 <a:ea typeface="Trebuchet MS" pitchFamily="34" charset="-122"/>
                 <a:cs typeface="Trebuchet MS" pitchFamily="34" charset="-120"/>
               </a:rPr>
+              <a:t>tro</a:t>
+            </a:r>
+            <a:endParaRPr lang="en-US" sz="1400" dirty="0"/>
+          </a:p>
+        </p:txBody>
+      </p:sp>
+      <p:sp>
+        <p:nvSpPr>
+          <p:cNvPr id="36" name="Text 34"/>
+          <p:cNvSpPr/>
+          <p:nvPr/>
+        </p:nvSpPr>
+        <p:spPr>
+          <a:xfrm>
+            <a:off x="5154603" y="3364992"/>
+            <a:ext cx="78377" cy="475488"/>
+          </a:xfrm>
+          <a:prstGeom prst="rect">
+            <a:avLst/>
+          </a:prstGeom>
+          <a:noFill/>
+          <a:ln/>
+        </p:spPr>
+        <p:txBody>
+          <a:bodyPr wrap="square" lIns="0" tIns="0" rIns="0" bIns="0" rtlCol="0" anchor="ctr"/>
+          <a:lstStyle/>
+          <a:p>
+            <a:pPr algn="ctr" indent="0" marL="0">
+              <a:buNone/>
+            </a:pPr>
+            <a:r>
+              <a:rPr lang="en-US" sz="1600" b="1" dirty="0">
+                <a:solidFill>
+                  <a:srgbClr val="0D9488"/>
+                </a:solidFill>
+                <a:latin typeface="Trebuchet MS" pitchFamily="34" charset="0"/>
+                <a:ea typeface="Trebuchet MS" pitchFamily="34" charset="-122"/>
+                <a:cs typeface="Trebuchet MS" pitchFamily="34" charset="-120"/>
+              </a:rPr>
+              <a:t>·</a:t>
+            </a:r>
+            <a:endParaRPr lang="en-US" sz="1600" dirty="0"/>
+          </a:p>
+        </p:txBody>
+      </p:sp>
+      <p:sp>
+        <p:nvSpPr>
+          <p:cNvPr id="37" name="Shape 35"/>
+          <p:cNvSpPr/>
+          <p:nvPr/>
+        </p:nvSpPr>
+        <p:spPr>
+          <a:xfrm>
+            <a:off x="5232981" y="3364992"/>
+            <a:ext cx="1005840" cy="475488"/>
+          </a:xfrm>
+          <a:prstGeom prst="rect">
+            <a:avLst>
+              <a:gd name="adj" fmla="val 9615"/>
+            </a:avLst>
+          </a:prstGeom>
+          <a:solidFill>
+            <a:srgbClr val="FFFFFF"/>
+          </a:solidFill>
+          <a:ln w="12700">
+            <a:solidFill>
+              <a:srgbClr val="0D9488"/>
+            </a:solidFill>
+            <a:prstDash val="solid"/>
+          </a:ln>
+        </p:spPr>
+      </p:sp>
+      <p:sp>
+        <p:nvSpPr>
+          <p:cNvPr id="38" name="Text 36"/>
+          <p:cNvSpPr/>
+          <p:nvPr/>
+        </p:nvSpPr>
+        <p:spPr>
+          <a:xfrm>
+            <a:off x="5232981" y="3364992"/>
+            <a:ext cx="1005840" cy="475488"/>
+          </a:xfrm>
+          <a:prstGeom prst="rect">
+            <a:avLst/>
+          </a:prstGeom>
+          <a:noFill/>
+          <a:ln/>
+        </p:spPr>
+        <p:txBody>
+          <a:bodyPr wrap="square" lIns="0" tIns="0" rIns="0" bIns="0" rtlCol="0" anchor="ctr"/>
+          <a:lstStyle/>
+          <a:p>
+            <a:pPr algn="ctr" indent="0" marL="0">
+              <a:buNone/>
+            </a:pPr>
+            <a:r>
+              <a:rPr lang="en-US" sz="1400" b="1" dirty="0">
+                <a:solidFill>
+                  <a:srgbClr val="0D9488"/>
+                </a:solidFill>
+                <a:latin typeface="Trebuchet MS" pitchFamily="34" charset="0"/>
+                <a:ea typeface="Trebuchet MS" pitchFamily="34" charset="-122"/>
+                <a:cs typeface="Trebuchet MS" pitchFamily="34" charset="-120"/>
+              </a:rPr>
+              <a:t>steth</a:t>
+            </a:r>
+            <a:endParaRPr lang="en-US" sz="1400" dirty="0"/>
+          </a:p>
+        </p:txBody>
+      </p:sp>
+      <p:sp>
+        <p:nvSpPr>
+          <p:cNvPr id="39" name="Text 37"/>
+          <p:cNvSpPr/>
+          <p:nvPr/>
+        </p:nvSpPr>
+        <p:spPr>
+          <a:xfrm>
+            <a:off x="6238821" y="3364992"/>
+            <a:ext cx="78377" cy="475488"/>
+          </a:xfrm>
+          <a:prstGeom prst="rect">
+            <a:avLst/>
+          </a:prstGeom>
+          <a:noFill/>
+          <a:ln/>
+        </p:spPr>
+        <p:txBody>
+          <a:bodyPr wrap="square" lIns="0" tIns="0" rIns="0" bIns="0" rtlCol="0" anchor="ctr"/>
+          <a:lstStyle/>
+          <a:p>
+            <a:pPr algn="ctr" indent="0" marL="0">
+              <a:buNone/>
+            </a:pPr>
+            <a:r>
+              <a:rPr lang="en-US" sz="1600" b="1" dirty="0">
+                <a:solidFill>
+                  <a:srgbClr val="0D9488"/>
+                </a:solidFill>
+                <a:latin typeface="Trebuchet MS" pitchFamily="34" charset="0"/>
+                <a:ea typeface="Trebuchet MS" pitchFamily="34" charset="-122"/>
+                <a:cs typeface="Trebuchet MS" pitchFamily="34" charset="-120"/>
+              </a:rPr>
+              <a:t>·</a:t>
+            </a:r>
+            <a:endParaRPr lang="en-US" sz="1600" dirty="0"/>
+          </a:p>
+        </p:txBody>
+      </p:sp>
+      <p:sp>
+        <p:nvSpPr>
+          <p:cNvPr id="40" name="Shape 38"/>
+          <p:cNvSpPr/>
+          <p:nvPr/>
+        </p:nvSpPr>
+        <p:spPr>
+          <a:xfrm>
+            <a:off x="6317198" y="3364992"/>
+            <a:ext cx="1005840" cy="475488"/>
+          </a:xfrm>
+          <a:prstGeom prst="rect">
+            <a:avLst>
+              <a:gd name="adj" fmla="val 9615"/>
+            </a:avLst>
+          </a:prstGeom>
+          <a:solidFill>
+            <a:srgbClr val="FFFFFF"/>
+          </a:solidFill>
+          <a:ln w="12700">
+            <a:solidFill>
+              <a:srgbClr val="0D9488"/>
+            </a:solidFill>
+            <a:prstDash val="solid"/>
+          </a:ln>
+        </p:spPr>
+      </p:sp>
+      <p:sp>
+        <p:nvSpPr>
+          <p:cNvPr id="41" name="Text 39"/>
+          <p:cNvSpPr/>
+          <p:nvPr/>
+        </p:nvSpPr>
+        <p:spPr>
+          <a:xfrm>
+            <a:off x="6317198" y="3364992"/>
+            <a:ext cx="1005840" cy="475488"/>
+          </a:xfrm>
+          <a:prstGeom prst="rect">
+            <a:avLst/>
+          </a:prstGeom>
+          <a:noFill/>
+          <a:ln/>
+        </p:spPr>
+        <p:txBody>
+          <a:bodyPr wrap="square" lIns="0" tIns="0" rIns="0" bIns="0" rtlCol="0" anchor="ctr"/>
+          <a:lstStyle/>
+          <a:p>
+            <a:pPr algn="ctr" indent="0" marL="0">
+              <a:buNone/>
+            </a:pPr>
+            <a:r>
+              <a:rPr lang="en-US" sz="1400" b="1" dirty="0">
+                <a:solidFill>
+                  <a:srgbClr val="0D9488"/>
+                </a:solidFill>
+                <a:latin typeface="Trebuchet MS" pitchFamily="34" charset="0"/>
+                <a:ea typeface="Trebuchet MS" pitchFamily="34" charset="-122"/>
+                <a:cs typeface="Trebuchet MS" pitchFamily="34" charset="-120"/>
+              </a:rPr>
+              <a:t>o</a:t>
+            </a:r>
+            <a:endParaRPr lang="en-US" sz="1400" dirty="0"/>
+          </a:p>
+        </p:txBody>
+      </p:sp>
+      <p:sp>
+        <p:nvSpPr>
+          <p:cNvPr id="42" name="Text 40"/>
+          <p:cNvSpPr/>
+          <p:nvPr/>
+        </p:nvSpPr>
+        <p:spPr>
+          <a:xfrm>
+            <a:off x="7323038" y="3364992"/>
+            <a:ext cx="78377" cy="475488"/>
+          </a:xfrm>
+          <a:prstGeom prst="rect">
+            <a:avLst/>
+          </a:prstGeom>
+          <a:noFill/>
+          <a:ln/>
+        </p:spPr>
+        <p:txBody>
+          <a:bodyPr wrap="square" lIns="0" tIns="0" rIns="0" bIns="0" rtlCol="0" anchor="ctr"/>
+          <a:lstStyle/>
+          <a:p>
+            <a:pPr algn="ctr" indent="0" marL="0">
+              <a:buNone/>
+            </a:pPr>
+            <a:r>
+              <a:rPr lang="en-US" sz="1600" b="1" dirty="0">
+                <a:solidFill>
+                  <a:srgbClr val="0D9488"/>
+                </a:solidFill>
+                <a:latin typeface="Trebuchet MS" pitchFamily="34" charset="0"/>
+                <a:ea typeface="Trebuchet MS" pitchFamily="34" charset="-122"/>
+                <a:cs typeface="Trebuchet MS" pitchFamily="34" charset="-120"/>
+              </a:rPr>
+              <a:t>·</a:t>
+            </a:r>
+            <a:endParaRPr lang="en-US" sz="1600" dirty="0"/>
+          </a:p>
+        </p:txBody>
+      </p:sp>
+      <p:sp>
+        <p:nvSpPr>
+          <p:cNvPr id="43" name="Shape 41"/>
+          <p:cNvSpPr/>
+          <p:nvPr/>
+        </p:nvSpPr>
+        <p:spPr>
+          <a:xfrm>
+            <a:off x="7401415" y="3364992"/>
+            <a:ext cx="1005840" cy="475488"/>
+          </a:xfrm>
+          <a:prstGeom prst="rect">
+            <a:avLst>
+              <a:gd name="adj" fmla="val 9615"/>
+            </a:avLst>
+          </a:prstGeom>
+          <a:solidFill>
+            <a:srgbClr val="FFFFFF"/>
+          </a:solidFill>
+          <a:ln w="12700">
+            <a:solidFill>
+              <a:srgbClr val="0D9488"/>
+            </a:solidFill>
+            <a:prstDash val="solid"/>
+          </a:ln>
+        </p:spPr>
+      </p:sp>
+      <p:sp>
+        <p:nvSpPr>
+          <p:cNvPr id="44" name="Text 42"/>
+          <p:cNvSpPr/>
+          <p:nvPr/>
+        </p:nvSpPr>
+        <p:spPr>
+          <a:xfrm>
+            <a:off x="7401415" y="3364992"/>
+            <a:ext cx="1005840" cy="475488"/>
+          </a:xfrm>
+          <a:prstGeom prst="rect">
+            <a:avLst/>
+          </a:prstGeom>
+          <a:noFill/>
+          <a:ln/>
+        </p:spPr>
+        <p:txBody>
+          <a:bodyPr wrap="square" lIns="0" tIns="0" rIns="0" bIns="0" rtlCol="0" anchor="ctr"/>
+          <a:lstStyle/>
+          <a:p>
+            <a:pPr algn="ctr" indent="0" marL="0">
+              <a:buNone/>
+            </a:pPr>
+            <a:r>
+              <a:rPr lang="en-US" sz="1400" b="1" dirty="0">
+                <a:solidFill>
+                  <a:srgbClr val="0D9488"/>
+                </a:solidFill>
+                <a:latin typeface="Trebuchet MS" pitchFamily="34" charset="0"/>
+                <a:ea typeface="Trebuchet MS" pitchFamily="34" charset="-122"/>
+                <a:cs typeface="Trebuchet MS" pitchFamily="34" charset="-120"/>
+              </a:rPr>
               <a:t>scope</a:t>
             </a:r>
             <a:endParaRPr lang="en-US" sz="1400" dirty="0"/>
@@ -28754,7 +30083,7 @@
       </p:sp>
       <p:sp>
         <p:nvSpPr>
-          <p:cNvPr id="33" name="Shape 31"/>
+          <p:cNvPr id="45" name="Shape 43"/>
           <p:cNvSpPr/>
           <p:nvPr/>
         </p:nvSpPr>
@@ -28781,7 +30110,7 @@
       </p:sp>
       <p:sp>
         <p:nvSpPr>
-          <p:cNvPr id="34" name="Text 32"/>
+          <p:cNvPr id="46" name="Text 44"/>
           <p:cNvSpPr/>
           <p:nvPr/>
         </p:nvSpPr>
@@ -28820,7 +30149,7 @@
       </p:sp>
       <p:sp>
         <p:nvSpPr>
-          <p:cNvPr id="35" name="Shape 33"/>
+          <p:cNvPr id="47" name="Shape 45"/>
           <p:cNvSpPr/>
           <p:nvPr/>
         </p:nvSpPr>
@@ -28847,14 +30176,14 @@
       </p:sp>
       <p:sp>
         <p:nvSpPr>
-          <p:cNvPr id="36" name="Shape 34"/>
-          <p:cNvSpPr/>
-          <p:nvPr/>
-        </p:nvSpPr>
-        <p:spPr>
-          <a:xfrm>
-            <a:off x="2023872" y="4169664"/>
-            <a:ext cx="685800" cy="384048"/>
+          <p:cNvPr id="48" name="Shape 46"/>
+          <p:cNvSpPr/>
+          <p:nvPr/>
+        </p:nvSpPr>
+        <p:spPr>
+          <a:xfrm>
+            <a:off x="1953387" y="4169664"/>
+            <a:ext cx="384048" cy="384048"/>
           </a:xfrm>
           <a:prstGeom prst="rect">
             <a:avLst>
@@ -28874,14 +30203,14 @@
       </p:sp>
       <p:sp>
         <p:nvSpPr>
-          <p:cNvPr id="37" name="Text 35"/>
-          <p:cNvSpPr/>
-          <p:nvPr/>
-        </p:nvSpPr>
-        <p:spPr>
-          <a:xfrm>
-            <a:off x="2023872" y="4169664"/>
-            <a:ext cx="685800" cy="384048"/>
+          <p:cNvPr id="49" name="Text 47"/>
+          <p:cNvSpPr/>
+          <p:nvPr/>
+        </p:nvSpPr>
+        <p:spPr>
+          <a:xfrm>
+            <a:off x="1953387" y="4169664"/>
+            <a:ext cx="384048" cy="384048"/>
           </a:xfrm>
           <a:prstGeom prst="rect">
             <a:avLst/>
@@ -28905,7 +30234,7 @@
                 <a:ea typeface="Trebuchet MS" pitchFamily="34" charset="-122"/>
                 <a:cs typeface="Trebuchet MS" pitchFamily="34" charset="-120"/>
               </a:rPr>
-              <a:t>s</a:t>
+              <a:t>e</a:t>
             </a:r>
             <a:endParaRPr lang="en-US" sz="900" dirty="0"/>
           </a:p>
@@ -28913,14 +30242,14 @@
       </p:sp>
       <p:sp>
         <p:nvSpPr>
-          <p:cNvPr id="38" name="Shape 36"/>
-          <p:cNvSpPr/>
-          <p:nvPr/>
-        </p:nvSpPr>
-        <p:spPr>
-          <a:xfrm>
-            <a:off x="2831592" y="4169664"/>
-            <a:ext cx="685800" cy="384048"/>
+          <p:cNvPr id="50" name="Shape 48"/>
+          <p:cNvSpPr/>
+          <p:nvPr/>
+        </p:nvSpPr>
+        <p:spPr>
+          <a:xfrm>
+            <a:off x="2388870" y="4169664"/>
+            <a:ext cx="384048" cy="384048"/>
           </a:xfrm>
           <a:prstGeom prst="rect">
             <a:avLst>
@@ -28940,14 +30269,14 @@
       </p:sp>
       <p:sp>
         <p:nvSpPr>
-          <p:cNvPr id="39" name="Text 37"/>
-          <p:cNvSpPr/>
-          <p:nvPr/>
-        </p:nvSpPr>
-        <p:spPr>
-          <a:xfrm>
-            <a:off x="2831592" y="4169664"/>
-            <a:ext cx="685800" cy="384048"/>
+          <p:cNvPr id="51" name="Text 49"/>
+          <p:cNvSpPr/>
+          <p:nvPr/>
+        </p:nvSpPr>
+        <p:spPr>
+          <a:xfrm>
+            <a:off x="2388870" y="4169664"/>
+            <a:ext cx="384048" cy="384048"/>
           </a:xfrm>
           <a:prstGeom prst="rect">
             <a:avLst/>
@@ -28971,7 +30300,7 @@
                 <a:ea typeface="Trebuchet MS" pitchFamily="34" charset="-122"/>
                 <a:cs typeface="Trebuchet MS" pitchFamily="34" charset="-120"/>
               </a:rPr>
-              <a:t>t</a:t>
+              <a:t>l</a:t>
             </a:r>
             <a:endParaRPr lang="en-US" sz="900" dirty="0"/>
           </a:p>
@@ -28979,14 +30308,14 @@
       </p:sp>
       <p:sp>
         <p:nvSpPr>
-          <p:cNvPr id="40" name="Shape 38"/>
-          <p:cNvSpPr/>
-          <p:nvPr/>
-        </p:nvSpPr>
-        <p:spPr>
-          <a:xfrm>
-            <a:off x="3639312" y="4169664"/>
-            <a:ext cx="685800" cy="384048"/>
+          <p:cNvPr id="52" name="Shape 50"/>
+          <p:cNvSpPr/>
+          <p:nvPr/>
+        </p:nvSpPr>
+        <p:spPr>
+          <a:xfrm>
+            <a:off x="2824353" y="4169664"/>
+            <a:ext cx="384048" cy="384048"/>
           </a:xfrm>
           <a:prstGeom prst="rect">
             <a:avLst>
@@ -29006,14 +30335,14 @@
       </p:sp>
       <p:sp>
         <p:nvSpPr>
-          <p:cNvPr id="41" name="Text 39"/>
-          <p:cNvSpPr/>
-          <p:nvPr/>
-        </p:nvSpPr>
-        <p:spPr>
-          <a:xfrm>
-            <a:off x="3639312" y="4169664"/>
-            <a:ext cx="685800" cy="384048"/>
+          <p:cNvPr id="53" name="Text 51"/>
+          <p:cNvSpPr/>
+          <p:nvPr/>
+        </p:nvSpPr>
+        <p:spPr>
+          <a:xfrm>
+            <a:off x="2824353" y="4169664"/>
+            <a:ext cx="384048" cy="384048"/>
           </a:xfrm>
           <a:prstGeom prst="rect">
             <a:avLst/>
@@ -29045,14 +30374,14 @@
       </p:sp>
       <p:sp>
         <p:nvSpPr>
-          <p:cNvPr id="42" name="Shape 40"/>
-          <p:cNvSpPr/>
-          <p:nvPr/>
-        </p:nvSpPr>
-        <p:spPr>
-          <a:xfrm>
-            <a:off x="4447032" y="4169664"/>
-            <a:ext cx="685800" cy="384048"/>
+          <p:cNvPr id="54" name="Shape 52"/>
+          <p:cNvSpPr/>
+          <p:nvPr/>
+        </p:nvSpPr>
+        <p:spPr>
+          <a:xfrm>
+            <a:off x="3259836" y="4169664"/>
+            <a:ext cx="384048" cy="384048"/>
           </a:xfrm>
           <a:prstGeom prst="rect">
             <a:avLst>
@@ -29072,14 +30401,14 @@
       </p:sp>
       <p:sp>
         <p:nvSpPr>
-          <p:cNvPr id="43" name="Text 41"/>
-          <p:cNvSpPr/>
-          <p:nvPr/>
-        </p:nvSpPr>
-        <p:spPr>
-          <a:xfrm>
-            <a:off x="4447032" y="4169664"/>
-            <a:ext cx="685800" cy="384048"/>
+          <p:cNvPr id="55" name="Text 53"/>
+          <p:cNvSpPr/>
+          <p:nvPr/>
+        </p:nvSpPr>
+        <p:spPr>
+          <a:xfrm>
+            <a:off x="3259836" y="4169664"/>
+            <a:ext cx="384048" cy="384048"/>
           </a:xfrm>
           <a:prstGeom prst="rect">
             <a:avLst/>
@@ -29103,7 +30432,7 @@
                 <a:ea typeface="Trebuchet MS" pitchFamily="34" charset="-122"/>
                 <a:cs typeface="Trebuchet MS" pitchFamily="34" charset="-120"/>
               </a:rPr>
-              <a:t>th</a:t>
+              <a:t>c</a:t>
             </a:r>
             <a:endParaRPr lang="en-US" sz="900" dirty="0"/>
           </a:p>
@@ -29111,14 +30440,53 @@
       </p:sp>
       <p:sp>
         <p:nvSpPr>
-          <p:cNvPr id="44" name="Shape 42"/>
-          <p:cNvSpPr/>
-          <p:nvPr/>
-        </p:nvSpPr>
-        <p:spPr>
-          <a:xfrm>
-            <a:off x="5254752" y="4169664"/>
-            <a:ext cx="685800" cy="384048"/>
+          <p:cNvPr id="56" name="Text 54"/>
+          <p:cNvSpPr/>
+          <p:nvPr/>
+        </p:nvSpPr>
+        <p:spPr>
+          <a:xfrm>
+            <a:off x="3259836" y="4572000"/>
+            <a:ext cx="384048" cy="219456"/>
+          </a:xfrm>
+          <a:prstGeom prst="rect">
+            <a:avLst/>
+          </a:prstGeom>
+          <a:noFill/>
+          <a:ln/>
+        </p:spPr>
+        <p:txBody>
+          <a:bodyPr wrap="square" lIns="0" tIns="0" rIns="0" bIns="0" rtlCol="0" anchor="t"/>
+          <a:lstStyle/>
+          <a:p>
+            <a:pPr algn="ctr" indent="0" marL="0">
+              <a:buNone/>
+            </a:pPr>
+            <a:r>
+              <a:rPr lang="en-US" sz="750" i="1" dirty="0">
+                <a:solidFill>
+                  <a:srgbClr val="94A3B8"/>
+                </a:solidFill>
+                <a:latin typeface="Calibri" pitchFamily="34" charset="0"/>
+                <a:ea typeface="Calibri" pitchFamily="34" charset="-122"/>
+                <a:cs typeface="Calibri" pitchFamily="34" charset="-120"/>
+              </a:rPr>
+              <a:t>/k/</a:t>
+            </a:r>
+            <a:endParaRPr lang="en-US" sz="750" dirty="0"/>
+          </a:p>
+        </p:txBody>
+      </p:sp>
+      <p:sp>
+        <p:nvSpPr>
+          <p:cNvPr id="57" name="Shape 55"/>
+          <p:cNvSpPr/>
+          <p:nvPr/>
+        </p:nvSpPr>
+        <p:spPr>
+          <a:xfrm>
+            <a:off x="3695319" y="4169664"/>
+            <a:ext cx="384048" cy="384048"/>
           </a:xfrm>
           <a:prstGeom prst="rect">
             <a:avLst>
@@ -29138,14 +30506,14 @@
       </p:sp>
       <p:sp>
         <p:nvSpPr>
-          <p:cNvPr id="45" name="Text 43"/>
-          <p:cNvSpPr/>
-          <p:nvPr/>
-        </p:nvSpPr>
-        <p:spPr>
-          <a:xfrm>
-            <a:off x="5254752" y="4169664"/>
-            <a:ext cx="685800" cy="384048"/>
+          <p:cNvPr id="58" name="Text 56"/>
+          <p:cNvSpPr/>
+          <p:nvPr/>
+        </p:nvSpPr>
+        <p:spPr>
+          <a:xfrm>
+            <a:off x="3695319" y="4169664"/>
+            <a:ext cx="384048" cy="384048"/>
           </a:xfrm>
           <a:prstGeom prst="rect">
             <a:avLst/>
@@ -29169,7 +30537,7 @@
                 <a:ea typeface="Trebuchet MS" pitchFamily="34" charset="-122"/>
                 <a:cs typeface="Trebuchet MS" pitchFamily="34" charset="-120"/>
               </a:rPr>
-              <a:t>o</a:t>
+              <a:t>t</a:t>
             </a:r>
             <a:endParaRPr lang="en-US" sz="900" dirty="0"/>
           </a:p>
@@ -29177,14 +30545,14 @@
       </p:sp>
       <p:sp>
         <p:nvSpPr>
-          <p:cNvPr id="46" name="Shape 44"/>
-          <p:cNvSpPr/>
-          <p:nvPr/>
-        </p:nvSpPr>
-        <p:spPr>
-          <a:xfrm>
-            <a:off x="6062472" y="4169664"/>
-            <a:ext cx="685800" cy="384048"/>
+          <p:cNvPr id="59" name="Shape 57"/>
+          <p:cNvSpPr/>
+          <p:nvPr/>
+        </p:nvSpPr>
+        <p:spPr>
+          <a:xfrm>
+            <a:off x="4130802" y="4169664"/>
+            <a:ext cx="384048" cy="384048"/>
           </a:xfrm>
           <a:prstGeom prst="rect">
             <a:avLst>
@@ -29204,14 +30572,14 @@
       </p:sp>
       <p:sp>
         <p:nvSpPr>
-          <p:cNvPr id="47" name="Text 45"/>
-          <p:cNvSpPr/>
-          <p:nvPr/>
-        </p:nvSpPr>
-        <p:spPr>
-          <a:xfrm>
-            <a:off x="6062472" y="4169664"/>
-            <a:ext cx="685800" cy="384048"/>
+          <p:cNvPr id="60" name="Text 58"/>
+          <p:cNvSpPr/>
+          <p:nvPr/>
+        </p:nvSpPr>
+        <p:spPr>
+          <a:xfrm>
+            <a:off x="4130802" y="4169664"/>
+            <a:ext cx="384048" cy="384048"/>
           </a:xfrm>
           <a:prstGeom prst="rect">
             <a:avLst/>
@@ -29235,6 +30603,468 @@
                 <a:ea typeface="Trebuchet MS" pitchFamily="34" charset="-122"/>
                 <a:cs typeface="Trebuchet MS" pitchFamily="34" charset="-120"/>
               </a:rPr>
+              <a:t>r</a:t>
+            </a:r>
+            <a:endParaRPr lang="en-US" sz="900" dirty="0"/>
+          </a:p>
+        </p:txBody>
+      </p:sp>
+      <p:sp>
+        <p:nvSpPr>
+          <p:cNvPr id="61" name="Shape 59"/>
+          <p:cNvSpPr/>
+          <p:nvPr/>
+        </p:nvSpPr>
+        <p:spPr>
+          <a:xfrm>
+            <a:off x="4566285" y="4169664"/>
+            <a:ext cx="384048" cy="384048"/>
+          </a:xfrm>
+          <a:prstGeom prst="rect">
+            <a:avLst>
+              <a:gd name="adj" fmla="val 9524"/>
+            </a:avLst>
+          </a:prstGeom>
+          <a:solidFill>
+            <a:srgbClr val="FFFFFF"/>
+          </a:solidFill>
+          <a:ln w="12700">
+            <a:solidFill>
+              <a:srgbClr val="DB2777"/>
+            </a:solidFill>
+            <a:prstDash val="solid"/>
+          </a:ln>
+        </p:spPr>
+      </p:sp>
+      <p:sp>
+        <p:nvSpPr>
+          <p:cNvPr id="62" name="Text 60"/>
+          <p:cNvSpPr/>
+          <p:nvPr/>
+        </p:nvSpPr>
+        <p:spPr>
+          <a:xfrm>
+            <a:off x="4566285" y="4169664"/>
+            <a:ext cx="384048" cy="384048"/>
+          </a:xfrm>
+          <a:prstGeom prst="rect">
+            <a:avLst/>
+          </a:prstGeom>
+          <a:noFill/>
+          <a:ln/>
+        </p:spPr>
+        <p:txBody>
+          <a:bodyPr wrap="square" lIns="0" tIns="0" rIns="0" bIns="0" rtlCol="0" anchor="ctr"/>
+          <a:lstStyle/>
+          <a:p>
+            <a:pPr algn="ctr" indent="0" marL="0">
+              <a:buNone/>
+            </a:pPr>
+            <a:r>
+              <a:rPr lang="en-US" sz="900" b="1" dirty="0">
+                <a:solidFill>
+                  <a:srgbClr val="9D174D"/>
+                </a:solidFill>
+                <a:latin typeface="Trebuchet MS" pitchFamily="34" charset="0"/>
+                <a:ea typeface="Trebuchet MS" pitchFamily="34" charset="-122"/>
+                <a:cs typeface="Trebuchet MS" pitchFamily="34" charset="-120"/>
+              </a:rPr>
+              <a:t>o</a:t>
+            </a:r>
+            <a:endParaRPr lang="en-US" sz="900" dirty="0"/>
+          </a:p>
+        </p:txBody>
+      </p:sp>
+      <p:sp>
+        <p:nvSpPr>
+          <p:cNvPr id="63" name="Shape 61"/>
+          <p:cNvSpPr/>
+          <p:nvPr/>
+        </p:nvSpPr>
+        <p:spPr>
+          <a:xfrm>
+            <a:off x="5001768" y="4169664"/>
+            <a:ext cx="384048" cy="384048"/>
+          </a:xfrm>
+          <a:prstGeom prst="rect">
+            <a:avLst>
+              <a:gd name="adj" fmla="val 9524"/>
+            </a:avLst>
+          </a:prstGeom>
+          <a:solidFill>
+            <a:srgbClr val="FFFFFF"/>
+          </a:solidFill>
+          <a:ln w="12700">
+            <a:solidFill>
+              <a:srgbClr val="DB2777"/>
+            </a:solidFill>
+            <a:prstDash val="solid"/>
+          </a:ln>
+        </p:spPr>
+      </p:sp>
+      <p:sp>
+        <p:nvSpPr>
+          <p:cNvPr id="64" name="Text 62"/>
+          <p:cNvSpPr/>
+          <p:nvPr/>
+        </p:nvSpPr>
+        <p:spPr>
+          <a:xfrm>
+            <a:off x="5001768" y="4169664"/>
+            <a:ext cx="384048" cy="384048"/>
+          </a:xfrm>
+          <a:prstGeom prst="rect">
+            <a:avLst/>
+          </a:prstGeom>
+          <a:noFill/>
+          <a:ln/>
+        </p:spPr>
+        <p:txBody>
+          <a:bodyPr wrap="square" lIns="0" tIns="0" rIns="0" bIns="0" rtlCol="0" anchor="ctr"/>
+          <a:lstStyle/>
+          <a:p>
+            <a:pPr algn="ctr" indent="0" marL="0">
+              <a:buNone/>
+            </a:pPr>
+            <a:r>
+              <a:rPr lang="en-US" sz="900" b="1" dirty="0">
+                <a:solidFill>
+                  <a:srgbClr val="9D174D"/>
+                </a:solidFill>
+                <a:latin typeface="Trebuchet MS" pitchFamily="34" charset="0"/>
+                <a:ea typeface="Trebuchet MS" pitchFamily="34" charset="-122"/>
+                <a:cs typeface="Trebuchet MS" pitchFamily="34" charset="-120"/>
+              </a:rPr>
+              <a:t>s</a:t>
+            </a:r>
+            <a:endParaRPr lang="en-US" sz="900" dirty="0"/>
+          </a:p>
+        </p:txBody>
+      </p:sp>
+      <p:sp>
+        <p:nvSpPr>
+          <p:cNvPr id="65" name="Shape 63"/>
+          <p:cNvSpPr/>
+          <p:nvPr/>
+        </p:nvSpPr>
+        <p:spPr>
+          <a:xfrm>
+            <a:off x="5437251" y="4169664"/>
+            <a:ext cx="384048" cy="384048"/>
+          </a:xfrm>
+          <a:prstGeom prst="rect">
+            <a:avLst>
+              <a:gd name="adj" fmla="val 9524"/>
+            </a:avLst>
+          </a:prstGeom>
+          <a:solidFill>
+            <a:srgbClr val="FFFFFF"/>
+          </a:solidFill>
+          <a:ln w="12700">
+            <a:solidFill>
+              <a:srgbClr val="DB2777"/>
+            </a:solidFill>
+            <a:prstDash val="solid"/>
+          </a:ln>
+        </p:spPr>
+      </p:sp>
+      <p:sp>
+        <p:nvSpPr>
+          <p:cNvPr id="66" name="Text 64"/>
+          <p:cNvSpPr/>
+          <p:nvPr/>
+        </p:nvSpPr>
+        <p:spPr>
+          <a:xfrm>
+            <a:off x="5437251" y="4169664"/>
+            <a:ext cx="384048" cy="384048"/>
+          </a:xfrm>
+          <a:prstGeom prst="rect">
+            <a:avLst/>
+          </a:prstGeom>
+          <a:noFill/>
+          <a:ln/>
+        </p:spPr>
+        <p:txBody>
+          <a:bodyPr wrap="square" lIns="0" tIns="0" rIns="0" bIns="0" rtlCol="0" anchor="ctr"/>
+          <a:lstStyle/>
+          <a:p>
+            <a:pPr algn="ctr" indent="0" marL="0">
+              <a:buNone/>
+            </a:pPr>
+            <a:r>
+              <a:rPr lang="en-US" sz="900" b="1" dirty="0">
+                <a:solidFill>
+                  <a:srgbClr val="9D174D"/>
+                </a:solidFill>
+                <a:latin typeface="Trebuchet MS" pitchFamily="34" charset="0"/>
+                <a:ea typeface="Trebuchet MS" pitchFamily="34" charset="-122"/>
+                <a:cs typeface="Trebuchet MS" pitchFamily="34" charset="-120"/>
+              </a:rPr>
+              <a:t>t</a:t>
+            </a:r>
+            <a:endParaRPr lang="en-US" sz="900" dirty="0"/>
+          </a:p>
+        </p:txBody>
+      </p:sp>
+      <p:sp>
+        <p:nvSpPr>
+          <p:cNvPr id="67" name="Shape 65"/>
+          <p:cNvSpPr/>
+          <p:nvPr/>
+        </p:nvSpPr>
+        <p:spPr>
+          <a:xfrm>
+            <a:off x="5872734" y="4169664"/>
+            <a:ext cx="384048" cy="384048"/>
+          </a:xfrm>
+          <a:prstGeom prst="rect">
+            <a:avLst>
+              <a:gd name="adj" fmla="val 9524"/>
+            </a:avLst>
+          </a:prstGeom>
+          <a:solidFill>
+            <a:srgbClr val="FFFFFF"/>
+          </a:solidFill>
+          <a:ln w="12700">
+            <a:solidFill>
+              <a:srgbClr val="DB2777"/>
+            </a:solidFill>
+            <a:prstDash val="solid"/>
+          </a:ln>
+        </p:spPr>
+      </p:sp>
+      <p:sp>
+        <p:nvSpPr>
+          <p:cNvPr id="68" name="Text 66"/>
+          <p:cNvSpPr/>
+          <p:nvPr/>
+        </p:nvSpPr>
+        <p:spPr>
+          <a:xfrm>
+            <a:off x="5872734" y="4169664"/>
+            <a:ext cx="384048" cy="384048"/>
+          </a:xfrm>
+          <a:prstGeom prst="rect">
+            <a:avLst/>
+          </a:prstGeom>
+          <a:noFill/>
+          <a:ln/>
+        </p:spPr>
+        <p:txBody>
+          <a:bodyPr wrap="square" lIns="0" tIns="0" rIns="0" bIns="0" rtlCol="0" anchor="ctr"/>
+          <a:lstStyle/>
+          <a:p>
+            <a:pPr algn="ctr" indent="0" marL="0">
+              <a:buNone/>
+            </a:pPr>
+            <a:r>
+              <a:rPr lang="en-US" sz="900" b="1" dirty="0">
+                <a:solidFill>
+                  <a:srgbClr val="9D174D"/>
+                </a:solidFill>
+                <a:latin typeface="Trebuchet MS" pitchFamily="34" charset="0"/>
+                <a:ea typeface="Trebuchet MS" pitchFamily="34" charset="-122"/>
+                <a:cs typeface="Trebuchet MS" pitchFamily="34" charset="-120"/>
+              </a:rPr>
+              <a:t>e</a:t>
+            </a:r>
+            <a:endParaRPr lang="en-US" sz="900" dirty="0"/>
+          </a:p>
+        </p:txBody>
+      </p:sp>
+      <p:sp>
+        <p:nvSpPr>
+          <p:cNvPr id="69" name="Shape 67"/>
+          <p:cNvSpPr/>
+          <p:nvPr/>
+        </p:nvSpPr>
+        <p:spPr>
+          <a:xfrm>
+            <a:off x="6308217" y="4169664"/>
+            <a:ext cx="384048" cy="384048"/>
+          </a:xfrm>
+          <a:prstGeom prst="rect">
+            <a:avLst>
+              <a:gd name="adj" fmla="val 9524"/>
+            </a:avLst>
+          </a:prstGeom>
+          <a:solidFill>
+            <a:srgbClr val="FFFFFF"/>
+          </a:solidFill>
+          <a:ln w="12700">
+            <a:solidFill>
+              <a:srgbClr val="DB2777"/>
+            </a:solidFill>
+            <a:prstDash val="solid"/>
+          </a:ln>
+        </p:spPr>
+      </p:sp>
+      <p:sp>
+        <p:nvSpPr>
+          <p:cNvPr id="70" name="Text 68"/>
+          <p:cNvSpPr/>
+          <p:nvPr/>
+        </p:nvSpPr>
+        <p:spPr>
+          <a:xfrm>
+            <a:off x="6308217" y="4169664"/>
+            <a:ext cx="384048" cy="384048"/>
+          </a:xfrm>
+          <a:prstGeom prst="rect">
+            <a:avLst/>
+          </a:prstGeom>
+          <a:noFill/>
+          <a:ln/>
+        </p:spPr>
+        <p:txBody>
+          <a:bodyPr wrap="square" lIns="0" tIns="0" rIns="0" bIns="0" rtlCol="0" anchor="ctr"/>
+          <a:lstStyle/>
+          <a:p>
+            <a:pPr algn="ctr" indent="0" marL="0">
+              <a:buNone/>
+            </a:pPr>
+            <a:r>
+              <a:rPr lang="en-US" sz="900" b="1" dirty="0">
+                <a:solidFill>
+                  <a:srgbClr val="9D174D"/>
+                </a:solidFill>
+                <a:latin typeface="Trebuchet MS" pitchFamily="34" charset="0"/>
+                <a:ea typeface="Trebuchet MS" pitchFamily="34" charset="-122"/>
+                <a:cs typeface="Trebuchet MS" pitchFamily="34" charset="-120"/>
+              </a:rPr>
+              <a:t>th</a:t>
+            </a:r>
+            <a:endParaRPr lang="en-US" sz="900" dirty="0"/>
+          </a:p>
+        </p:txBody>
+      </p:sp>
+      <p:sp>
+        <p:nvSpPr>
+          <p:cNvPr id="71" name="Shape 69"/>
+          <p:cNvSpPr/>
+          <p:nvPr/>
+        </p:nvSpPr>
+        <p:spPr>
+          <a:xfrm>
+            <a:off x="6743700" y="4169664"/>
+            <a:ext cx="384048" cy="384048"/>
+          </a:xfrm>
+          <a:prstGeom prst="rect">
+            <a:avLst>
+              <a:gd name="adj" fmla="val 9524"/>
+            </a:avLst>
+          </a:prstGeom>
+          <a:solidFill>
+            <a:srgbClr val="FFFFFF"/>
+          </a:solidFill>
+          <a:ln w="12700">
+            <a:solidFill>
+              <a:srgbClr val="DB2777"/>
+            </a:solidFill>
+            <a:prstDash val="solid"/>
+          </a:ln>
+        </p:spPr>
+      </p:sp>
+      <p:sp>
+        <p:nvSpPr>
+          <p:cNvPr id="72" name="Text 70"/>
+          <p:cNvSpPr/>
+          <p:nvPr/>
+        </p:nvSpPr>
+        <p:spPr>
+          <a:xfrm>
+            <a:off x="6743700" y="4169664"/>
+            <a:ext cx="384048" cy="384048"/>
+          </a:xfrm>
+          <a:prstGeom prst="rect">
+            <a:avLst/>
+          </a:prstGeom>
+          <a:noFill/>
+          <a:ln/>
+        </p:spPr>
+        <p:txBody>
+          <a:bodyPr wrap="square" lIns="0" tIns="0" rIns="0" bIns="0" rtlCol="0" anchor="ctr"/>
+          <a:lstStyle/>
+          <a:p>
+            <a:pPr algn="ctr" indent="0" marL="0">
+              <a:buNone/>
+            </a:pPr>
+            <a:r>
+              <a:rPr lang="en-US" sz="900" b="1" dirty="0">
+                <a:solidFill>
+                  <a:srgbClr val="9D174D"/>
+                </a:solidFill>
+                <a:latin typeface="Trebuchet MS" pitchFamily="34" charset="0"/>
+                <a:ea typeface="Trebuchet MS" pitchFamily="34" charset="-122"/>
+                <a:cs typeface="Trebuchet MS" pitchFamily="34" charset="-120"/>
+              </a:rPr>
+              <a:t>o</a:t>
+            </a:r>
+            <a:endParaRPr lang="en-US" sz="900" dirty="0"/>
+          </a:p>
+        </p:txBody>
+      </p:sp>
+      <p:sp>
+        <p:nvSpPr>
+          <p:cNvPr id="73" name="Shape 71"/>
+          <p:cNvSpPr/>
+          <p:nvPr/>
+        </p:nvSpPr>
+        <p:spPr>
+          <a:xfrm>
+            <a:off x="7179183" y="4169664"/>
+            <a:ext cx="384048" cy="384048"/>
+          </a:xfrm>
+          <a:prstGeom prst="rect">
+            <a:avLst>
+              <a:gd name="adj" fmla="val 9524"/>
+            </a:avLst>
+          </a:prstGeom>
+          <a:solidFill>
+            <a:srgbClr val="FFFFFF"/>
+          </a:solidFill>
+          <a:ln w="12700">
+            <a:solidFill>
+              <a:srgbClr val="DB2777"/>
+            </a:solidFill>
+            <a:prstDash val="solid"/>
+          </a:ln>
+        </p:spPr>
+      </p:sp>
+      <p:sp>
+        <p:nvSpPr>
+          <p:cNvPr id="74" name="Text 72"/>
+          <p:cNvSpPr/>
+          <p:nvPr/>
+        </p:nvSpPr>
+        <p:spPr>
+          <a:xfrm>
+            <a:off x="7179183" y="4169664"/>
+            <a:ext cx="384048" cy="384048"/>
+          </a:xfrm>
+          <a:prstGeom prst="rect">
+            <a:avLst/>
+          </a:prstGeom>
+          <a:noFill/>
+          <a:ln/>
+        </p:spPr>
+        <p:txBody>
+          <a:bodyPr wrap="square" lIns="0" tIns="0" rIns="0" bIns="0" rtlCol="0" anchor="ctr"/>
+          <a:lstStyle/>
+          <a:p>
+            <a:pPr algn="ctr" indent="0" marL="0">
+              <a:buNone/>
+            </a:pPr>
+            <a:r>
+              <a:rPr lang="en-US" sz="900" b="1" dirty="0">
+                <a:solidFill>
+                  <a:srgbClr val="9D174D"/>
+                </a:solidFill>
+                <a:latin typeface="Trebuchet MS" pitchFamily="34" charset="0"/>
+                <a:ea typeface="Trebuchet MS" pitchFamily="34" charset="-122"/>
+                <a:cs typeface="Trebuchet MS" pitchFamily="34" charset="-120"/>
+              </a:rPr>
               <a:t>sc</a:t>
             </a:r>
             <a:endParaRPr lang="en-US" sz="900" dirty="0"/>
@@ -29243,14 +31073,14 @@
       </p:sp>
       <p:sp>
         <p:nvSpPr>
-          <p:cNvPr id="48" name="Text 46"/>
-          <p:cNvSpPr/>
-          <p:nvPr/>
-        </p:nvSpPr>
-        <p:spPr>
-          <a:xfrm>
-            <a:off x="6062472" y="4572000"/>
-            <a:ext cx="685800" cy="219456"/>
+          <p:cNvPr id="75" name="Text 73"/>
+          <p:cNvSpPr/>
+          <p:nvPr/>
+        </p:nvSpPr>
+        <p:spPr>
+          <a:xfrm>
+            <a:off x="7179183" y="4572000"/>
+            <a:ext cx="384048" cy="219456"/>
           </a:xfrm>
           <a:prstGeom prst="rect">
             <a:avLst/>
@@ -29282,14 +31112,14 @@
       </p:sp>
       <p:sp>
         <p:nvSpPr>
-          <p:cNvPr id="49" name="Shape 47"/>
-          <p:cNvSpPr/>
-          <p:nvPr/>
-        </p:nvSpPr>
-        <p:spPr>
-          <a:xfrm>
-            <a:off x="6870192" y="4169664"/>
-            <a:ext cx="685800" cy="384048"/>
+          <p:cNvPr id="76" name="Shape 74"/>
+          <p:cNvSpPr/>
+          <p:nvPr/>
+        </p:nvSpPr>
+        <p:spPr>
+          <a:xfrm>
+            <a:off x="7614666" y="4169664"/>
+            <a:ext cx="384048" cy="384048"/>
           </a:xfrm>
           <a:prstGeom prst="rect">
             <a:avLst>
@@ -29309,14 +31139,14 @@
       </p:sp>
       <p:sp>
         <p:nvSpPr>
-          <p:cNvPr id="50" name="Text 48"/>
-          <p:cNvSpPr/>
-          <p:nvPr/>
-        </p:nvSpPr>
-        <p:spPr>
-          <a:xfrm>
-            <a:off x="6870192" y="4169664"/>
-            <a:ext cx="685800" cy="384048"/>
+          <p:cNvPr id="77" name="Text 75"/>
+          <p:cNvSpPr/>
+          <p:nvPr/>
+        </p:nvSpPr>
+        <p:spPr>
+          <a:xfrm>
+            <a:off x="7614666" y="4169664"/>
+            <a:ext cx="384048" cy="384048"/>
           </a:xfrm>
           <a:prstGeom prst="rect">
             <a:avLst/>
@@ -29348,14 +31178,14 @@
       </p:sp>
       <p:sp>
         <p:nvSpPr>
-          <p:cNvPr id="51" name="Shape 49"/>
-          <p:cNvSpPr/>
-          <p:nvPr/>
-        </p:nvSpPr>
-        <p:spPr>
-          <a:xfrm>
-            <a:off x="7677912" y="4169664"/>
-            <a:ext cx="685800" cy="384048"/>
+          <p:cNvPr id="78" name="Shape 76"/>
+          <p:cNvSpPr/>
+          <p:nvPr/>
+        </p:nvSpPr>
+        <p:spPr>
+          <a:xfrm>
+            <a:off x="8050149" y="4169664"/>
+            <a:ext cx="384048" cy="384048"/>
           </a:xfrm>
           <a:prstGeom prst="rect">
             <a:avLst>
@@ -29375,14 +31205,14 @@
       </p:sp>
       <p:sp>
         <p:nvSpPr>
-          <p:cNvPr id="52" name="Text 50"/>
-          <p:cNvSpPr/>
-          <p:nvPr/>
-        </p:nvSpPr>
-        <p:spPr>
-          <a:xfrm>
-            <a:off x="7677912" y="4169664"/>
-            <a:ext cx="685800" cy="384048"/>
+          <p:cNvPr id="79" name="Text 77"/>
+          <p:cNvSpPr/>
+          <p:nvPr/>
+        </p:nvSpPr>
+        <p:spPr>
+          <a:xfrm>
+            <a:off x="8050149" y="4169664"/>
+            <a:ext cx="384048" cy="384048"/>
           </a:xfrm>
           <a:prstGeom prst="rect">
             <a:avLst/>
@@ -29698,7 +31528,7 @@
                 <a:ea typeface="Calibri" pitchFamily="34" charset="-122"/>
                 <a:cs typeface="Calibri" pitchFamily="34" charset="-120"/>
               </a:rPr>
-              <a:t>Word Labs  •  wordlabs.app  •  Root: 'stetho' = chest; breast</a:t>
+              <a:t>Word Labs  •  wordlabs.app  •  Root: 'stetho' = chest, breast</a:t>
             </a:r>
             <a:endParaRPr lang="en-US" sz="800" dirty="0"/>
           </a:p>
@@ -29837,7 +31667,7 @@
                 <a:ea typeface="Trebuchet MS" pitchFamily="34" charset="-122"/>
                 <a:cs typeface="Trebuchet MS" pitchFamily="34" charset="-120"/>
               </a:rPr>
-              <a:t>stethoscopic</a:t>
+              <a:t>stethoscopically</a:t>
             </a:r>
             <a:endParaRPr lang="en-US" sz="2800" dirty="0"/>
           </a:p>
@@ -30525,7 +32355,7 @@
                 <a:ea typeface="Calibri" pitchFamily="34" charset="-122"/>
                 <a:cs typeface="Calibri" pitchFamily="34" charset="-120"/>
               </a:rPr>
-              <a:t>Word Labs  •  wordlabs.app  •  Root: 'stetho' = chest; breast</a:t>
+              <a:t>Word Labs  •  wordlabs.app  •  Root: 'stetho' = chest, breast</a:t>
             </a:r>
             <a:endParaRPr lang="en-US" sz="800" dirty="0"/>
           </a:p>
@@ -30664,7 +32494,7 @@
                 <a:ea typeface="Trebuchet MS" pitchFamily="34" charset="-122"/>
                 <a:cs typeface="Trebuchet MS" pitchFamily="34" charset="-120"/>
               </a:rPr>
-              <a:t>stethoscopic</a:t>
+              <a:t>stethoscopically</a:t>
             </a:r>
             <a:endParaRPr lang="en-US" sz="2800" dirty="0"/>
           </a:p>
@@ -30744,8 +32574,8 @@
         </p:nvSpPr>
         <p:spPr>
           <a:xfrm>
-            <a:off x="2221992" y="2258568"/>
-            <a:ext cx="1828800" cy="292608"/>
+            <a:off x="1993392" y="2258568"/>
+            <a:ext cx="1243584" cy="292608"/>
           </a:xfrm>
           <a:prstGeom prst="rect">
             <a:avLst>
@@ -30778,8 +32608,8 @@
         </p:nvSpPr>
         <p:spPr>
           <a:xfrm>
-            <a:off x="2221992" y="2258568"/>
-            <a:ext cx="1828800" cy="292608"/>
+            <a:off x="1993392" y="2258568"/>
+            <a:ext cx="1243584" cy="292608"/>
           </a:xfrm>
           <a:prstGeom prst="rect">
             <a:avLst/>
@@ -30817,8 +32647,8 @@
         </p:nvSpPr>
         <p:spPr>
           <a:xfrm>
-            <a:off x="2221992" y="2569464"/>
-            <a:ext cx="1828800" cy="201168"/>
+            <a:off x="1993392" y="2569464"/>
+            <a:ext cx="1243584" cy="201168"/>
           </a:xfrm>
           <a:prstGeom prst="rect">
             <a:avLst/>
@@ -30856,8 +32686,8 @@
         </p:nvSpPr>
         <p:spPr>
           <a:xfrm>
-            <a:off x="4370832" y="2258568"/>
-            <a:ext cx="1828800" cy="292608"/>
+            <a:off x="3328416" y="2258568"/>
+            <a:ext cx="1243584" cy="292608"/>
           </a:xfrm>
           <a:prstGeom prst="rect">
             <a:avLst>
@@ -30890,8 +32720,8 @@
         </p:nvSpPr>
         <p:spPr>
           <a:xfrm>
-            <a:off x="4370832" y="2258568"/>
-            <a:ext cx="1828800" cy="292608"/>
+            <a:off x="3328416" y="2258568"/>
+            <a:ext cx="1243584" cy="292608"/>
           </a:xfrm>
           <a:prstGeom prst="rect">
             <a:avLst/>
@@ -30929,8 +32759,8 @@
         </p:nvSpPr>
         <p:spPr>
           <a:xfrm>
-            <a:off x="4370832" y="2569464"/>
-            <a:ext cx="1828800" cy="201168"/>
+            <a:off x="3328416" y="2569464"/>
+            <a:ext cx="1243584" cy="201168"/>
           </a:xfrm>
           <a:prstGeom prst="rect">
             <a:avLst/>
@@ -30954,7 +32784,7 @@
                 <a:ea typeface="Calibri" pitchFamily="34" charset="-122"/>
                 <a:cs typeface="Calibri" pitchFamily="34" charset="-120"/>
               </a:rPr>
-              <a:t>examine</a:t>
+              <a:t>examine or view</a:t>
             </a:r>
             <a:endParaRPr lang="en-US" sz="850" dirty="0"/>
           </a:p>
@@ -30968,8 +32798,8 @@
         </p:nvSpPr>
         <p:spPr>
           <a:xfrm>
-            <a:off x="6519672" y="2258568"/>
-            <a:ext cx="1828800" cy="292608"/>
+            <a:off x="4663440" y="2258568"/>
+            <a:ext cx="1243584" cy="292608"/>
           </a:xfrm>
           <a:prstGeom prst="rect">
             <a:avLst>
@@ -31002,8 +32832,8 @@
         </p:nvSpPr>
         <p:spPr>
           <a:xfrm>
-            <a:off x="6519672" y="2258568"/>
-            <a:ext cx="1828800" cy="292608"/>
+            <a:off x="4663440" y="2258568"/>
+            <a:ext cx="1243584" cy="292608"/>
           </a:xfrm>
           <a:prstGeom prst="rect">
             <a:avLst/>
@@ -31041,8 +32871,8 @@
         </p:nvSpPr>
         <p:spPr>
           <a:xfrm>
-            <a:off x="6519672" y="2569464"/>
-            <a:ext cx="1828800" cy="201168"/>
+            <a:off x="4663440" y="2569464"/>
+            <a:ext cx="1243584" cy="201168"/>
           </a:xfrm>
           <a:prstGeom prst="rect">
             <a:avLst/>
@@ -31080,6 +32910,230 @@
         </p:nvSpPr>
         <p:spPr>
           <a:xfrm>
+            <a:off x="5998464" y="2258568"/>
+            <a:ext cx="1243584" cy="292608"/>
+          </a:xfrm>
+          <a:prstGeom prst="rect">
+            <a:avLst>
+              <a:gd name="adj" fmla="val 25000"/>
+            </a:avLst>
+          </a:prstGeom>
+          <a:solidFill>
+            <a:srgbClr val="FCE7F3"/>
+          </a:solidFill>
+          <a:ln w="19050">
+            <a:solidFill>
+              <a:srgbClr val="DB2777"/>
+            </a:solidFill>
+            <a:prstDash val="solid"/>
+          </a:ln>
+          <a:effectLst>
+            <a:outerShdw sx="100000" sy="100000" kx="0" ky="0" algn="bl" rotWithShape="0" blurRad="101600" dist="38100" dir="8100000">
+              <a:srgbClr val="000000">
+                <a:alpha val="12000"/>
+              </a:srgbClr>
+            </a:outerShdw>
+          </a:effectLst>
+        </p:spPr>
+      </p:sp>
+      <p:sp>
+        <p:nvSpPr>
+          <p:cNvPr id="26" name="Text 24"/>
+          <p:cNvSpPr/>
+          <p:nvPr/>
+        </p:nvSpPr>
+        <p:spPr>
+          <a:xfrm>
+            <a:off x="5998464" y="2258568"/>
+            <a:ext cx="1243584" cy="292608"/>
+          </a:xfrm>
+          <a:prstGeom prst="rect">
+            <a:avLst/>
+          </a:prstGeom>
+          <a:noFill/>
+          <a:ln/>
+        </p:spPr>
+        <p:txBody>
+          <a:bodyPr wrap="square" lIns="0" tIns="0" rIns="0" bIns="0" rtlCol="0" anchor="ctr"/>
+          <a:lstStyle/>
+          <a:p>
+            <a:pPr algn="ctr" indent="0" marL="0">
+              <a:buNone/>
+            </a:pPr>
+            <a:r>
+              <a:rPr lang="en-US" sz="1300" b="1" dirty="0">
+                <a:solidFill>
+                  <a:srgbClr val="9D174D"/>
+                </a:solidFill>
+                <a:latin typeface="Trebuchet MS" pitchFamily="34" charset="0"/>
+                <a:ea typeface="Trebuchet MS" pitchFamily="34" charset="-122"/>
+                <a:cs typeface="Trebuchet MS" pitchFamily="34" charset="-120"/>
+              </a:rPr>
+              <a:t>al</a:t>
+            </a:r>
+            <a:endParaRPr lang="en-US" sz="1300" dirty="0"/>
+          </a:p>
+        </p:txBody>
+      </p:sp>
+      <p:sp>
+        <p:nvSpPr>
+          <p:cNvPr id="27" name="Text 25"/>
+          <p:cNvSpPr/>
+          <p:nvPr/>
+        </p:nvSpPr>
+        <p:spPr>
+          <a:xfrm>
+            <a:off x="5998464" y="2569464"/>
+            <a:ext cx="1243584" cy="201168"/>
+          </a:xfrm>
+          <a:prstGeom prst="rect">
+            <a:avLst/>
+          </a:prstGeom>
+          <a:noFill/>
+          <a:ln/>
+        </p:spPr>
+        <p:txBody>
+          <a:bodyPr wrap="square" lIns="0" tIns="0" rIns="0" bIns="0" rtlCol="0" anchor="t"/>
+          <a:lstStyle/>
+          <a:p>
+            <a:pPr algn="ctr" indent="0" marL="0">
+              <a:buNone/>
+            </a:pPr>
+            <a:r>
+              <a:rPr lang="en-US" sz="850" dirty="0">
+                <a:solidFill>
+                  <a:srgbClr val="475569"/>
+                </a:solidFill>
+                <a:latin typeface="Calibri" pitchFamily="34" charset="0"/>
+                <a:ea typeface="Calibri" pitchFamily="34" charset="-122"/>
+                <a:cs typeface="Calibri" pitchFamily="34" charset="-120"/>
+              </a:rPr>
+              <a:t>of or relating to</a:t>
+            </a:r>
+            <a:endParaRPr lang="en-US" sz="850" dirty="0"/>
+          </a:p>
+        </p:txBody>
+      </p:sp>
+      <p:sp>
+        <p:nvSpPr>
+          <p:cNvPr id="28" name="Shape 26"/>
+          <p:cNvSpPr/>
+          <p:nvPr/>
+        </p:nvSpPr>
+        <p:spPr>
+          <a:xfrm>
+            <a:off x="7333488" y="2258568"/>
+            <a:ext cx="1243584" cy="292608"/>
+          </a:xfrm>
+          <a:prstGeom prst="rect">
+            <a:avLst>
+              <a:gd name="adj" fmla="val 25000"/>
+            </a:avLst>
+          </a:prstGeom>
+          <a:solidFill>
+            <a:srgbClr val="FCE7F3"/>
+          </a:solidFill>
+          <a:ln w="19050">
+            <a:solidFill>
+              <a:srgbClr val="DB2777"/>
+            </a:solidFill>
+            <a:prstDash val="solid"/>
+          </a:ln>
+          <a:effectLst>
+            <a:outerShdw sx="100000" sy="100000" kx="0" ky="0" algn="bl" rotWithShape="0" blurRad="101600" dist="38100" dir="8100000">
+              <a:srgbClr val="000000">
+                <a:alpha val="12000"/>
+              </a:srgbClr>
+            </a:outerShdw>
+          </a:effectLst>
+        </p:spPr>
+      </p:sp>
+      <p:sp>
+        <p:nvSpPr>
+          <p:cNvPr id="29" name="Text 27"/>
+          <p:cNvSpPr/>
+          <p:nvPr/>
+        </p:nvSpPr>
+        <p:spPr>
+          <a:xfrm>
+            <a:off x="7333488" y="2258568"/>
+            <a:ext cx="1243584" cy="292608"/>
+          </a:xfrm>
+          <a:prstGeom prst="rect">
+            <a:avLst/>
+          </a:prstGeom>
+          <a:noFill/>
+          <a:ln/>
+        </p:spPr>
+        <p:txBody>
+          <a:bodyPr wrap="square" lIns="0" tIns="0" rIns="0" bIns="0" rtlCol="0" anchor="ctr"/>
+          <a:lstStyle/>
+          <a:p>
+            <a:pPr algn="ctr" indent="0" marL="0">
+              <a:buNone/>
+            </a:pPr>
+            <a:r>
+              <a:rPr lang="en-US" sz="1300" b="1" dirty="0">
+                <a:solidFill>
+                  <a:srgbClr val="9D174D"/>
+                </a:solidFill>
+                <a:latin typeface="Trebuchet MS" pitchFamily="34" charset="0"/>
+                <a:ea typeface="Trebuchet MS" pitchFamily="34" charset="-122"/>
+                <a:cs typeface="Trebuchet MS" pitchFamily="34" charset="-120"/>
+              </a:rPr>
+              <a:t>ly</a:t>
+            </a:r>
+            <a:endParaRPr lang="en-US" sz="1300" dirty="0"/>
+          </a:p>
+        </p:txBody>
+      </p:sp>
+      <p:sp>
+        <p:nvSpPr>
+          <p:cNvPr id="30" name="Text 28"/>
+          <p:cNvSpPr/>
+          <p:nvPr/>
+        </p:nvSpPr>
+        <p:spPr>
+          <a:xfrm>
+            <a:off x="7333488" y="2569464"/>
+            <a:ext cx="1243584" cy="201168"/>
+          </a:xfrm>
+          <a:prstGeom prst="rect">
+            <a:avLst/>
+          </a:prstGeom>
+          <a:noFill/>
+          <a:ln/>
+        </p:spPr>
+        <p:txBody>
+          <a:bodyPr wrap="square" lIns="0" tIns="0" rIns="0" bIns="0" rtlCol="0" anchor="t"/>
+          <a:lstStyle/>
+          <a:p>
+            <a:pPr algn="ctr" indent="0" marL="0">
+              <a:buNone/>
+            </a:pPr>
+            <a:r>
+              <a:rPr lang="en-US" sz="850" dirty="0">
+                <a:solidFill>
+                  <a:srgbClr val="475569"/>
+                </a:solidFill>
+                <a:latin typeface="Calibri" pitchFamily="34" charset="0"/>
+                <a:ea typeface="Calibri" pitchFamily="34" charset="-122"/>
+                <a:cs typeface="Calibri" pitchFamily="34" charset="-120"/>
+              </a:rPr>
+              <a:t>in a manner of</a:t>
+            </a:r>
+            <a:endParaRPr lang="en-US" sz="850" dirty="0"/>
+          </a:p>
+        </p:txBody>
+      </p:sp>
+      <p:sp>
+        <p:nvSpPr>
+          <p:cNvPr id="31" name="Shape 29"/>
+          <p:cNvSpPr/>
+          <p:nvPr/>
+        </p:nvSpPr>
+        <p:spPr>
+          <a:xfrm>
             <a:off x="365760" y="3273552"/>
             <a:ext cx="1371600" cy="658368"/>
           </a:xfrm>
@@ -31101,7 +33155,7 @@
       </p:sp>
       <p:sp>
         <p:nvSpPr>
-          <p:cNvPr id="26" name="Text 24"/>
+          <p:cNvPr id="32" name="Text 30"/>
           <p:cNvSpPr/>
           <p:nvPr/>
         </p:nvSpPr>
@@ -31140,7 +33194,7 @@
       </p:sp>
       <p:sp>
         <p:nvSpPr>
-          <p:cNvPr id="27" name="Shape 25"/>
+          <p:cNvPr id="33" name="Shape 31"/>
           <p:cNvSpPr/>
           <p:nvPr/>
         </p:nvSpPr>
@@ -31167,7 +33221,7 @@
       </p:sp>
       <p:sp>
         <p:nvSpPr>
-          <p:cNvPr id="28" name="Text 26"/>
+          <p:cNvPr id="34" name="Text 32"/>
           <p:cNvSpPr/>
           <p:nvPr/>
         </p:nvSpPr>
@@ -31206,7 +33260,7 @@
       </p:sp>
       <p:sp>
         <p:nvSpPr>
-          <p:cNvPr id="29" name="Shape 27"/>
+          <p:cNvPr id="35" name="Shape 33"/>
           <p:cNvSpPr/>
           <p:nvPr/>
         </p:nvSpPr>
@@ -31233,7 +33287,7 @@
       </p:sp>
       <p:sp>
         <p:nvSpPr>
-          <p:cNvPr id="30" name="Text 28"/>
+          <p:cNvPr id="36" name="Text 34"/>
           <p:cNvSpPr/>
           <p:nvPr/>
         </p:nvSpPr>
@@ -31272,7 +33326,7 @@
       </p:sp>
       <p:sp>
         <p:nvSpPr>
-          <p:cNvPr id="31" name="Shape 29"/>
+          <p:cNvPr id="37" name="Shape 35"/>
           <p:cNvSpPr/>
           <p:nvPr/>
         </p:nvSpPr>
@@ -31299,7 +33353,7 @@
       </p:sp>
       <p:sp>
         <p:nvSpPr>
-          <p:cNvPr id="32" name="Text 30"/>
+          <p:cNvPr id="38" name="Text 36"/>
           <p:cNvSpPr/>
           <p:nvPr/>
         </p:nvSpPr>
@@ -31622,7 +33676,7 @@
                 <a:ea typeface="Calibri" pitchFamily="34" charset="-122"/>
                 <a:cs typeface="Calibri" pitchFamily="34" charset="-120"/>
               </a:rPr>
-              <a:t>Word Labs  •  wordlabs.app  •  Root: 'stetho' = chest; breast</a:t>
+              <a:t>Word Labs  •  wordlabs.app  •  Root: 'stetho' = chest, breast</a:t>
             </a:r>
             <a:endParaRPr lang="en-US" sz="800" dirty="0"/>
           </a:p>
@@ -31761,7 +33815,7 @@
                 <a:ea typeface="Trebuchet MS" pitchFamily="34" charset="-122"/>
                 <a:cs typeface="Trebuchet MS" pitchFamily="34" charset="-120"/>
               </a:rPr>
-              <a:t>stethoscopic</a:t>
+              <a:t>stethoscopically</a:t>
             </a:r>
             <a:endParaRPr lang="en-US" sz="2800" dirty="0"/>
           </a:p>
@@ -31841,8 +33895,8 @@
         </p:nvSpPr>
         <p:spPr>
           <a:xfrm>
-            <a:off x="2221992" y="2258568"/>
-            <a:ext cx="1828800" cy="292608"/>
+            <a:off x="1993392" y="2258568"/>
+            <a:ext cx="1243584" cy="292608"/>
           </a:xfrm>
           <a:prstGeom prst="rect">
             <a:avLst>
@@ -31875,8 +33929,8 @@
         </p:nvSpPr>
         <p:spPr>
           <a:xfrm>
-            <a:off x="2221992" y="2258568"/>
-            <a:ext cx="1828800" cy="292608"/>
+            <a:off x="1993392" y="2258568"/>
+            <a:ext cx="1243584" cy="292608"/>
           </a:xfrm>
           <a:prstGeom prst="rect">
             <a:avLst/>
@@ -31914,8 +33968,8 @@
         </p:nvSpPr>
         <p:spPr>
           <a:xfrm>
-            <a:off x="2221992" y="2569464"/>
-            <a:ext cx="1828800" cy="201168"/>
+            <a:off x="1993392" y="2569464"/>
+            <a:ext cx="1243584" cy="201168"/>
           </a:xfrm>
           <a:prstGeom prst="rect">
             <a:avLst/>
@@ -31953,8 +34007,8 @@
         </p:nvSpPr>
         <p:spPr>
           <a:xfrm>
-            <a:off x="4370832" y="2258568"/>
-            <a:ext cx="1828800" cy="292608"/>
+            <a:off x="3328416" y="2258568"/>
+            <a:ext cx="1243584" cy="292608"/>
           </a:xfrm>
           <a:prstGeom prst="rect">
             <a:avLst>
@@ -31987,8 +34041,8 @@
         </p:nvSpPr>
         <p:spPr>
           <a:xfrm>
-            <a:off x="4370832" y="2258568"/>
-            <a:ext cx="1828800" cy="292608"/>
+            <a:off x="3328416" y="2258568"/>
+            <a:ext cx="1243584" cy="292608"/>
           </a:xfrm>
           <a:prstGeom prst="rect">
             <a:avLst/>
@@ -32026,8 +34080,8 @@
         </p:nvSpPr>
         <p:spPr>
           <a:xfrm>
-            <a:off x="4370832" y="2569464"/>
-            <a:ext cx="1828800" cy="201168"/>
+            <a:off x="3328416" y="2569464"/>
+            <a:ext cx="1243584" cy="201168"/>
           </a:xfrm>
           <a:prstGeom prst="rect">
             <a:avLst/>
@@ -32051,7 +34105,7 @@
                 <a:ea typeface="Calibri" pitchFamily="34" charset="-122"/>
                 <a:cs typeface="Calibri" pitchFamily="34" charset="-120"/>
               </a:rPr>
-              <a:t>examine</a:t>
+              <a:t>examine or view</a:t>
             </a:r>
             <a:endParaRPr lang="en-US" sz="850" dirty="0"/>
           </a:p>
@@ -32065,8 +34119,8 @@
         </p:nvSpPr>
         <p:spPr>
           <a:xfrm>
-            <a:off x="6519672" y="2258568"/>
-            <a:ext cx="1828800" cy="292608"/>
+            <a:off x="4663440" y="2258568"/>
+            <a:ext cx="1243584" cy="292608"/>
           </a:xfrm>
           <a:prstGeom prst="rect">
             <a:avLst>
@@ -32099,8 +34153,8 @@
         </p:nvSpPr>
         <p:spPr>
           <a:xfrm>
-            <a:off x="6519672" y="2258568"/>
-            <a:ext cx="1828800" cy="292608"/>
+            <a:off x="4663440" y="2258568"/>
+            <a:ext cx="1243584" cy="292608"/>
           </a:xfrm>
           <a:prstGeom prst="rect">
             <a:avLst/>
@@ -32138,8 +34192,8 @@
         </p:nvSpPr>
         <p:spPr>
           <a:xfrm>
-            <a:off x="6519672" y="2569464"/>
-            <a:ext cx="1828800" cy="201168"/>
+            <a:off x="4663440" y="2569464"/>
+            <a:ext cx="1243584" cy="201168"/>
           </a:xfrm>
           <a:prstGeom prst="rect">
             <a:avLst/>
@@ -32177,6 +34231,230 @@
         </p:nvSpPr>
         <p:spPr>
           <a:xfrm>
+            <a:off x="5998464" y="2258568"/>
+            <a:ext cx="1243584" cy="292608"/>
+          </a:xfrm>
+          <a:prstGeom prst="rect">
+            <a:avLst>
+              <a:gd name="adj" fmla="val 25000"/>
+            </a:avLst>
+          </a:prstGeom>
+          <a:solidFill>
+            <a:srgbClr val="FCE7F3"/>
+          </a:solidFill>
+          <a:ln w="19050">
+            <a:solidFill>
+              <a:srgbClr val="DB2777"/>
+            </a:solidFill>
+            <a:prstDash val="solid"/>
+          </a:ln>
+          <a:effectLst>
+            <a:outerShdw sx="100000" sy="100000" kx="0" ky="0" algn="bl" rotWithShape="0" blurRad="101600" dist="38100" dir="8100000">
+              <a:srgbClr val="000000">
+                <a:alpha val="12000"/>
+              </a:srgbClr>
+            </a:outerShdw>
+          </a:effectLst>
+        </p:spPr>
+      </p:sp>
+      <p:sp>
+        <p:nvSpPr>
+          <p:cNvPr id="26" name="Text 24"/>
+          <p:cNvSpPr/>
+          <p:nvPr/>
+        </p:nvSpPr>
+        <p:spPr>
+          <a:xfrm>
+            <a:off x="5998464" y="2258568"/>
+            <a:ext cx="1243584" cy="292608"/>
+          </a:xfrm>
+          <a:prstGeom prst="rect">
+            <a:avLst/>
+          </a:prstGeom>
+          <a:noFill/>
+          <a:ln/>
+        </p:spPr>
+        <p:txBody>
+          <a:bodyPr wrap="square" lIns="0" tIns="0" rIns="0" bIns="0" rtlCol="0" anchor="ctr"/>
+          <a:lstStyle/>
+          <a:p>
+            <a:pPr algn="ctr" indent="0" marL="0">
+              <a:buNone/>
+            </a:pPr>
+            <a:r>
+              <a:rPr lang="en-US" sz="1300" b="1" dirty="0">
+                <a:solidFill>
+                  <a:srgbClr val="9D174D"/>
+                </a:solidFill>
+                <a:latin typeface="Trebuchet MS" pitchFamily="34" charset="0"/>
+                <a:ea typeface="Trebuchet MS" pitchFamily="34" charset="-122"/>
+                <a:cs typeface="Trebuchet MS" pitchFamily="34" charset="-120"/>
+              </a:rPr>
+              <a:t>al</a:t>
+            </a:r>
+            <a:endParaRPr lang="en-US" sz="1300" dirty="0"/>
+          </a:p>
+        </p:txBody>
+      </p:sp>
+      <p:sp>
+        <p:nvSpPr>
+          <p:cNvPr id="27" name="Text 25"/>
+          <p:cNvSpPr/>
+          <p:nvPr/>
+        </p:nvSpPr>
+        <p:spPr>
+          <a:xfrm>
+            <a:off x="5998464" y="2569464"/>
+            <a:ext cx="1243584" cy="201168"/>
+          </a:xfrm>
+          <a:prstGeom prst="rect">
+            <a:avLst/>
+          </a:prstGeom>
+          <a:noFill/>
+          <a:ln/>
+        </p:spPr>
+        <p:txBody>
+          <a:bodyPr wrap="square" lIns="0" tIns="0" rIns="0" bIns="0" rtlCol="0" anchor="t"/>
+          <a:lstStyle/>
+          <a:p>
+            <a:pPr algn="ctr" indent="0" marL="0">
+              <a:buNone/>
+            </a:pPr>
+            <a:r>
+              <a:rPr lang="en-US" sz="850" dirty="0">
+                <a:solidFill>
+                  <a:srgbClr val="475569"/>
+                </a:solidFill>
+                <a:latin typeface="Calibri" pitchFamily="34" charset="0"/>
+                <a:ea typeface="Calibri" pitchFamily="34" charset="-122"/>
+                <a:cs typeface="Calibri" pitchFamily="34" charset="-120"/>
+              </a:rPr>
+              <a:t>of or relating to</a:t>
+            </a:r>
+            <a:endParaRPr lang="en-US" sz="850" dirty="0"/>
+          </a:p>
+        </p:txBody>
+      </p:sp>
+      <p:sp>
+        <p:nvSpPr>
+          <p:cNvPr id="28" name="Shape 26"/>
+          <p:cNvSpPr/>
+          <p:nvPr/>
+        </p:nvSpPr>
+        <p:spPr>
+          <a:xfrm>
+            <a:off x="7333488" y="2258568"/>
+            <a:ext cx="1243584" cy="292608"/>
+          </a:xfrm>
+          <a:prstGeom prst="rect">
+            <a:avLst>
+              <a:gd name="adj" fmla="val 25000"/>
+            </a:avLst>
+          </a:prstGeom>
+          <a:solidFill>
+            <a:srgbClr val="FCE7F3"/>
+          </a:solidFill>
+          <a:ln w="19050">
+            <a:solidFill>
+              <a:srgbClr val="DB2777"/>
+            </a:solidFill>
+            <a:prstDash val="solid"/>
+          </a:ln>
+          <a:effectLst>
+            <a:outerShdw sx="100000" sy="100000" kx="0" ky="0" algn="bl" rotWithShape="0" blurRad="101600" dist="38100" dir="8100000">
+              <a:srgbClr val="000000">
+                <a:alpha val="12000"/>
+              </a:srgbClr>
+            </a:outerShdw>
+          </a:effectLst>
+        </p:spPr>
+      </p:sp>
+      <p:sp>
+        <p:nvSpPr>
+          <p:cNvPr id="29" name="Text 27"/>
+          <p:cNvSpPr/>
+          <p:nvPr/>
+        </p:nvSpPr>
+        <p:spPr>
+          <a:xfrm>
+            <a:off x="7333488" y="2258568"/>
+            <a:ext cx="1243584" cy="292608"/>
+          </a:xfrm>
+          <a:prstGeom prst="rect">
+            <a:avLst/>
+          </a:prstGeom>
+          <a:noFill/>
+          <a:ln/>
+        </p:spPr>
+        <p:txBody>
+          <a:bodyPr wrap="square" lIns="0" tIns="0" rIns="0" bIns="0" rtlCol="0" anchor="ctr"/>
+          <a:lstStyle/>
+          <a:p>
+            <a:pPr algn="ctr" indent="0" marL="0">
+              <a:buNone/>
+            </a:pPr>
+            <a:r>
+              <a:rPr lang="en-US" sz="1300" b="1" dirty="0">
+                <a:solidFill>
+                  <a:srgbClr val="9D174D"/>
+                </a:solidFill>
+                <a:latin typeface="Trebuchet MS" pitchFamily="34" charset="0"/>
+                <a:ea typeface="Trebuchet MS" pitchFamily="34" charset="-122"/>
+                <a:cs typeface="Trebuchet MS" pitchFamily="34" charset="-120"/>
+              </a:rPr>
+              <a:t>ly</a:t>
+            </a:r>
+            <a:endParaRPr lang="en-US" sz="1300" dirty="0"/>
+          </a:p>
+        </p:txBody>
+      </p:sp>
+      <p:sp>
+        <p:nvSpPr>
+          <p:cNvPr id="30" name="Text 28"/>
+          <p:cNvSpPr/>
+          <p:nvPr/>
+        </p:nvSpPr>
+        <p:spPr>
+          <a:xfrm>
+            <a:off x="7333488" y="2569464"/>
+            <a:ext cx="1243584" cy="201168"/>
+          </a:xfrm>
+          <a:prstGeom prst="rect">
+            <a:avLst/>
+          </a:prstGeom>
+          <a:noFill/>
+          <a:ln/>
+        </p:spPr>
+        <p:txBody>
+          <a:bodyPr wrap="square" lIns="0" tIns="0" rIns="0" bIns="0" rtlCol="0" anchor="t"/>
+          <a:lstStyle/>
+          <a:p>
+            <a:pPr algn="ctr" indent="0" marL="0">
+              <a:buNone/>
+            </a:pPr>
+            <a:r>
+              <a:rPr lang="en-US" sz="850" dirty="0">
+                <a:solidFill>
+                  <a:srgbClr val="475569"/>
+                </a:solidFill>
+                <a:latin typeface="Calibri" pitchFamily="34" charset="0"/>
+                <a:ea typeface="Calibri" pitchFamily="34" charset="-122"/>
+                <a:cs typeface="Calibri" pitchFamily="34" charset="-120"/>
+              </a:rPr>
+              <a:t>in a manner of</a:t>
+            </a:r>
+            <a:endParaRPr lang="en-US" sz="850" dirty="0"/>
+          </a:p>
+        </p:txBody>
+      </p:sp>
+      <p:sp>
+        <p:nvSpPr>
+          <p:cNvPr id="31" name="Shape 29"/>
+          <p:cNvSpPr/>
+          <p:nvPr/>
+        </p:nvSpPr>
+        <p:spPr>
+          <a:xfrm>
             <a:off x="365760" y="3273552"/>
             <a:ext cx="1371600" cy="658368"/>
           </a:xfrm>
@@ -32198,7 +34476,7 @@
       </p:sp>
       <p:sp>
         <p:nvSpPr>
-          <p:cNvPr id="26" name="Text 24"/>
+          <p:cNvPr id="32" name="Text 30"/>
           <p:cNvSpPr/>
           <p:nvPr/>
         </p:nvSpPr>
@@ -32237,7 +34515,7 @@
       </p:sp>
       <p:sp>
         <p:nvSpPr>
-          <p:cNvPr id="27" name="Shape 25"/>
+          <p:cNvPr id="33" name="Shape 31"/>
           <p:cNvSpPr/>
           <p:nvPr/>
         </p:nvSpPr>
@@ -32264,14 +34542,14 @@
       </p:sp>
       <p:sp>
         <p:nvSpPr>
-          <p:cNvPr id="28" name="Shape 26"/>
-          <p:cNvSpPr/>
-          <p:nvPr/>
-        </p:nvSpPr>
-        <p:spPr>
-          <a:xfrm>
-            <a:off x="1975104" y="3364992"/>
-            <a:ext cx="1554480" cy="475488"/>
+          <p:cNvPr id="34" name="Shape 32"/>
+          <p:cNvSpPr/>
+          <p:nvPr/>
+        </p:nvSpPr>
+        <p:spPr>
+          <a:xfrm>
+            <a:off x="1980329" y="3364992"/>
+            <a:ext cx="1005840" cy="475488"/>
           </a:xfrm>
           <a:prstGeom prst="rect">
             <a:avLst>
@@ -32291,14 +34569,14 @@
       </p:sp>
       <p:sp>
         <p:nvSpPr>
-          <p:cNvPr id="29" name="Text 27"/>
-          <p:cNvSpPr/>
-          <p:nvPr/>
-        </p:nvSpPr>
-        <p:spPr>
-          <a:xfrm>
-            <a:off x="1975104" y="3364992"/>
-            <a:ext cx="1554480" cy="475488"/>
+          <p:cNvPr id="35" name="Text 33"/>
+          <p:cNvSpPr/>
+          <p:nvPr/>
+        </p:nvSpPr>
+        <p:spPr>
+          <a:xfrm>
+            <a:off x="1980329" y="3364992"/>
+            <a:ext cx="1005840" cy="475488"/>
           </a:xfrm>
           <a:prstGeom prst="rect">
             <a:avLst/>
@@ -32330,14 +34608,14 @@
       </p:sp>
       <p:sp>
         <p:nvSpPr>
-          <p:cNvPr id="30" name="Text 28"/>
-          <p:cNvSpPr/>
-          <p:nvPr/>
-        </p:nvSpPr>
-        <p:spPr>
-          <a:xfrm>
-            <a:off x="3529584" y="3364992"/>
-            <a:ext cx="73152" cy="475488"/>
+          <p:cNvPr id="36" name="Text 34"/>
+          <p:cNvSpPr/>
+          <p:nvPr/>
+        </p:nvSpPr>
+        <p:spPr>
+          <a:xfrm>
+            <a:off x="2986169" y="3364992"/>
+            <a:ext cx="78377" cy="475488"/>
           </a:xfrm>
           <a:prstGeom prst="rect">
             <a:avLst/>
@@ -32369,14 +34647,14 @@
       </p:sp>
       <p:sp>
         <p:nvSpPr>
-          <p:cNvPr id="31" name="Shape 29"/>
-          <p:cNvSpPr/>
-          <p:nvPr/>
-        </p:nvSpPr>
-        <p:spPr>
-          <a:xfrm>
-            <a:off x="3602736" y="3364992"/>
-            <a:ext cx="1554480" cy="475488"/>
+          <p:cNvPr id="37" name="Shape 35"/>
+          <p:cNvSpPr/>
+          <p:nvPr/>
+        </p:nvSpPr>
+        <p:spPr>
+          <a:xfrm>
+            <a:off x="3064546" y="3364992"/>
+            <a:ext cx="1005840" cy="475488"/>
           </a:xfrm>
           <a:prstGeom prst="rect">
             <a:avLst>
@@ -32396,14 +34674,14 @@
       </p:sp>
       <p:sp>
         <p:nvSpPr>
-          <p:cNvPr id="32" name="Text 30"/>
-          <p:cNvSpPr/>
-          <p:nvPr/>
-        </p:nvSpPr>
-        <p:spPr>
-          <a:xfrm>
-            <a:off x="3602736" y="3364992"/>
-            <a:ext cx="1554480" cy="475488"/>
+          <p:cNvPr id="38" name="Text 36"/>
+          <p:cNvSpPr/>
+          <p:nvPr/>
+        </p:nvSpPr>
+        <p:spPr>
+          <a:xfrm>
+            <a:off x="3064546" y="3364992"/>
+            <a:ext cx="1005840" cy="475488"/>
           </a:xfrm>
           <a:prstGeom prst="rect">
             <a:avLst/>
@@ -32435,14 +34713,14 @@
       </p:sp>
       <p:sp>
         <p:nvSpPr>
-          <p:cNvPr id="33" name="Text 31"/>
-          <p:cNvSpPr/>
-          <p:nvPr/>
-        </p:nvSpPr>
-        <p:spPr>
-          <a:xfrm>
-            <a:off x="5157216" y="3364992"/>
-            <a:ext cx="73152" cy="475488"/>
+          <p:cNvPr id="39" name="Text 37"/>
+          <p:cNvSpPr/>
+          <p:nvPr/>
+        </p:nvSpPr>
+        <p:spPr>
+          <a:xfrm>
+            <a:off x="4070386" y="3364992"/>
+            <a:ext cx="78377" cy="475488"/>
           </a:xfrm>
           <a:prstGeom prst="rect">
             <a:avLst/>
@@ -32474,14 +34752,14 @@
       </p:sp>
       <p:sp>
         <p:nvSpPr>
-          <p:cNvPr id="34" name="Shape 32"/>
-          <p:cNvSpPr/>
-          <p:nvPr/>
-        </p:nvSpPr>
-        <p:spPr>
-          <a:xfrm>
-            <a:off x="5230368" y="3364992"/>
-            <a:ext cx="1554480" cy="475488"/>
+          <p:cNvPr id="40" name="Shape 38"/>
+          <p:cNvSpPr/>
+          <p:nvPr/>
+        </p:nvSpPr>
+        <p:spPr>
+          <a:xfrm>
+            <a:off x="4148763" y="3364992"/>
+            <a:ext cx="1005840" cy="475488"/>
           </a:xfrm>
           <a:prstGeom prst="rect">
             <a:avLst>
@@ -32501,14 +34779,14 @@
       </p:sp>
       <p:sp>
         <p:nvSpPr>
-          <p:cNvPr id="35" name="Text 33"/>
-          <p:cNvSpPr/>
-          <p:nvPr/>
-        </p:nvSpPr>
-        <p:spPr>
-          <a:xfrm>
-            <a:off x="5230368" y="3364992"/>
-            <a:ext cx="1554480" cy="475488"/>
+          <p:cNvPr id="41" name="Text 39"/>
+          <p:cNvSpPr/>
+          <p:nvPr/>
+        </p:nvSpPr>
+        <p:spPr>
+          <a:xfrm>
+            <a:off x="4148763" y="3364992"/>
+            <a:ext cx="1005840" cy="475488"/>
           </a:xfrm>
           <a:prstGeom prst="rect">
             <a:avLst/>
@@ -32540,14 +34818,14 @@
       </p:sp>
       <p:sp>
         <p:nvSpPr>
-          <p:cNvPr id="36" name="Text 34"/>
-          <p:cNvSpPr/>
-          <p:nvPr/>
-        </p:nvSpPr>
-        <p:spPr>
-          <a:xfrm>
-            <a:off x="6784848" y="3364992"/>
-            <a:ext cx="73152" cy="475488"/>
+          <p:cNvPr id="42" name="Text 40"/>
+          <p:cNvSpPr/>
+          <p:nvPr/>
+        </p:nvSpPr>
+        <p:spPr>
+          <a:xfrm>
+            <a:off x="5154603" y="3364992"/>
+            <a:ext cx="78377" cy="475488"/>
           </a:xfrm>
           <a:prstGeom prst="rect">
             <a:avLst/>
@@ -32579,14 +34857,14 @@
       </p:sp>
       <p:sp>
         <p:nvSpPr>
-          <p:cNvPr id="37" name="Shape 35"/>
-          <p:cNvSpPr/>
-          <p:nvPr/>
-        </p:nvSpPr>
-        <p:spPr>
-          <a:xfrm>
-            <a:off x="6858000" y="3364992"/>
-            <a:ext cx="1554480" cy="475488"/>
+          <p:cNvPr id="43" name="Shape 41"/>
+          <p:cNvSpPr/>
+          <p:nvPr/>
+        </p:nvSpPr>
+        <p:spPr>
+          <a:xfrm>
+            <a:off x="5232981" y="3364992"/>
+            <a:ext cx="1005840" cy="475488"/>
           </a:xfrm>
           <a:prstGeom prst="rect">
             <a:avLst>
@@ -32606,14 +34884,14 @@
       </p:sp>
       <p:sp>
         <p:nvSpPr>
-          <p:cNvPr id="38" name="Text 36"/>
-          <p:cNvSpPr/>
-          <p:nvPr/>
-        </p:nvSpPr>
-        <p:spPr>
-          <a:xfrm>
-            <a:off x="6858000" y="3364992"/>
-            <a:ext cx="1554480" cy="475488"/>
+          <p:cNvPr id="44" name="Text 42"/>
+          <p:cNvSpPr/>
+          <p:nvPr/>
+        </p:nvSpPr>
+        <p:spPr>
+          <a:xfrm>
+            <a:off x="5232981" y="3364992"/>
+            <a:ext cx="1005840" cy="475488"/>
           </a:xfrm>
           <a:prstGeom prst="rect">
             <a:avLst/>
@@ -32645,7 +34923,217 @@
       </p:sp>
       <p:sp>
         <p:nvSpPr>
-          <p:cNvPr id="39" name="Shape 37"/>
+          <p:cNvPr id="45" name="Text 43"/>
+          <p:cNvSpPr/>
+          <p:nvPr/>
+        </p:nvSpPr>
+        <p:spPr>
+          <a:xfrm>
+            <a:off x="6238821" y="3364992"/>
+            <a:ext cx="78377" cy="475488"/>
+          </a:xfrm>
+          <a:prstGeom prst="rect">
+            <a:avLst/>
+          </a:prstGeom>
+          <a:noFill/>
+          <a:ln/>
+        </p:spPr>
+        <p:txBody>
+          <a:bodyPr wrap="square" lIns="0" tIns="0" rIns="0" bIns="0" rtlCol="0" anchor="ctr"/>
+          <a:lstStyle/>
+          <a:p>
+            <a:pPr algn="ctr" indent="0" marL="0">
+              <a:buNone/>
+            </a:pPr>
+            <a:r>
+              <a:rPr lang="en-US" sz="1600" b="1" dirty="0">
+                <a:solidFill>
+                  <a:srgbClr val="0D9488"/>
+                </a:solidFill>
+                <a:latin typeface="Trebuchet MS" pitchFamily="34" charset="0"/>
+                <a:ea typeface="Trebuchet MS" pitchFamily="34" charset="-122"/>
+                <a:cs typeface="Trebuchet MS" pitchFamily="34" charset="-120"/>
+              </a:rPr>
+              <a:t>·</a:t>
+            </a:r>
+            <a:endParaRPr lang="en-US" sz="1600" dirty="0"/>
+          </a:p>
+        </p:txBody>
+      </p:sp>
+      <p:sp>
+        <p:nvSpPr>
+          <p:cNvPr id="46" name="Shape 44"/>
+          <p:cNvSpPr/>
+          <p:nvPr/>
+        </p:nvSpPr>
+        <p:spPr>
+          <a:xfrm>
+            <a:off x="6317198" y="3364992"/>
+            <a:ext cx="1005840" cy="475488"/>
+          </a:xfrm>
+          <a:prstGeom prst="rect">
+            <a:avLst>
+              <a:gd name="adj" fmla="val 9615"/>
+            </a:avLst>
+          </a:prstGeom>
+          <a:solidFill>
+            <a:srgbClr val="FFFFFF"/>
+          </a:solidFill>
+          <a:ln w="12700">
+            <a:solidFill>
+              <a:srgbClr val="0D9488"/>
+            </a:solidFill>
+            <a:prstDash val="solid"/>
+          </a:ln>
+        </p:spPr>
+      </p:sp>
+      <p:sp>
+        <p:nvSpPr>
+          <p:cNvPr id="47" name="Text 45"/>
+          <p:cNvSpPr/>
+          <p:nvPr/>
+        </p:nvSpPr>
+        <p:spPr>
+          <a:xfrm>
+            <a:off x="6317198" y="3364992"/>
+            <a:ext cx="1005840" cy="475488"/>
+          </a:xfrm>
+          <a:prstGeom prst="rect">
+            <a:avLst/>
+          </a:prstGeom>
+          <a:noFill/>
+          <a:ln/>
+        </p:spPr>
+        <p:txBody>
+          <a:bodyPr wrap="square" lIns="0" tIns="0" rIns="0" bIns="0" rtlCol="0" anchor="ctr"/>
+          <a:lstStyle/>
+          <a:p>
+            <a:pPr algn="ctr" indent="0" marL="0">
+              <a:buNone/>
+            </a:pPr>
+            <a:r>
+              <a:rPr lang="en-US" sz="1400" b="1" dirty="0">
+                <a:solidFill>
+                  <a:srgbClr val="0D9488"/>
+                </a:solidFill>
+                <a:latin typeface="Trebuchet MS" pitchFamily="34" charset="0"/>
+                <a:ea typeface="Trebuchet MS" pitchFamily="34" charset="-122"/>
+                <a:cs typeface="Trebuchet MS" pitchFamily="34" charset="-120"/>
+              </a:rPr>
+              <a:t>al</a:t>
+            </a:r>
+            <a:endParaRPr lang="en-US" sz="1400" dirty="0"/>
+          </a:p>
+        </p:txBody>
+      </p:sp>
+      <p:sp>
+        <p:nvSpPr>
+          <p:cNvPr id="48" name="Text 46"/>
+          <p:cNvSpPr/>
+          <p:nvPr/>
+        </p:nvSpPr>
+        <p:spPr>
+          <a:xfrm>
+            <a:off x="7323038" y="3364992"/>
+            <a:ext cx="78377" cy="475488"/>
+          </a:xfrm>
+          <a:prstGeom prst="rect">
+            <a:avLst/>
+          </a:prstGeom>
+          <a:noFill/>
+          <a:ln/>
+        </p:spPr>
+        <p:txBody>
+          <a:bodyPr wrap="square" lIns="0" tIns="0" rIns="0" bIns="0" rtlCol="0" anchor="ctr"/>
+          <a:lstStyle/>
+          <a:p>
+            <a:pPr algn="ctr" indent="0" marL="0">
+              <a:buNone/>
+            </a:pPr>
+            <a:r>
+              <a:rPr lang="en-US" sz="1600" b="1" dirty="0">
+                <a:solidFill>
+                  <a:srgbClr val="0D9488"/>
+                </a:solidFill>
+                <a:latin typeface="Trebuchet MS" pitchFamily="34" charset="0"/>
+                <a:ea typeface="Trebuchet MS" pitchFamily="34" charset="-122"/>
+                <a:cs typeface="Trebuchet MS" pitchFamily="34" charset="-120"/>
+              </a:rPr>
+              <a:t>·</a:t>
+            </a:r>
+            <a:endParaRPr lang="en-US" sz="1600" dirty="0"/>
+          </a:p>
+        </p:txBody>
+      </p:sp>
+      <p:sp>
+        <p:nvSpPr>
+          <p:cNvPr id="49" name="Shape 47"/>
+          <p:cNvSpPr/>
+          <p:nvPr/>
+        </p:nvSpPr>
+        <p:spPr>
+          <a:xfrm>
+            <a:off x="7401415" y="3364992"/>
+            <a:ext cx="1005840" cy="475488"/>
+          </a:xfrm>
+          <a:prstGeom prst="rect">
+            <a:avLst>
+              <a:gd name="adj" fmla="val 9615"/>
+            </a:avLst>
+          </a:prstGeom>
+          <a:solidFill>
+            <a:srgbClr val="FFFFFF"/>
+          </a:solidFill>
+          <a:ln w="12700">
+            <a:solidFill>
+              <a:srgbClr val="0D9488"/>
+            </a:solidFill>
+            <a:prstDash val="solid"/>
+          </a:ln>
+        </p:spPr>
+      </p:sp>
+      <p:sp>
+        <p:nvSpPr>
+          <p:cNvPr id="50" name="Text 48"/>
+          <p:cNvSpPr/>
+          <p:nvPr/>
+        </p:nvSpPr>
+        <p:spPr>
+          <a:xfrm>
+            <a:off x="7401415" y="3364992"/>
+            <a:ext cx="1005840" cy="475488"/>
+          </a:xfrm>
+          <a:prstGeom prst="rect">
+            <a:avLst/>
+          </a:prstGeom>
+          <a:noFill/>
+          <a:ln/>
+        </p:spPr>
+        <p:txBody>
+          <a:bodyPr wrap="square" lIns="0" tIns="0" rIns="0" bIns="0" rtlCol="0" anchor="ctr"/>
+          <a:lstStyle/>
+          <a:p>
+            <a:pPr algn="ctr" indent="0" marL="0">
+              <a:buNone/>
+            </a:pPr>
+            <a:r>
+              <a:rPr lang="en-US" sz="1400" b="1" dirty="0">
+                <a:solidFill>
+                  <a:srgbClr val="0D9488"/>
+                </a:solidFill>
+                <a:latin typeface="Trebuchet MS" pitchFamily="34" charset="0"/>
+                <a:ea typeface="Trebuchet MS" pitchFamily="34" charset="-122"/>
+                <a:cs typeface="Trebuchet MS" pitchFamily="34" charset="-120"/>
+              </a:rPr>
+              <a:t>ly</a:t>
+            </a:r>
+            <a:endParaRPr lang="en-US" sz="1400" dirty="0"/>
+          </a:p>
+        </p:txBody>
+      </p:sp>
+      <p:sp>
+        <p:nvSpPr>
+          <p:cNvPr id="51" name="Shape 49"/>
           <p:cNvSpPr/>
           <p:nvPr/>
         </p:nvSpPr>
@@ -32672,7 +35160,7 @@
       </p:sp>
       <p:sp>
         <p:nvSpPr>
-          <p:cNvPr id="40" name="Text 38"/>
+          <p:cNvPr id="52" name="Text 50"/>
           <p:cNvSpPr/>
           <p:nvPr/>
         </p:nvSpPr>
@@ -32711,7 +35199,7 @@
       </p:sp>
       <p:sp>
         <p:nvSpPr>
-          <p:cNvPr id="41" name="Shape 39"/>
+          <p:cNvPr id="53" name="Shape 51"/>
           <p:cNvSpPr/>
           <p:nvPr/>
         </p:nvSpPr>
@@ -32738,7 +35226,7 @@
       </p:sp>
       <p:sp>
         <p:nvSpPr>
-          <p:cNvPr id="42" name="Text 40"/>
+          <p:cNvPr id="54" name="Text 52"/>
           <p:cNvSpPr/>
           <p:nvPr/>
         </p:nvSpPr>
@@ -33061,7 +35549,7 @@
                 <a:ea typeface="Calibri" pitchFamily="34" charset="-122"/>
                 <a:cs typeface="Calibri" pitchFamily="34" charset="-120"/>
               </a:rPr>
-              <a:t>Word Labs  •  wordlabs.app  •  Root: 'stetho' = chest; breast</a:t>
+              <a:t>Word Labs  •  wordlabs.app  •  Root: 'stetho' = chest, breast</a:t>
             </a:r>
             <a:endParaRPr lang="en-US" sz="800" dirty="0"/>
           </a:p>
@@ -33200,7 +35688,7 @@
                 <a:ea typeface="Trebuchet MS" pitchFamily="34" charset="-122"/>
                 <a:cs typeface="Trebuchet MS" pitchFamily="34" charset="-120"/>
               </a:rPr>
-              <a:t>stethoscopic</a:t>
+              <a:t>stethoscopically</a:t>
             </a:r>
             <a:endParaRPr lang="en-US" sz="2800" dirty="0"/>
           </a:p>
@@ -33280,8 +35768,8 @@
         </p:nvSpPr>
         <p:spPr>
           <a:xfrm>
-            <a:off x="2221992" y="2258568"/>
-            <a:ext cx="1828800" cy="292608"/>
+            <a:off x="1993392" y="2258568"/>
+            <a:ext cx="1243584" cy="292608"/>
           </a:xfrm>
           <a:prstGeom prst="rect">
             <a:avLst>
@@ -33314,8 +35802,8 @@
         </p:nvSpPr>
         <p:spPr>
           <a:xfrm>
-            <a:off x="2221992" y="2258568"/>
-            <a:ext cx="1828800" cy="292608"/>
+            <a:off x="1993392" y="2258568"/>
+            <a:ext cx="1243584" cy="292608"/>
           </a:xfrm>
           <a:prstGeom prst="rect">
             <a:avLst/>
@@ -33353,8 +35841,8 @@
         </p:nvSpPr>
         <p:spPr>
           <a:xfrm>
-            <a:off x="2221992" y="2569464"/>
-            <a:ext cx="1828800" cy="201168"/>
+            <a:off x="1993392" y="2569464"/>
+            <a:ext cx="1243584" cy="201168"/>
           </a:xfrm>
           <a:prstGeom prst="rect">
             <a:avLst/>
@@ -33392,8 +35880,8 @@
         </p:nvSpPr>
         <p:spPr>
           <a:xfrm>
-            <a:off x="4370832" y="2258568"/>
-            <a:ext cx="1828800" cy="292608"/>
+            <a:off x="3328416" y="2258568"/>
+            <a:ext cx="1243584" cy="292608"/>
           </a:xfrm>
           <a:prstGeom prst="rect">
             <a:avLst>
@@ -33426,8 +35914,8 @@
         </p:nvSpPr>
         <p:spPr>
           <a:xfrm>
-            <a:off x="4370832" y="2258568"/>
-            <a:ext cx="1828800" cy="292608"/>
+            <a:off x="3328416" y="2258568"/>
+            <a:ext cx="1243584" cy="292608"/>
           </a:xfrm>
           <a:prstGeom prst="rect">
             <a:avLst/>
@@ -33465,8 +35953,8 @@
         </p:nvSpPr>
         <p:spPr>
           <a:xfrm>
-            <a:off x="4370832" y="2569464"/>
-            <a:ext cx="1828800" cy="201168"/>
+            <a:off x="3328416" y="2569464"/>
+            <a:ext cx="1243584" cy="201168"/>
           </a:xfrm>
           <a:prstGeom prst="rect">
             <a:avLst/>
@@ -33490,7 +35978,7 @@
                 <a:ea typeface="Calibri" pitchFamily="34" charset="-122"/>
                 <a:cs typeface="Calibri" pitchFamily="34" charset="-120"/>
               </a:rPr>
-              <a:t>examine</a:t>
+              <a:t>examine or view</a:t>
             </a:r>
             <a:endParaRPr lang="en-US" sz="850" dirty="0"/>
           </a:p>
@@ -33504,8 +35992,8 @@
         </p:nvSpPr>
         <p:spPr>
           <a:xfrm>
-            <a:off x="6519672" y="2258568"/>
-            <a:ext cx="1828800" cy="292608"/>
+            <a:off x="4663440" y="2258568"/>
+            <a:ext cx="1243584" cy="292608"/>
           </a:xfrm>
           <a:prstGeom prst="rect">
             <a:avLst>
@@ -33538,8 +36026,8 @@
         </p:nvSpPr>
         <p:spPr>
           <a:xfrm>
-            <a:off x="6519672" y="2258568"/>
-            <a:ext cx="1828800" cy="292608"/>
+            <a:off x="4663440" y="2258568"/>
+            <a:ext cx="1243584" cy="292608"/>
           </a:xfrm>
           <a:prstGeom prst="rect">
             <a:avLst/>
@@ -33577,8 +36065,8 @@
         </p:nvSpPr>
         <p:spPr>
           <a:xfrm>
-            <a:off x="6519672" y="2569464"/>
-            <a:ext cx="1828800" cy="201168"/>
+            <a:off x="4663440" y="2569464"/>
+            <a:ext cx="1243584" cy="201168"/>
           </a:xfrm>
           <a:prstGeom prst="rect">
             <a:avLst/>
@@ -33616,6 +36104,230 @@
         </p:nvSpPr>
         <p:spPr>
           <a:xfrm>
+            <a:off x="5998464" y="2258568"/>
+            <a:ext cx="1243584" cy="292608"/>
+          </a:xfrm>
+          <a:prstGeom prst="rect">
+            <a:avLst>
+              <a:gd name="adj" fmla="val 25000"/>
+            </a:avLst>
+          </a:prstGeom>
+          <a:solidFill>
+            <a:srgbClr val="FCE7F3"/>
+          </a:solidFill>
+          <a:ln w="19050">
+            <a:solidFill>
+              <a:srgbClr val="DB2777"/>
+            </a:solidFill>
+            <a:prstDash val="solid"/>
+          </a:ln>
+          <a:effectLst>
+            <a:outerShdw sx="100000" sy="100000" kx="0" ky="0" algn="bl" rotWithShape="0" blurRad="101600" dist="38100" dir="8100000">
+              <a:srgbClr val="000000">
+                <a:alpha val="12000"/>
+              </a:srgbClr>
+            </a:outerShdw>
+          </a:effectLst>
+        </p:spPr>
+      </p:sp>
+      <p:sp>
+        <p:nvSpPr>
+          <p:cNvPr id="26" name="Text 24"/>
+          <p:cNvSpPr/>
+          <p:nvPr/>
+        </p:nvSpPr>
+        <p:spPr>
+          <a:xfrm>
+            <a:off x="5998464" y="2258568"/>
+            <a:ext cx="1243584" cy="292608"/>
+          </a:xfrm>
+          <a:prstGeom prst="rect">
+            <a:avLst/>
+          </a:prstGeom>
+          <a:noFill/>
+          <a:ln/>
+        </p:spPr>
+        <p:txBody>
+          <a:bodyPr wrap="square" lIns="0" tIns="0" rIns="0" bIns="0" rtlCol="0" anchor="ctr"/>
+          <a:lstStyle/>
+          <a:p>
+            <a:pPr algn="ctr" indent="0" marL="0">
+              <a:buNone/>
+            </a:pPr>
+            <a:r>
+              <a:rPr lang="en-US" sz="1300" b="1" dirty="0">
+                <a:solidFill>
+                  <a:srgbClr val="9D174D"/>
+                </a:solidFill>
+                <a:latin typeface="Trebuchet MS" pitchFamily="34" charset="0"/>
+                <a:ea typeface="Trebuchet MS" pitchFamily="34" charset="-122"/>
+                <a:cs typeface="Trebuchet MS" pitchFamily="34" charset="-120"/>
+              </a:rPr>
+              <a:t>al</a:t>
+            </a:r>
+            <a:endParaRPr lang="en-US" sz="1300" dirty="0"/>
+          </a:p>
+        </p:txBody>
+      </p:sp>
+      <p:sp>
+        <p:nvSpPr>
+          <p:cNvPr id="27" name="Text 25"/>
+          <p:cNvSpPr/>
+          <p:nvPr/>
+        </p:nvSpPr>
+        <p:spPr>
+          <a:xfrm>
+            <a:off x="5998464" y="2569464"/>
+            <a:ext cx="1243584" cy="201168"/>
+          </a:xfrm>
+          <a:prstGeom prst="rect">
+            <a:avLst/>
+          </a:prstGeom>
+          <a:noFill/>
+          <a:ln/>
+        </p:spPr>
+        <p:txBody>
+          <a:bodyPr wrap="square" lIns="0" tIns="0" rIns="0" bIns="0" rtlCol="0" anchor="t"/>
+          <a:lstStyle/>
+          <a:p>
+            <a:pPr algn="ctr" indent="0" marL="0">
+              <a:buNone/>
+            </a:pPr>
+            <a:r>
+              <a:rPr lang="en-US" sz="850" dirty="0">
+                <a:solidFill>
+                  <a:srgbClr val="475569"/>
+                </a:solidFill>
+                <a:latin typeface="Calibri" pitchFamily="34" charset="0"/>
+                <a:ea typeface="Calibri" pitchFamily="34" charset="-122"/>
+                <a:cs typeface="Calibri" pitchFamily="34" charset="-120"/>
+              </a:rPr>
+              <a:t>of or relating to</a:t>
+            </a:r>
+            <a:endParaRPr lang="en-US" sz="850" dirty="0"/>
+          </a:p>
+        </p:txBody>
+      </p:sp>
+      <p:sp>
+        <p:nvSpPr>
+          <p:cNvPr id="28" name="Shape 26"/>
+          <p:cNvSpPr/>
+          <p:nvPr/>
+        </p:nvSpPr>
+        <p:spPr>
+          <a:xfrm>
+            <a:off x="7333488" y="2258568"/>
+            <a:ext cx="1243584" cy="292608"/>
+          </a:xfrm>
+          <a:prstGeom prst="rect">
+            <a:avLst>
+              <a:gd name="adj" fmla="val 25000"/>
+            </a:avLst>
+          </a:prstGeom>
+          <a:solidFill>
+            <a:srgbClr val="FCE7F3"/>
+          </a:solidFill>
+          <a:ln w="19050">
+            <a:solidFill>
+              <a:srgbClr val="DB2777"/>
+            </a:solidFill>
+            <a:prstDash val="solid"/>
+          </a:ln>
+          <a:effectLst>
+            <a:outerShdw sx="100000" sy="100000" kx="0" ky="0" algn="bl" rotWithShape="0" blurRad="101600" dist="38100" dir="8100000">
+              <a:srgbClr val="000000">
+                <a:alpha val="12000"/>
+              </a:srgbClr>
+            </a:outerShdw>
+          </a:effectLst>
+        </p:spPr>
+      </p:sp>
+      <p:sp>
+        <p:nvSpPr>
+          <p:cNvPr id="29" name="Text 27"/>
+          <p:cNvSpPr/>
+          <p:nvPr/>
+        </p:nvSpPr>
+        <p:spPr>
+          <a:xfrm>
+            <a:off x="7333488" y="2258568"/>
+            <a:ext cx="1243584" cy="292608"/>
+          </a:xfrm>
+          <a:prstGeom prst="rect">
+            <a:avLst/>
+          </a:prstGeom>
+          <a:noFill/>
+          <a:ln/>
+        </p:spPr>
+        <p:txBody>
+          <a:bodyPr wrap="square" lIns="0" tIns="0" rIns="0" bIns="0" rtlCol="0" anchor="ctr"/>
+          <a:lstStyle/>
+          <a:p>
+            <a:pPr algn="ctr" indent="0" marL="0">
+              <a:buNone/>
+            </a:pPr>
+            <a:r>
+              <a:rPr lang="en-US" sz="1300" b="1" dirty="0">
+                <a:solidFill>
+                  <a:srgbClr val="9D174D"/>
+                </a:solidFill>
+                <a:latin typeface="Trebuchet MS" pitchFamily="34" charset="0"/>
+                <a:ea typeface="Trebuchet MS" pitchFamily="34" charset="-122"/>
+                <a:cs typeface="Trebuchet MS" pitchFamily="34" charset="-120"/>
+              </a:rPr>
+              <a:t>ly</a:t>
+            </a:r>
+            <a:endParaRPr lang="en-US" sz="1300" dirty="0"/>
+          </a:p>
+        </p:txBody>
+      </p:sp>
+      <p:sp>
+        <p:nvSpPr>
+          <p:cNvPr id="30" name="Text 28"/>
+          <p:cNvSpPr/>
+          <p:nvPr/>
+        </p:nvSpPr>
+        <p:spPr>
+          <a:xfrm>
+            <a:off x="7333488" y="2569464"/>
+            <a:ext cx="1243584" cy="201168"/>
+          </a:xfrm>
+          <a:prstGeom prst="rect">
+            <a:avLst/>
+          </a:prstGeom>
+          <a:noFill/>
+          <a:ln/>
+        </p:spPr>
+        <p:txBody>
+          <a:bodyPr wrap="square" lIns="0" tIns="0" rIns="0" bIns="0" rtlCol="0" anchor="t"/>
+          <a:lstStyle/>
+          <a:p>
+            <a:pPr algn="ctr" indent="0" marL="0">
+              <a:buNone/>
+            </a:pPr>
+            <a:r>
+              <a:rPr lang="en-US" sz="850" dirty="0">
+                <a:solidFill>
+                  <a:srgbClr val="475569"/>
+                </a:solidFill>
+                <a:latin typeface="Calibri" pitchFamily="34" charset="0"/>
+                <a:ea typeface="Calibri" pitchFamily="34" charset="-122"/>
+                <a:cs typeface="Calibri" pitchFamily="34" charset="-120"/>
+              </a:rPr>
+              <a:t>in a manner of</a:t>
+            </a:r>
+            <a:endParaRPr lang="en-US" sz="850" dirty="0"/>
+          </a:p>
+        </p:txBody>
+      </p:sp>
+      <p:sp>
+        <p:nvSpPr>
+          <p:cNvPr id="31" name="Shape 29"/>
+          <p:cNvSpPr/>
+          <p:nvPr/>
+        </p:nvSpPr>
+        <p:spPr>
+          <a:xfrm>
             <a:off x="365760" y="3273552"/>
             <a:ext cx="1371600" cy="658368"/>
           </a:xfrm>
@@ -33637,7 +36349,7 @@
       </p:sp>
       <p:sp>
         <p:nvSpPr>
-          <p:cNvPr id="26" name="Text 24"/>
+          <p:cNvPr id="32" name="Text 30"/>
           <p:cNvSpPr/>
           <p:nvPr/>
         </p:nvSpPr>
@@ -33676,7 +36388,7 @@
       </p:sp>
       <p:sp>
         <p:nvSpPr>
-          <p:cNvPr id="27" name="Shape 25"/>
+          <p:cNvPr id="33" name="Shape 31"/>
           <p:cNvSpPr/>
           <p:nvPr/>
         </p:nvSpPr>
@@ -33703,14 +36415,14 @@
       </p:sp>
       <p:sp>
         <p:nvSpPr>
-          <p:cNvPr id="28" name="Shape 26"/>
-          <p:cNvSpPr/>
-          <p:nvPr/>
-        </p:nvSpPr>
-        <p:spPr>
-          <a:xfrm>
-            <a:off x="1975104" y="3364992"/>
-            <a:ext cx="1554480" cy="475488"/>
+          <p:cNvPr id="34" name="Shape 32"/>
+          <p:cNvSpPr/>
+          <p:nvPr/>
+        </p:nvSpPr>
+        <p:spPr>
+          <a:xfrm>
+            <a:off x="1980329" y="3364992"/>
+            <a:ext cx="1005840" cy="475488"/>
           </a:xfrm>
           <a:prstGeom prst="rect">
             <a:avLst>
@@ -33730,14 +36442,14 @@
       </p:sp>
       <p:sp>
         <p:nvSpPr>
-          <p:cNvPr id="29" name="Text 27"/>
-          <p:cNvSpPr/>
-          <p:nvPr/>
-        </p:nvSpPr>
-        <p:spPr>
-          <a:xfrm>
-            <a:off x="1975104" y="3364992"/>
-            <a:ext cx="1554480" cy="475488"/>
+          <p:cNvPr id="35" name="Text 33"/>
+          <p:cNvSpPr/>
+          <p:nvPr/>
+        </p:nvSpPr>
+        <p:spPr>
+          <a:xfrm>
+            <a:off x="1980329" y="3364992"/>
+            <a:ext cx="1005840" cy="475488"/>
           </a:xfrm>
           <a:prstGeom prst="rect">
             <a:avLst/>
@@ -33769,14 +36481,14 @@
       </p:sp>
       <p:sp>
         <p:nvSpPr>
-          <p:cNvPr id="30" name="Text 28"/>
-          <p:cNvSpPr/>
-          <p:nvPr/>
-        </p:nvSpPr>
-        <p:spPr>
-          <a:xfrm>
-            <a:off x="3529584" y="3364992"/>
-            <a:ext cx="73152" cy="475488"/>
+          <p:cNvPr id="36" name="Text 34"/>
+          <p:cNvSpPr/>
+          <p:nvPr/>
+        </p:nvSpPr>
+        <p:spPr>
+          <a:xfrm>
+            <a:off x="2986169" y="3364992"/>
+            <a:ext cx="78377" cy="475488"/>
           </a:xfrm>
           <a:prstGeom prst="rect">
             <a:avLst/>
@@ -33808,14 +36520,14 @@
       </p:sp>
       <p:sp>
         <p:nvSpPr>
-          <p:cNvPr id="31" name="Shape 29"/>
-          <p:cNvSpPr/>
-          <p:nvPr/>
-        </p:nvSpPr>
-        <p:spPr>
-          <a:xfrm>
-            <a:off x="3602736" y="3364992"/>
-            <a:ext cx="1554480" cy="475488"/>
+          <p:cNvPr id="37" name="Shape 35"/>
+          <p:cNvSpPr/>
+          <p:nvPr/>
+        </p:nvSpPr>
+        <p:spPr>
+          <a:xfrm>
+            <a:off x="3064546" y="3364992"/>
+            <a:ext cx="1005840" cy="475488"/>
           </a:xfrm>
           <a:prstGeom prst="rect">
             <a:avLst>
@@ -33835,14 +36547,14 @@
       </p:sp>
       <p:sp>
         <p:nvSpPr>
-          <p:cNvPr id="32" name="Text 30"/>
-          <p:cNvSpPr/>
-          <p:nvPr/>
-        </p:nvSpPr>
-        <p:spPr>
-          <a:xfrm>
-            <a:off x="3602736" y="3364992"/>
-            <a:ext cx="1554480" cy="475488"/>
+          <p:cNvPr id="38" name="Text 36"/>
+          <p:cNvSpPr/>
+          <p:nvPr/>
+        </p:nvSpPr>
+        <p:spPr>
+          <a:xfrm>
+            <a:off x="3064546" y="3364992"/>
+            <a:ext cx="1005840" cy="475488"/>
           </a:xfrm>
           <a:prstGeom prst="rect">
             <a:avLst/>
@@ -33874,14 +36586,14 @@
       </p:sp>
       <p:sp>
         <p:nvSpPr>
-          <p:cNvPr id="33" name="Text 31"/>
-          <p:cNvSpPr/>
-          <p:nvPr/>
-        </p:nvSpPr>
-        <p:spPr>
-          <a:xfrm>
-            <a:off x="5157216" y="3364992"/>
-            <a:ext cx="73152" cy="475488"/>
+          <p:cNvPr id="39" name="Text 37"/>
+          <p:cNvSpPr/>
+          <p:nvPr/>
+        </p:nvSpPr>
+        <p:spPr>
+          <a:xfrm>
+            <a:off x="4070386" y="3364992"/>
+            <a:ext cx="78377" cy="475488"/>
           </a:xfrm>
           <a:prstGeom prst="rect">
             <a:avLst/>
@@ -33913,14 +36625,14 @@
       </p:sp>
       <p:sp>
         <p:nvSpPr>
-          <p:cNvPr id="34" name="Shape 32"/>
-          <p:cNvSpPr/>
-          <p:nvPr/>
-        </p:nvSpPr>
-        <p:spPr>
-          <a:xfrm>
-            <a:off x="5230368" y="3364992"/>
-            <a:ext cx="1554480" cy="475488"/>
+          <p:cNvPr id="40" name="Shape 38"/>
+          <p:cNvSpPr/>
+          <p:nvPr/>
+        </p:nvSpPr>
+        <p:spPr>
+          <a:xfrm>
+            <a:off x="4148763" y="3364992"/>
+            <a:ext cx="1005840" cy="475488"/>
           </a:xfrm>
           <a:prstGeom prst="rect">
             <a:avLst>
@@ -33940,14 +36652,14 @@
       </p:sp>
       <p:sp>
         <p:nvSpPr>
-          <p:cNvPr id="35" name="Text 33"/>
-          <p:cNvSpPr/>
-          <p:nvPr/>
-        </p:nvSpPr>
-        <p:spPr>
-          <a:xfrm>
-            <a:off x="5230368" y="3364992"/>
-            <a:ext cx="1554480" cy="475488"/>
+          <p:cNvPr id="41" name="Text 39"/>
+          <p:cNvSpPr/>
+          <p:nvPr/>
+        </p:nvSpPr>
+        <p:spPr>
+          <a:xfrm>
+            <a:off x="4148763" y="3364992"/>
+            <a:ext cx="1005840" cy="475488"/>
           </a:xfrm>
           <a:prstGeom prst="rect">
             <a:avLst/>
@@ -33979,14 +36691,14 @@
       </p:sp>
       <p:sp>
         <p:nvSpPr>
-          <p:cNvPr id="36" name="Text 34"/>
-          <p:cNvSpPr/>
-          <p:nvPr/>
-        </p:nvSpPr>
-        <p:spPr>
-          <a:xfrm>
-            <a:off x="6784848" y="3364992"/>
-            <a:ext cx="73152" cy="475488"/>
+          <p:cNvPr id="42" name="Text 40"/>
+          <p:cNvSpPr/>
+          <p:nvPr/>
+        </p:nvSpPr>
+        <p:spPr>
+          <a:xfrm>
+            <a:off x="5154603" y="3364992"/>
+            <a:ext cx="78377" cy="475488"/>
           </a:xfrm>
           <a:prstGeom prst="rect">
             <a:avLst/>
@@ -34018,14 +36730,14 @@
       </p:sp>
       <p:sp>
         <p:nvSpPr>
-          <p:cNvPr id="37" name="Shape 35"/>
-          <p:cNvSpPr/>
-          <p:nvPr/>
-        </p:nvSpPr>
-        <p:spPr>
-          <a:xfrm>
-            <a:off x="6858000" y="3364992"/>
-            <a:ext cx="1554480" cy="475488"/>
+          <p:cNvPr id="43" name="Shape 41"/>
+          <p:cNvSpPr/>
+          <p:nvPr/>
+        </p:nvSpPr>
+        <p:spPr>
+          <a:xfrm>
+            <a:off x="5232981" y="3364992"/>
+            <a:ext cx="1005840" cy="475488"/>
           </a:xfrm>
           <a:prstGeom prst="rect">
             <a:avLst>
@@ -34045,14 +36757,14 @@
       </p:sp>
       <p:sp>
         <p:nvSpPr>
-          <p:cNvPr id="38" name="Text 36"/>
-          <p:cNvSpPr/>
-          <p:nvPr/>
-        </p:nvSpPr>
-        <p:spPr>
-          <a:xfrm>
-            <a:off x="6858000" y="3364992"/>
-            <a:ext cx="1554480" cy="475488"/>
+          <p:cNvPr id="44" name="Text 42"/>
+          <p:cNvSpPr/>
+          <p:nvPr/>
+        </p:nvSpPr>
+        <p:spPr>
+          <a:xfrm>
+            <a:off x="5232981" y="3364992"/>
+            <a:ext cx="1005840" cy="475488"/>
           </a:xfrm>
           <a:prstGeom prst="rect">
             <a:avLst/>
@@ -34084,7 +36796,217 @@
       </p:sp>
       <p:sp>
         <p:nvSpPr>
-          <p:cNvPr id="39" name="Shape 37"/>
+          <p:cNvPr id="45" name="Text 43"/>
+          <p:cNvSpPr/>
+          <p:nvPr/>
+        </p:nvSpPr>
+        <p:spPr>
+          <a:xfrm>
+            <a:off x="6238821" y="3364992"/>
+            <a:ext cx="78377" cy="475488"/>
+          </a:xfrm>
+          <a:prstGeom prst="rect">
+            <a:avLst/>
+          </a:prstGeom>
+          <a:noFill/>
+          <a:ln/>
+        </p:spPr>
+        <p:txBody>
+          <a:bodyPr wrap="square" lIns="0" tIns="0" rIns="0" bIns="0" rtlCol="0" anchor="ctr"/>
+          <a:lstStyle/>
+          <a:p>
+            <a:pPr algn="ctr" indent="0" marL="0">
+              <a:buNone/>
+            </a:pPr>
+            <a:r>
+              <a:rPr lang="en-US" sz="1600" b="1" dirty="0">
+                <a:solidFill>
+                  <a:srgbClr val="0D9488"/>
+                </a:solidFill>
+                <a:latin typeface="Trebuchet MS" pitchFamily="34" charset="0"/>
+                <a:ea typeface="Trebuchet MS" pitchFamily="34" charset="-122"/>
+                <a:cs typeface="Trebuchet MS" pitchFamily="34" charset="-120"/>
+              </a:rPr>
+              <a:t>·</a:t>
+            </a:r>
+            <a:endParaRPr lang="en-US" sz="1600" dirty="0"/>
+          </a:p>
+        </p:txBody>
+      </p:sp>
+      <p:sp>
+        <p:nvSpPr>
+          <p:cNvPr id="46" name="Shape 44"/>
+          <p:cNvSpPr/>
+          <p:nvPr/>
+        </p:nvSpPr>
+        <p:spPr>
+          <a:xfrm>
+            <a:off x="6317198" y="3364992"/>
+            <a:ext cx="1005840" cy="475488"/>
+          </a:xfrm>
+          <a:prstGeom prst="rect">
+            <a:avLst>
+              <a:gd name="adj" fmla="val 9615"/>
+            </a:avLst>
+          </a:prstGeom>
+          <a:solidFill>
+            <a:srgbClr val="FFFFFF"/>
+          </a:solidFill>
+          <a:ln w="12700">
+            <a:solidFill>
+              <a:srgbClr val="0D9488"/>
+            </a:solidFill>
+            <a:prstDash val="solid"/>
+          </a:ln>
+        </p:spPr>
+      </p:sp>
+      <p:sp>
+        <p:nvSpPr>
+          <p:cNvPr id="47" name="Text 45"/>
+          <p:cNvSpPr/>
+          <p:nvPr/>
+        </p:nvSpPr>
+        <p:spPr>
+          <a:xfrm>
+            <a:off x="6317198" y="3364992"/>
+            <a:ext cx="1005840" cy="475488"/>
+          </a:xfrm>
+          <a:prstGeom prst="rect">
+            <a:avLst/>
+          </a:prstGeom>
+          <a:noFill/>
+          <a:ln/>
+        </p:spPr>
+        <p:txBody>
+          <a:bodyPr wrap="square" lIns="0" tIns="0" rIns="0" bIns="0" rtlCol="0" anchor="ctr"/>
+          <a:lstStyle/>
+          <a:p>
+            <a:pPr algn="ctr" indent="0" marL="0">
+              <a:buNone/>
+            </a:pPr>
+            <a:r>
+              <a:rPr lang="en-US" sz="1400" b="1" dirty="0">
+                <a:solidFill>
+                  <a:srgbClr val="0D9488"/>
+                </a:solidFill>
+                <a:latin typeface="Trebuchet MS" pitchFamily="34" charset="0"/>
+                <a:ea typeface="Trebuchet MS" pitchFamily="34" charset="-122"/>
+                <a:cs typeface="Trebuchet MS" pitchFamily="34" charset="-120"/>
+              </a:rPr>
+              <a:t>al</a:t>
+            </a:r>
+            <a:endParaRPr lang="en-US" sz="1400" dirty="0"/>
+          </a:p>
+        </p:txBody>
+      </p:sp>
+      <p:sp>
+        <p:nvSpPr>
+          <p:cNvPr id="48" name="Text 46"/>
+          <p:cNvSpPr/>
+          <p:nvPr/>
+        </p:nvSpPr>
+        <p:spPr>
+          <a:xfrm>
+            <a:off x="7323038" y="3364992"/>
+            <a:ext cx="78377" cy="475488"/>
+          </a:xfrm>
+          <a:prstGeom prst="rect">
+            <a:avLst/>
+          </a:prstGeom>
+          <a:noFill/>
+          <a:ln/>
+        </p:spPr>
+        <p:txBody>
+          <a:bodyPr wrap="square" lIns="0" tIns="0" rIns="0" bIns="0" rtlCol="0" anchor="ctr"/>
+          <a:lstStyle/>
+          <a:p>
+            <a:pPr algn="ctr" indent="0" marL="0">
+              <a:buNone/>
+            </a:pPr>
+            <a:r>
+              <a:rPr lang="en-US" sz="1600" b="1" dirty="0">
+                <a:solidFill>
+                  <a:srgbClr val="0D9488"/>
+                </a:solidFill>
+                <a:latin typeface="Trebuchet MS" pitchFamily="34" charset="0"/>
+                <a:ea typeface="Trebuchet MS" pitchFamily="34" charset="-122"/>
+                <a:cs typeface="Trebuchet MS" pitchFamily="34" charset="-120"/>
+              </a:rPr>
+              <a:t>·</a:t>
+            </a:r>
+            <a:endParaRPr lang="en-US" sz="1600" dirty="0"/>
+          </a:p>
+        </p:txBody>
+      </p:sp>
+      <p:sp>
+        <p:nvSpPr>
+          <p:cNvPr id="49" name="Shape 47"/>
+          <p:cNvSpPr/>
+          <p:nvPr/>
+        </p:nvSpPr>
+        <p:spPr>
+          <a:xfrm>
+            <a:off x="7401415" y="3364992"/>
+            <a:ext cx="1005840" cy="475488"/>
+          </a:xfrm>
+          <a:prstGeom prst="rect">
+            <a:avLst>
+              <a:gd name="adj" fmla="val 9615"/>
+            </a:avLst>
+          </a:prstGeom>
+          <a:solidFill>
+            <a:srgbClr val="FFFFFF"/>
+          </a:solidFill>
+          <a:ln w="12700">
+            <a:solidFill>
+              <a:srgbClr val="0D9488"/>
+            </a:solidFill>
+            <a:prstDash val="solid"/>
+          </a:ln>
+        </p:spPr>
+      </p:sp>
+      <p:sp>
+        <p:nvSpPr>
+          <p:cNvPr id="50" name="Text 48"/>
+          <p:cNvSpPr/>
+          <p:nvPr/>
+        </p:nvSpPr>
+        <p:spPr>
+          <a:xfrm>
+            <a:off x="7401415" y="3364992"/>
+            <a:ext cx="1005840" cy="475488"/>
+          </a:xfrm>
+          <a:prstGeom prst="rect">
+            <a:avLst/>
+          </a:prstGeom>
+          <a:noFill/>
+          <a:ln/>
+        </p:spPr>
+        <p:txBody>
+          <a:bodyPr wrap="square" lIns="0" tIns="0" rIns="0" bIns="0" rtlCol="0" anchor="ctr"/>
+          <a:lstStyle/>
+          <a:p>
+            <a:pPr algn="ctr" indent="0" marL="0">
+              <a:buNone/>
+            </a:pPr>
+            <a:r>
+              <a:rPr lang="en-US" sz="1400" b="1" dirty="0">
+                <a:solidFill>
+                  <a:srgbClr val="0D9488"/>
+                </a:solidFill>
+                <a:latin typeface="Trebuchet MS" pitchFamily="34" charset="0"/>
+                <a:ea typeface="Trebuchet MS" pitchFamily="34" charset="-122"/>
+                <a:cs typeface="Trebuchet MS" pitchFamily="34" charset="-120"/>
+              </a:rPr>
+              <a:t>ly</a:t>
+            </a:r>
+            <a:endParaRPr lang="en-US" sz="1400" dirty="0"/>
+          </a:p>
+        </p:txBody>
+      </p:sp>
+      <p:sp>
+        <p:nvSpPr>
+          <p:cNvPr id="51" name="Shape 49"/>
           <p:cNvSpPr/>
           <p:nvPr/>
         </p:nvSpPr>
@@ -34111,7 +37033,7 @@
       </p:sp>
       <p:sp>
         <p:nvSpPr>
-          <p:cNvPr id="40" name="Text 38"/>
+          <p:cNvPr id="52" name="Text 50"/>
           <p:cNvSpPr/>
           <p:nvPr/>
         </p:nvSpPr>
@@ -34150,7 +37072,7 @@
       </p:sp>
       <p:sp>
         <p:nvSpPr>
-          <p:cNvPr id="41" name="Shape 39"/>
+          <p:cNvPr id="53" name="Shape 51"/>
           <p:cNvSpPr/>
           <p:nvPr/>
         </p:nvSpPr>
@@ -34177,14 +37099,14 @@
       </p:sp>
       <p:sp>
         <p:nvSpPr>
-          <p:cNvPr id="42" name="Shape 40"/>
-          <p:cNvSpPr/>
-          <p:nvPr/>
-        </p:nvSpPr>
-        <p:spPr>
-          <a:xfrm>
-            <a:off x="1951828" y="4169664"/>
-            <a:ext cx="603504" cy="384048"/>
+          <p:cNvPr id="54" name="Shape 52"/>
+          <p:cNvSpPr/>
+          <p:nvPr/>
+        </p:nvSpPr>
+        <p:spPr>
+          <a:xfrm>
+            <a:off x="1952897" y="4169664"/>
+            <a:ext cx="451573" cy="384048"/>
           </a:xfrm>
           <a:prstGeom prst="rect">
             <a:avLst>
@@ -34204,14 +37126,14 @@
       </p:sp>
       <p:sp>
         <p:nvSpPr>
-          <p:cNvPr id="43" name="Text 41"/>
-          <p:cNvSpPr/>
-          <p:nvPr/>
-        </p:nvSpPr>
-        <p:spPr>
-          <a:xfrm>
-            <a:off x="1951828" y="4169664"/>
-            <a:ext cx="603504" cy="384048"/>
+          <p:cNvPr id="55" name="Text 53"/>
+          <p:cNvSpPr/>
+          <p:nvPr/>
+        </p:nvSpPr>
+        <p:spPr>
+          <a:xfrm>
+            <a:off x="1952897" y="4169664"/>
+            <a:ext cx="451573" cy="384048"/>
           </a:xfrm>
           <a:prstGeom prst="rect">
             <a:avLst/>
@@ -34243,14 +37165,14 @@
       </p:sp>
       <p:sp>
         <p:nvSpPr>
-          <p:cNvPr id="44" name="Shape 42"/>
-          <p:cNvSpPr/>
-          <p:nvPr/>
-        </p:nvSpPr>
-        <p:spPr>
-          <a:xfrm>
-            <a:off x="2605209" y="4169664"/>
-            <a:ext cx="603504" cy="384048"/>
+          <p:cNvPr id="56" name="Shape 54"/>
+          <p:cNvSpPr/>
+          <p:nvPr/>
+        </p:nvSpPr>
+        <p:spPr>
+          <a:xfrm>
+            <a:off x="2455415" y="4169664"/>
+            <a:ext cx="451573" cy="384048"/>
           </a:xfrm>
           <a:prstGeom prst="rect">
             <a:avLst>
@@ -34270,14 +37192,14 @@
       </p:sp>
       <p:sp>
         <p:nvSpPr>
-          <p:cNvPr id="45" name="Text 43"/>
-          <p:cNvSpPr/>
-          <p:nvPr/>
-        </p:nvSpPr>
-        <p:spPr>
-          <a:xfrm>
-            <a:off x="2605209" y="4169664"/>
-            <a:ext cx="603504" cy="384048"/>
+          <p:cNvPr id="57" name="Text 55"/>
+          <p:cNvSpPr/>
+          <p:nvPr/>
+        </p:nvSpPr>
+        <p:spPr>
+          <a:xfrm>
+            <a:off x="2455415" y="4169664"/>
+            <a:ext cx="451573" cy="384048"/>
           </a:xfrm>
           <a:prstGeom prst="rect">
             <a:avLst/>
@@ -34309,14 +37231,14 @@
       </p:sp>
       <p:sp>
         <p:nvSpPr>
-          <p:cNvPr id="46" name="Shape 44"/>
-          <p:cNvSpPr/>
-          <p:nvPr/>
-        </p:nvSpPr>
-        <p:spPr>
-          <a:xfrm>
-            <a:off x="3258589" y="4169664"/>
-            <a:ext cx="603504" cy="384048"/>
+          <p:cNvPr id="58" name="Shape 56"/>
+          <p:cNvSpPr/>
+          <p:nvPr/>
+        </p:nvSpPr>
+        <p:spPr>
+          <a:xfrm>
+            <a:off x="2957933" y="4169664"/>
+            <a:ext cx="451573" cy="384048"/>
           </a:xfrm>
           <a:prstGeom prst="rect">
             <a:avLst>
@@ -34336,14 +37258,14 @@
       </p:sp>
       <p:sp>
         <p:nvSpPr>
-          <p:cNvPr id="47" name="Text 45"/>
-          <p:cNvSpPr/>
-          <p:nvPr/>
-        </p:nvSpPr>
-        <p:spPr>
-          <a:xfrm>
-            <a:off x="3258589" y="4169664"/>
-            <a:ext cx="603504" cy="384048"/>
+          <p:cNvPr id="59" name="Text 57"/>
+          <p:cNvSpPr/>
+          <p:nvPr/>
+        </p:nvSpPr>
+        <p:spPr>
+          <a:xfrm>
+            <a:off x="2957933" y="4169664"/>
+            <a:ext cx="451573" cy="384048"/>
           </a:xfrm>
           <a:prstGeom prst="rect">
             <a:avLst/>
@@ -34375,14 +37297,14 @@
       </p:sp>
       <p:sp>
         <p:nvSpPr>
-          <p:cNvPr id="48" name="Shape 46"/>
-          <p:cNvSpPr/>
-          <p:nvPr/>
-        </p:nvSpPr>
-        <p:spPr>
-          <a:xfrm>
-            <a:off x="3911969" y="4169664"/>
-            <a:ext cx="603504" cy="384048"/>
+          <p:cNvPr id="60" name="Shape 58"/>
+          <p:cNvSpPr/>
+          <p:nvPr/>
+        </p:nvSpPr>
+        <p:spPr>
+          <a:xfrm>
+            <a:off x="3460451" y="4169664"/>
+            <a:ext cx="451573" cy="384048"/>
           </a:xfrm>
           <a:prstGeom prst="rect">
             <a:avLst>
@@ -34402,14 +37324,14 @@
       </p:sp>
       <p:sp>
         <p:nvSpPr>
-          <p:cNvPr id="49" name="Text 47"/>
-          <p:cNvSpPr/>
-          <p:nvPr/>
-        </p:nvSpPr>
-        <p:spPr>
-          <a:xfrm>
-            <a:off x="3911969" y="4169664"/>
-            <a:ext cx="603504" cy="384048"/>
+          <p:cNvPr id="61" name="Text 59"/>
+          <p:cNvSpPr/>
+          <p:nvPr/>
+        </p:nvSpPr>
+        <p:spPr>
+          <a:xfrm>
+            <a:off x="3460451" y="4169664"/>
+            <a:ext cx="451573" cy="384048"/>
           </a:xfrm>
           <a:prstGeom prst="rect">
             <a:avLst/>
@@ -34441,14 +37363,14 @@
       </p:sp>
       <p:sp>
         <p:nvSpPr>
-          <p:cNvPr id="50" name="Shape 48"/>
-          <p:cNvSpPr/>
-          <p:nvPr/>
-        </p:nvSpPr>
-        <p:spPr>
-          <a:xfrm>
-            <a:off x="4565350" y="4169664"/>
-            <a:ext cx="603504" cy="384048"/>
+          <p:cNvPr id="62" name="Shape 60"/>
+          <p:cNvSpPr/>
+          <p:nvPr/>
+        </p:nvSpPr>
+        <p:spPr>
+          <a:xfrm>
+            <a:off x="3962969" y="4169664"/>
+            <a:ext cx="451573" cy="384048"/>
           </a:xfrm>
           <a:prstGeom prst="rect">
             <a:avLst>
@@ -34468,14 +37390,14 @@
       </p:sp>
       <p:sp>
         <p:nvSpPr>
-          <p:cNvPr id="51" name="Text 49"/>
-          <p:cNvSpPr/>
-          <p:nvPr/>
-        </p:nvSpPr>
-        <p:spPr>
-          <a:xfrm>
-            <a:off x="4565350" y="4169664"/>
-            <a:ext cx="603504" cy="384048"/>
+          <p:cNvPr id="63" name="Text 61"/>
+          <p:cNvSpPr/>
+          <p:nvPr/>
+        </p:nvSpPr>
+        <p:spPr>
+          <a:xfrm>
+            <a:off x="3962969" y="4169664"/>
+            <a:ext cx="451573" cy="384048"/>
           </a:xfrm>
           <a:prstGeom prst="rect">
             <a:avLst/>
@@ -34507,14 +37429,14 @@
       </p:sp>
       <p:sp>
         <p:nvSpPr>
-          <p:cNvPr id="52" name="Shape 50"/>
-          <p:cNvSpPr/>
-          <p:nvPr/>
-        </p:nvSpPr>
-        <p:spPr>
-          <a:xfrm>
-            <a:off x="5218730" y="4169664"/>
-            <a:ext cx="603504" cy="384048"/>
+          <p:cNvPr id="64" name="Shape 62"/>
+          <p:cNvSpPr/>
+          <p:nvPr/>
+        </p:nvSpPr>
+        <p:spPr>
+          <a:xfrm>
+            <a:off x="4465487" y="4169664"/>
+            <a:ext cx="451573" cy="384048"/>
           </a:xfrm>
           <a:prstGeom prst="rect">
             <a:avLst>
@@ -34534,14 +37456,14 @@
       </p:sp>
       <p:sp>
         <p:nvSpPr>
-          <p:cNvPr id="53" name="Text 51"/>
-          <p:cNvSpPr/>
-          <p:nvPr/>
-        </p:nvSpPr>
-        <p:spPr>
-          <a:xfrm>
-            <a:off x="5218730" y="4169664"/>
-            <a:ext cx="603504" cy="384048"/>
+          <p:cNvPr id="65" name="Text 63"/>
+          <p:cNvSpPr/>
+          <p:nvPr/>
+        </p:nvSpPr>
+        <p:spPr>
+          <a:xfrm>
+            <a:off x="4465487" y="4169664"/>
+            <a:ext cx="451573" cy="384048"/>
           </a:xfrm>
           <a:prstGeom prst="rect">
             <a:avLst/>
@@ -34573,14 +37495,14 @@
       </p:sp>
       <p:sp>
         <p:nvSpPr>
-          <p:cNvPr id="54" name="Text 52"/>
-          <p:cNvSpPr/>
-          <p:nvPr/>
-        </p:nvSpPr>
-        <p:spPr>
-          <a:xfrm>
-            <a:off x="5218730" y="4572000"/>
-            <a:ext cx="603504" cy="219456"/>
+          <p:cNvPr id="66" name="Text 64"/>
+          <p:cNvSpPr/>
+          <p:nvPr/>
+        </p:nvSpPr>
+        <p:spPr>
+          <a:xfrm>
+            <a:off x="4465487" y="4572000"/>
+            <a:ext cx="451573" cy="219456"/>
           </a:xfrm>
           <a:prstGeom prst="rect">
             <a:avLst/>
@@ -34612,14 +37534,14 @@
       </p:sp>
       <p:sp>
         <p:nvSpPr>
-          <p:cNvPr id="55" name="Shape 53"/>
-          <p:cNvSpPr/>
-          <p:nvPr/>
-        </p:nvSpPr>
-        <p:spPr>
-          <a:xfrm>
-            <a:off x="5872111" y="4169664"/>
-            <a:ext cx="603504" cy="384048"/>
+          <p:cNvPr id="67" name="Shape 65"/>
+          <p:cNvSpPr/>
+          <p:nvPr/>
+        </p:nvSpPr>
+        <p:spPr>
+          <a:xfrm>
+            <a:off x="4968006" y="4169664"/>
+            <a:ext cx="451573" cy="384048"/>
           </a:xfrm>
           <a:prstGeom prst="rect">
             <a:avLst>
@@ -34639,14 +37561,14 @@
       </p:sp>
       <p:sp>
         <p:nvSpPr>
-          <p:cNvPr id="56" name="Text 54"/>
-          <p:cNvSpPr/>
-          <p:nvPr/>
-        </p:nvSpPr>
-        <p:spPr>
-          <a:xfrm>
-            <a:off x="5872111" y="4169664"/>
-            <a:ext cx="603504" cy="384048"/>
+          <p:cNvPr id="68" name="Text 66"/>
+          <p:cNvSpPr/>
+          <p:nvPr/>
+        </p:nvSpPr>
+        <p:spPr>
+          <a:xfrm>
+            <a:off x="4968006" y="4169664"/>
+            <a:ext cx="451573" cy="384048"/>
           </a:xfrm>
           <a:prstGeom prst="rect">
             <a:avLst/>
@@ -34678,14 +37600,14 @@
       </p:sp>
       <p:sp>
         <p:nvSpPr>
-          <p:cNvPr id="57" name="Shape 55"/>
-          <p:cNvSpPr/>
-          <p:nvPr/>
-        </p:nvSpPr>
-        <p:spPr>
-          <a:xfrm>
-            <a:off x="6525491" y="4169664"/>
-            <a:ext cx="603504" cy="384048"/>
+          <p:cNvPr id="69" name="Shape 67"/>
+          <p:cNvSpPr/>
+          <p:nvPr/>
+        </p:nvSpPr>
+        <p:spPr>
+          <a:xfrm>
+            <a:off x="5470524" y="4169664"/>
+            <a:ext cx="451573" cy="384048"/>
           </a:xfrm>
           <a:prstGeom prst="rect">
             <a:avLst>
@@ -34705,14 +37627,14 @@
       </p:sp>
       <p:sp>
         <p:nvSpPr>
-          <p:cNvPr id="58" name="Text 56"/>
-          <p:cNvSpPr/>
-          <p:nvPr/>
-        </p:nvSpPr>
-        <p:spPr>
-          <a:xfrm>
-            <a:off x="6525491" y="4169664"/>
-            <a:ext cx="603504" cy="384048"/>
+          <p:cNvPr id="70" name="Text 68"/>
+          <p:cNvSpPr/>
+          <p:nvPr/>
+        </p:nvSpPr>
+        <p:spPr>
+          <a:xfrm>
+            <a:off x="5470524" y="4169664"/>
+            <a:ext cx="451573" cy="384048"/>
           </a:xfrm>
           <a:prstGeom prst="rect">
             <a:avLst/>
@@ -34744,14 +37666,14 @@
       </p:sp>
       <p:sp>
         <p:nvSpPr>
-          <p:cNvPr id="59" name="Shape 57"/>
-          <p:cNvSpPr/>
-          <p:nvPr/>
-        </p:nvSpPr>
-        <p:spPr>
-          <a:xfrm>
-            <a:off x="7178871" y="4169664"/>
-            <a:ext cx="603504" cy="384048"/>
+          <p:cNvPr id="71" name="Shape 69"/>
+          <p:cNvSpPr/>
+          <p:nvPr/>
+        </p:nvSpPr>
+        <p:spPr>
+          <a:xfrm>
+            <a:off x="5973042" y="4169664"/>
+            <a:ext cx="451573" cy="384048"/>
           </a:xfrm>
           <a:prstGeom prst="rect">
             <a:avLst>
@@ -34771,14 +37693,14 @@
       </p:sp>
       <p:sp>
         <p:nvSpPr>
-          <p:cNvPr id="60" name="Text 58"/>
-          <p:cNvSpPr/>
-          <p:nvPr/>
-        </p:nvSpPr>
-        <p:spPr>
-          <a:xfrm>
-            <a:off x="7178871" y="4169664"/>
-            <a:ext cx="603504" cy="384048"/>
+          <p:cNvPr id="72" name="Text 70"/>
+          <p:cNvSpPr/>
+          <p:nvPr/>
+        </p:nvSpPr>
+        <p:spPr>
+          <a:xfrm>
+            <a:off x="5973042" y="4169664"/>
+            <a:ext cx="451573" cy="384048"/>
           </a:xfrm>
           <a:prstGeom prst="rect">
             <a:avLst/>
@@ -34810,14 +37732,14 @@
       </p:sp>
       <p:sp>
         <p:nvSpPr>
-          <p:cNvPr id="61" name="Shape 59"/>
-          <p:cNvSpPr/>
-          <p:nvPr/>
-        </p:nvSpPr>
-        <p:spPr>
-          <a:xfrm>
-            <a:off x="7832252" y="4169664"/>
-            <a:ext cx="603504" cy="384048"/>
+          <p:cNvPr id="73" name="Shape 71"/>
+          <p:cNvSpPr/>
+          <p:nvPr/>
+        </p:nvSpPr>
+        <p:spPr>
+          <a:xfrm>
+            <a:off x="6475560" y="4169664"/>
+            <a:ext cx="451573" cy="384048"/>
           </a:xfrm>
           <a:prstGeom prst="rect">
             <a:avLst>
@@ -34837,14 +37759,14 @@
       </p:sp>
       <p:sp>
         <p:nvSpPr>
-          <p:cNvPr id="62" name="Text 60"/>
-          <p:cNvSpPr/>
-          <p:nvPr/>
-        </p:nvSpPr>
-        <p:spPr>
-          <a:xfrm>
-            <a:off x="7832252" y="4169664"/>
-            <a:ext cx="603504" cy="384048"/>
+          <p:cNvPr id="74" name="Text 72"/>
+          <p:cNvSpPr/>
+          <p:nvPr/>
+        </p:nvSpPr>
+        <p:spPr>
+          <a:xfrm>
+            <a:off x="6475560" y="4169664"/>
+            <a:ext cx="451573" cy="384048"/>
           </a:xfrm>
           <a:prstGeom prst="rect">
             <a:avLst/>
@@ -34876,14 +37798,14 @@
       </p:sp>
       <p:sp>
         <p:nvSpPr>
-          <p:cNvPr id="63" name="Text 61"/>
-          <p:cNvSpPr/>
-          <p:nvPr/>
-        </p:nvSpPr>
-        <p:spPr>
-          <a:xfrm>
-            <a:off x="7832252" y="4572000"/>
-            <a:ext cx="603504" cy="219456"/>
+          <p:cNvPr id="75" name="Text 73"/>
+          <p:cNvSpPr/>
+          <p:nvPr/>
+        </p:nvSpPr>
+        <p:spPr>
+          <a:xfrm>
+            <a:off x="6475560" y="4572000"/>
+            <a:ext cx="451573" cy="219456"/>
           </a:xfrm>
           <a:prstGeom prst="rect">
             <a:avLst/>
@@ -34910,6 +37832,204 @@
               <a:t>/k/</a:t>
             </a:r>
             <a:endParaRPr lang="en-US" sz="750" dirty="0"/>
+          </a:p>
+        </p:txBody>
+      </p:sp>
+      <p:sp>
+        <p:nvSpPr>
+          <p:cNvPr id="76" name="Shape 74"/>
+          <p:cNvSpPr/>
+          <p:nvPr/>
+        </p:nvSpPr>
+        <p:spPr>
+          <a:xfrm>
+            <a:off x="6978078" y="4169664"/>
+            <a:ext cx="451573" cy="384048"/>
+          </a:xfrm>
+          <a:prstGeom prst="rect">
+            <a:avLst>
+              <a:gd name="adj" fmla="val 9524"/>
+            </a:avLst>
+          </a:prstGeom>
+          <a:solidFill>
+            <a:srgbClr val="FFFFFF"/>
+          </a:solidFill>
+          <a:ln w="12700">
+            <a:solidFill>
+              <a:srgbClr val="DB2777"/>
+            </a:solidFill>
+            <a:prstDash val="solid"/>
+          </a:ln>
+        </p:spPr>
+      </p:sp>
+      <p:sp>
+        <p:nvSpPr>
+          <p:cNvPr id="77" name="Text 75"/>
+          <p:cNvSpPr/>
+          <p:nvPr/>
+        </p:nvSpPr>
+        <p:spPr>
+          <a:xfrm>
+            <a:off x="6978078" y="4169664"/>
+            <a:ext cx="451573" cy="384048"/>
+          </a:xfrm>
+          <a:prstGeom prst="rect">
+            <a:avLst/>
+          </a:prstGeom>
+          <a:noFill/>
+          <a:ln/>
+        </p:spPr>
+        <p:txBody>
+          <a:bodyPr wrap="square" lIns="0" tIns="0" rIns="0" bIns="0" rtlCol="0" anchor="ctr"/>
+          <a:lstStyle/>
+          <a:p>
+            <a:pPr algn="ctr" indent="0" marL="0">
+              <a:buNone/>
+            </a:pPr>
+            <a:r>
+              <a:rPr lang="en-US" sz="900" b="1" dirty="0">
+                <a:solidFill>
+                  <a:srgbClr val="9D174D"/>
+                </a:solidFill>
+                <a:latin typeface="Trebuchet MS" pitchFamily="34" charset="0"/>
+                <a:ea typeface="Trebuchet MS" pitchFamily="34" charset="-122"/>
+                <a:cs typeface="Trebuchet MS" pitchFamily="34" charset="-120"/>
+              </a:rPr>
+              <a:t>a</a:t>
+            </a:r>
+            <a:endParaRPr lang="en-US" sz="900" dirty="0"/>
+          </a:p>
+        </p:txBody>
+      </p:sp>
+      <p:sp>
+        <p:nvSpPr>
+          <p:cNvPr id="78" name="Shape 76"/>
+          <p:cNvSpPr/>
+          <p:nvPr/>
+        </p:nvSpPr>
+        <p:spPr>
+          <a:xfrm>
+            <a:off x="7480596" y="4169664"/>
+            <a:ext cx="451573" cy="384048"/>
+          </a:xfrm>
+          <a:prstGeom prst="rect">
+            <a:avLst>
+              <a:gd name="adj" fmla="val 9524"/>
+            </a:avLst>
+          </a:prstGeom>
+          <a:solidFill>
+            <a:srgbClr val="FFFFFF"/>
+          </a:solidFill>
+          <a:ln w="12700">
+            <a:solidFill>
+              <a:srgbClr val="DB2777"/>
+            </a:solidFill>
+            <a:prstDash val="solid"/>
+          </a:ln>
+        </p:spPr>
+      </p:sp>
+      <p:sp>
+        <p:nvSpPr>
+          <p:cNvPr id="79" name="Text 77"/>
+          <p:cNvSpPr/>
+          <p:nvPr/>
+        </p:nvSpPr>
+        <p:spPr>
+          <a:xfrm>
+            <a:off x="7480596" y="4169664"/>
+            <a:ext cx="451573" cy="384048"/>
+          </a:xfrm>
+          <a:prstGeom prst="rect">
+            <a:avLst/>
+          </a:prstGeom>
+          <a:noFill/>
+          <a:ln/>
+        </p:spPr>
+        <p:txBody>
+          <a:bodyPr wrap="square" lIns="0" tIns="0" rIns="0" bIns="0" rtlCol="0" anchor="ctr"/>
+          <a:lstStyle/>
+          <a:p>
+            <a:pPr algn="ctr" indent="0" marL="0">
+              <a:buNone/>
+            </a:pPr>
+            <a:r>
+              <a:rPr lang="en-US" sz="900" b="1" dirty="0">
+                <a:solidFill>
+                  <a:srgbClr val="9D174D"/>
+                </a:solidFill>
+                <a:latin typeface="Trebuchet MS" pitchFamily="34" charset="0"/>
+                <a:ea typeface="Trebuchet MS" pitchFamily="34" charset="-122"/>
+                <a:cs typeface="Trebuchet MS" pitchFamily="34" charset="-120"/>
+              </a:rPr>
+              <a:t>ll</a:t>
+            </a:r>
+            <a:endParaRPr lang="en-US" sz="900" dirty="0"/>
+          </a:p>
+        </p:txBody>
+      </p:sp>
+      <p:sp>
+        <p:nvSpPr>
+          <p:cNvPr id="80" name="Shape 78"/>
+          <p:cNvSpPr/>
+          <p:nvPr/>
+        </p:nvSpPr>
+        <p:spPr>
+          <a:xfrm>
+            <a:off x="7983114" y="4169664"/>
+            <a:ext cx="451573" cy="384048"/>
+          </a:xfrm>
+          <a:prstGeom prst="rect">
+            <a:avLst>
+              <a:gd name="adj" fmla="val 9524"/>
+            </a:avLst>
+          </a:prstGeom>
+          <a:solidFill>
+            <a:srgbClr val="FFFFFF"/>
+          </a:solidFill>
+          <a:ln w="12700">
+            <a:solidFill>
+              <a:srgbClr val="DB2777"/>
+            </a:solidFill>
+            <a:prstDash val="solid"/>
+          </a:ln>
+        </p:spPr>
+      </p:sp>
+      <p:sp>
+        <p:nvSpPr>
+          <p:cNvPr id="81" name="Text 79"/>
+          <p:cNvSpPr/>
+          <p:nvPr/>
+        </p:nvSpPr>
+        <p:spPr>
+          <a:xfrm>
+            <a:off x="7983114" y="4169664"/>
+            <a:ext cx="451573" cy="384048"/>
+          </a:xfrm>
+          <a:prstGeom prst="rect">
+            <a:avLst/>
+          </a:prstGeom>
+          <a:noFill/>
+          <a:ln/>
+        </p:spPr>
+        <p:txBody>
+          <a:bodyPr wrap="square" lIns="0" tIns="0" rIns="0" bIns="0" rtlCol="0" anchor="ctr"/>
+          <a:lstStyle/>
+          <a:p>
+            <a:pPr algn="ctr" indent="0" marL="0">
+              <a:buNone/>
+            </a:pPr>
+            <a:r>
+              <a:rPr lang="en-US" sz="900" b="1" dirty="0">
+                <a:solidFill>
+                  <a:srgbClr val="9D174D"/>
+                </a:solidFill>
+                <a:latin typeface="Trebuchet MS" pitchFamily="34" charset="0"/>
+                <a:ea typeface="Trebuchet MS" pitchFamily="34" charset="-122"/>
+                <a:cs typeface="Trebuchet MS" pitchFamily="34" charset="-120"/>
+              </a:rPr>
+              <a:t>y</a:t>
+            </a:r>
+            <a:endParaRPr lang="en-US" sz="900" dirty="0"/>
           </a:p>
         </p:txBody>
       </p:sp>
@@ -35199,7 +38319,7 @@
                 <a:ea typeface="Calibri" pitchFamily="34" charset="-122"/>
                 <a:cs typeface="Calibri" pitchFamily="34" charset="-120"/>
               </a:rPr>
-              <a:t>Word Labs  •  wordlabs.app  •  Root: 'stetho' = chest; breast</a:t>
+              <a:t>Word Labs  •  wordlabs.app  •  Root: 'stetho' = chest, breast</a:t>
             </a:r>
             <a:endParaRPr lang="en-US" sz="800" dirty="0"/>
           </a:p>
@@ -36368,7 +39488,7 @@
                 <a:ea typeface="Calibri" pitchFamily="34" charset="-122"/>
                 <a:cs typeface="Calibri" pitchFamily="34" charset="-120"/>
               </a:rPr>
-              <a:t>Word Labs  •  wordlabs.app  •  Root: 'stetho' = chest; breast</a:t>
+              <a:t>Word Labs  •  wordlabs.app  •  Root: 'stetho' = chest, breast</a:t>
             </a:r>
             <a:endParaRPr lang="en-US" sz="800" dirty="0"/>
           </a:p>
@@ -36669,7 +39789,7 @@
                 <a:ea typeface="Trebuchet MS" pitchFamily="34" charset="-122"/>
                 <a:cs typeface="Trebuchet MS" pitchFamily="34" charset="-120"/>
               </a:rPr>
-              <a:t>bi-</a:t>
+              <a:t>a-</a:t>
             </a:r>
             <a:endParaRPr lang="en-US" sz="1300" dirty="0"/>
           </a:p>
@@ -36861,7 +39981,7 @@
                 <a:ea typeface="Trebuchet MS" pitchFamily="34" charset="-122"/>
                 <a:cs typeface="Trebuchet MS" pitchFamily="34" charset="-120"/>
               </a:rPr>
-              <a:t>endo-</a:t>
+              <a:t>bio-</a:t>
             </a:r>
             <a:endParaRPr lang="en-US" sz="1300" dirty="0"/>
           </a:p>
@@ -37014,7 +40134,7 @@
                 <a:ea typeface="Trebuchet MS" pitchFamily="34" charset="-122"/>
                 <a:cs typeface="Trebuchet MS" pitchFamily="34" charset="-120"/>
               </a:rPr>
-              <a:t>micro-</a:t>
+              <a:t>electro-</a:t>
             </a:r>
             <a:endParaRPr lang="en-US" sz="1300" dirty="0"/>
           </a:p>
@@ -37167,7 +40287,7 @@
                 <a:ea typeface="Trebuchet MS" pitchFamily="34" charset="-122"/>
                 <a:cs typeface="Trebuchet MS" pitchFamily="34" charset="-120"/>
               </a:rPr>
-              <a:t>tele-</a:t>
+              <a:t>photo-</a:t>
             </a:r>
             <a:endParaRPr lang="en-US" sz="1300" dirty="0"/>
           </a:p>
@@ -37256,7 +40376,7 @@
                 <a:ea typeface="Trebuchet MS" pitchFamily="34" charset="-122"/>
                 <a:cs typeface="Trebuchet MS" pitchFamily="34" charset="-120"/>
               </a:rPr>
-              <a:t>-scopy</a:t>
+              <a:t>-meter</a:t>
             </a:r>
             <a:endParaRPr lang="en-US" sz="1300" dirty="0"/>
           </a:p>
@@ -37320,7 +40440,7 @@
                 <a:ea typeface="Trebuchet MS" pitchFamily="34" charset="-122"/>
                 <a:cs typeface="Trebuchet MS" pitchFamily="34" charset="-120"/>
               </a:rPr>
-              <a:t>ultra-</a:t>
+              <a:t>tele-</a:t>
             </a:r>
             <a:endParaRPr lang="en-US" sz="1300" dirty="0"/>
           </a:p>
@@ -37712,7 +40832,7 @@
                 <a:ea typeface="Trebuchet MS" pitchFamily="34" charset="-122"/>
                 <a:cs typeface="Trebuchet MS" pitchFamily="34" charset="-120"/>
               </a:rPr>
-              <a:t>stethoscopy</a:t>
+              <a:t>stethometer</a:t>
             </a:r>
             <a:endParaRPr lang="en-US" sz="1200" dirty="0"/>
           </a:p>
@@ -37844,7 +40964,7 @@
                 <a:ea typeface="Trebuchet MS" pitchFamily="34" charset="-122"/>
                 <a:cs typeface="Trebuchet MS" pitchFamily="34" charset="-120"/>
               </a:rPr>
-              <a:t>stethocardiograph</a:t>
+              <a:t>telestethoscope</a:t>
             </a:r>
             <a:endParaRPr lang="en-US" sz="1200" dirty="0"/>
           </a:p>
@@ -37910,7 +41030,7 @@
                 <a:ea typeface="Trebuchet MS" pitchFamily="34" charset="-122"/>
                 <a:cs typeface="Trebuchet MS" pitchFamily="34" charset="-120"/>
               </a:rPr>
-              <a:t>telestethoscope</a:t>
+              <a:t>electrostethoscope</a:t>
             </a:r>
             <a:endParaRPr lang="en-US" sz="1200" dirty="0"/>
           </a:p>
@@ -37976,7 +41096,7 @@
                 <a:ea typeface="Trebuchet MS" pitchFamily="34" charset="-122"/>
                 <a:cs typeface="Trebuchet MS" pitchFamily="34" charset="-120"/>
               </a:rPr>
-              <a:t>endostethoscope</a:t>
+              <a:t>photostethoscope</a:t>
             </a:r>
             <a:endParaRPr lang="en-US" sz="1200" dirty="0"/>
           </a:p>
@@ -38268,7 +41388,7 @@
                 <a:ea typeface="Calibri" pitchFamily="34" charset="-122"/>
                 <a:cs typeface="Calibri" pitchFamily="34" charset="-120"/>
               </a:rPr>
-              <a:t>Word Labs  •  wordlabs.app  •  Root: 'stetho' = chest; breast</a:t>
+              <a:t>Word Labs  •  wordlabs.app  •  Root: 'stetho' = chest, breast</a:t>
             </a:r>
             <a:endParaRPr lang="en-US" sz="800" dirty="0"/>
           </a:p>
@@ -38432,7 +41552,7 @@
                 <a:ea typeface="Calibri" pitchFamily="34" charset="-122"/>
                 <a:cs typeface="Calibri" pitchFamily="34" charset="-120"/>
               </a:rPr>
-              <a:t>The core part of a word carrying its basic meaning. For example, 'stetho' means 'chest; breast'.</a:t>
+              <a:t>The core part of a word carrying its basic meaning. For example, 'stetho' means 'chest, breast'.</a:t>
             </a:r>
             <a:endParaRPr lang="en-US" sz="1350" dirty="0"/>
           </a:p>
@@ -39052,7 +42172,7 @@
                 <a:ea typeface="Calibri" pitchFamily="34" charset="-122"/>
                 <a:cs typeface="Calibri" pitchFamily="34" charset="-120"/>
               </a:rPr>
-              <a:t>Word Labs  •  wordlabs.app  •  Root: 'stetho' = chest; breast</a:t>
+              <a:t>Word Labs  •  wordlabs.app  •  Root: 'stetho' = chest, breast</a:t>
             </a:r>
             <a:endParaRPr lang="en-US" sz="800" dirty="0"/>
           </a:p>
@@ -39164,7 +42284,7 @@
                 <a:ea typeface="Calibri" pitchFamily="34" charset="-122"/>
                 <a:cs typeface="Calibri" pitchFamily="34" charset="-120"/>
               </a:rPr>
-              <a:t>1.  The root 'stetho' comes from Greek and means chest.</a:t>
+              <a:t>1.  A stethoscope is used by doctors to measure a patient's temperature.</a:t>
             </a:r>
             <a:endParaRPr lang="en-US" sz="1300" dirty="0"/>
           </a:p>
@@ -39187,11 +42307,11 @@
             </a:avLst>
           </a:prstGeom>
           <a:solidFill>
-            <a:srgbClr val="DCFCE7"/>
-          </a:solidFill>
-          <a:ln w="12700">
-            <a:solidFill>
-              <a:srgbClr val="16A34A"/>
+            <a:srgbClr val="FEE2E2"/>
+          </a:solidFill>
+          <a:ln w="12700">
+            <a:solidFill>
+              <a:srgbClr val="DC2626"/>
             </a:solidFill>
             <a:prstDash val="solid"/>
           </a:ln>
@@ -39224,13 +42344,13 @@
             <a:r>
               <a:rPr lang="en-US" sz="1100" b="1" dirty="0">
                 <a:solidFill>
-                  <a:srgbClr val="16A34A"/>
+                  <a:srgbClr val="DC2626"/>
                 </a:solidFill>
                 <a:latin typeface="Trebuchet MS" pitchFamily="34" charset="0"/>
                 <a:ea typeface="Trebuchet MS" pitchFamily="34" charset="-122"/>
                 <a:cs typeface="Trebuchet MS" pitchFamily="34" charset="-120"/>
               </a:rPr>
-              <a:t>TRUE</a:t>
+              <a:t>FALSE</a:t>
             </a:r>
             <a:endParaRPr lang="en-US" sz="1100" dirty="0"/>
           </a:p>
@@ -39303,7 +42423,7 @@
                 <a:ea typeface="Calibri" pitchFamily="34" charset="-122"/>
                 <a:cs typeface="Calibri" pitchFamily="34" charset="-120"/>
               </a:rPr>
-              <a:t>2.  A stethoscope is used by doctors to look inside the ear.</a:t>
+              <a:t>2.  The morpheme 'stetho' means to look or see.</a:t>
             </a:r>
             <a:endParaRPr lang="en-US" sz="1300" dirty="0"/>
           </a:p>
@@ -39442,7 +42562,7 @@
                 <a:ea typeface="Calibri" pitchFamily="34" charset="-122"/>
                 <a:cs typeface="Calibri" pitchFamily="34" charset="-120"/>
               </a:rPr>
-              <a:t>3.  The word 'stethoscope' contains the suffix '-scope', meaning to look or examine.</a:t>
+              <a:t>3.  The word 'stethoscope' contains the root 'stetho' meaning chest.</a:t>
             </a:r>
             <a:endParaRPr lang="en-US" sz="1300" dirty="0"/>
           </a:p>
@@ -39581,7 +42701,7 @@
                 <a:ea typeface="Calibri" pitchFamily="34" charset="-122"/>
                 <a:cs typeface="Calibri" pitchFamily="34" charset="-120"/>
               </a:rPr>
-              <a:t>4.  Words containing 'stetho' are mostly used in medicine and science.</a:t>
+              <a:t>4.  The morpheme 'stetho' comes from a Greek word meaning chest.</a:t>
             </a:r>
             <a:endParaRPr lang="en-US" sz="1300" dirty="0"/>
           </a:p>
@@ -39720,7 +42840,7 @@
                 <a:ea typeface="Calibri" pitchFamily="34" charset="-122"/>
                 <a:cs typeface="Calibri" pitchFamily="34" charset="-120"/>
               </a:rPr>
-              <a:t>5.  The morpheme 'stetho' comes from Latin.</a:t>
+              <a:t>5.  'Stetho' words are mostly found in medical and scientific language.</a:t>
             </a:r>
             <a:endParaRPr lang="en-US" sz="1300" dirty="0"/>
           </a:p>
@@ -39743,11 +42863,11 @@
             </a:avLst>
           </a:prstGeom>
           <a:solidFill>
-            <a:srgbClr val="FEE2E2"/>
-          </a:solidFill>
-          <a:ln w="12700">
-            <a:solidFill>
-              <a:srgbClr val="DC2626"/>
+            <a:srgbClr val="DCFCE7"/>
+          </a:solidFill>
+          <a:ln w="12700">
+            <a:solidFill>
+              <a:srgbClr val="16A34A"/>
             </a:solidFill>
             <a:prstDash val="solid"/>
           </a:ln>
@@ -39780,13 +42900,13 @@
             <a:r>
               <a:rPr lang="en-US" sz="1100" b="1" dirty="0">
                 <a:solidFill>
-                  <a:srgbClr val="DC2626"/>
+                  <a:srgbClr val="16A34A"/>
                 </a:solidFill>
                 <a:latin typeface="Trebuchet MS" pitchFamily="34" charset="0"/>
                 <a:ea typeface="Trebuchet MS" pitchFamily="34" charset="-122"/>
                 <a:cs typeface="Trebuchet MS" pitchFamily="34" charset="-120"/>
               </a:rPr>
-              <a:t>FALSE</a:t>
+              <a:t>TRUE</a:t>
             </a:r>
             <a:endParaRPr lang="en-US" sz="1100" dirty="0"/>
           </a:p>
@@ -40078,7 +43198,7 @@
                 <a:ea typeface="Calibri" pitchFamily="34" charset="-122"/>
                 <a:cs typeface="Calibri" pitchFamily="34" charset="-120"/>
               </a:rPr>
-              <a:t>Word Labs  •  wordlabs.app  •  Root: 'stetho' = chest; breast</a:t>
+              <a:t>Word Labs  •  wordlabs.app  •  Root: 'stetho' = chest, breast</a:t>
             </a:r>
             <a:endParaRPr lang="en-US" sz="800" dirty="0"/>
           </a:p>
@@ -40215,7 +43335,7 @@
                 <a:ea typeface="Trebuchet MS" pitchFamily="34" charset="-122"/>
                 <a:cs typeface="Trebuchet MS" pitchFamily="34" charset="-120"/>
               </a:rPr>
-              <a:t>chest; breast</a:t>
+              <a:t>chest, breast</a:t>
             </a:r>
             <a:endParaRPr lang="en-US" sz="2000" dirty="0"/>
           </a:p>
@@ -40557,7 +43677,7 @@
                 <a:ea typeface="Trebuchet MS" pitchFamily="34" charset="-122"/>
                 <a:cs typeface="Trebuchet MS" pitchFamily="34" charset="-120"/>
               </a:rPr>
-              <a:t>stethoscopy</a:t>
+              <a:t>stethometer</a:t>
             </a:r>
             <a:endParaRPr lang="en-US" sz="1300" dirty="0"/>
           </a:p>
@@ -40689,7 +43809,7 @@
                 <a:ea typeface="Trebuchet MS" pitchFamily="34" charset="-122"/>
                 <a:cs typeface="Trebuchet MS" pitchFamily="34" charset="-120"/>
               </a:rPr>
-              <a:t>stethocardiograph</a:t>
+              <a:t>telestethoscope</a:t>
             </a:r>
             <a:endParaRPr lang="en-US" sz="1300" dirty="0"/>
           </a:p>
@@ -40755,7 +43875,7 @@
                 <a:ea typeface="Trebuchet MS" pitchFamily="34" charset="-122"/>
                 <a:cs typeface="Trebuchet MS" pitchFamily="34" charset="-120"/>
               </a:rPr>
-              <a:t>telestethoscope</a:t>
+              <a:t>electrostethoscope</a:t>
             </a:r>
             <a:endParaRPr lang="en-US" sz="1300" dirty="0"/>
           </a:p>
@@ -41047,7 +44167,7 @@
                 <a:ea typeface="Calibri" pitchFamily="34" charset="-122"/>
                 <a:cs typeface="Calibri" pitchFamily="34" charset="-120"/>
               </a:rPr>
-              <a:t>Word Labs  •  wordlabs.app  •  Root: 'stetho' = chest; breast</a:t>
+              <a:t>Word Labs  •  wordlabs.app  •  Root: 'stetho' = chest, breast</a:t>
             </a:r>
             <a:endParaRPr lang="en-US" sz="800" dirty="0"/>
           </a:p>
@@ -41348,7 +44468,7 @@
                 <a:ea typeface="Trebuchet MS" pitchFamily="34" charset="-122"/>
                 <a:cs typeface="Trebuchet MS" pitchFamily="34" charset="-120"/>
               </a:rPr>
-              <a:t>bi-</a:t>
+              <a:t>a-</a:t>
             </a:r>
             <a:endParaRPr lang="en-US" sz="1300" dirty="0"/>
           </a:p>
@@ -41540,7 +44660,7 @@
                 <a:ea typeface="Trebuchet MS" pitchFamily="34" charset="-122"/>
                 <a:cs typeface="Trebuchet MS" pitchFamily="34" charset="-120"/>
               </a:rPr>
-              <a:t>endo-</a:t>
+              <a:t>bio-</a:t>
             </a:r>
             <a:endParaRPr lang="en-US" sz="1300" dirty="0"/>
           </a:p>
@@ -41693,7 +44813,7 @@
                 <a:ea typeface="Trebuchet MS" pitchFamily="34" charset="-122"/>
                 <a:cs typeface="Trebuchet MS" pitchFamily="34" charset="-120"/>
               </a:rPr>
-              <a:t>micro-</a:t>
+              <a:t>electro-</a:t>
             </a:r>
             <a:endParaRPr lang="en-US" sz="1300" dirty="0"/>
           </a:p>
@@ -41846,7 +44966,7 @@
                 <a:ea typeface="Trebuchet MS" pitchFamily="34" charset="-122"/>
                 <a:cs typeface="Trebuchet MS" pitchFamily="34" charset="-120"/>
               </a:rPr>
-              <a:t>tele-</a:t>
+              <a:t>photo-</a:t>
             </a:r>
             <a:endParaRPr lang="en-US" sz="1300" dirty="0"/>
           </a:p>
@@ -41935,7 +45055,7 @@
                 <a:ea typeface="Trebuchet MS" pitchFamily="34" charset="-122"/>
                 <a:cs typeface="Trebuchet MS" pitchFamily="34" charset="-120"/>
               </a:rPr>
-              <a:t>-scopy</a:t>
+              <a:t>-meter</a:t>
             </a:r>
             <a:endParaRPr lang="en-US" sz="1300" dirty="0"/>
           </a:p>
@@ -41999,7 +45119,7 @@
                 <a:ea typeface="Trebuchet MS" pitchFamily="34" charset="-122"/>
                 <a:cs typeface="Trebuchet MS" pitchFamily="34" charset="-120"/>
               </a:rPr>
-              <a:t>ultra-</a:t>
+              <a:t>tele-</a:t>
             </a:r>
             <a:endParaRPr lang="en-US" sz="1300" dirty="0"/>
           </a:p>
@@ -42200,7 +45320,7 @@
                 <a:ea typeface="Trebuchet MS" pitchFamily="34" charset="-122"/>
                 <a:cs typeface="Trebuchet MS" pitchFamily="34" charset="-120"/>
               </a:rPr>
-              <a:t>bi-</a:t>
+              <a:t>a-</a:t>
             </a:r>
             <a:endParaRPr lang="en-US" sz="1300" dirty="0"/>
           </a:p>
@@ -42821,7 +45941,7 @@
                 <a:ea typeface="Calibri" pitchFamily="34" charset="-122"/>
                 <a:cs typeface="Calibri" pitchFamily="34" charset="-120"/>
               </a:rPr>
-              <a:t>Word Labs  •  wordlabs.app  •  Root: 'stetho' = chest; breast</a:t>
+              <a:t>Word Labs  •  wordlabs.app  •  Root: 'stetho' = chest, breast</a:t>
             </a:r>
             <a:endParaRPr lang="en-US" sz="800" dirty="0"/>
           </a:p>
@@ -42999,7 +46119,7 @@
                 <a:ea typeface="Calibri" pitchFamily="34" charset="-122"/>
                 <a:cs typeface="Calibri" pitchFamily="34" charset="-120"/>
               </a:rPr>
-              <a:t>A special stethoscope that sends heart and breathing sounds over a distance using technology.</a:t>
+              <a:t>An electronic version of a stethoscope that amplifies sounds from inside the chest.</a:t>
             </a:r>
             <a:endParaRPr lang="en-US" sz="1200" dirty="0"/>
           </a:p>
@@ -43138,7 +46258,7 @@
                 <a:ea typeface="Calibri" pitchFamily="34" charset="-122"/>
                 <a:cs typeface="Calibri" pitchFamily="34" charset="-120"/>
               </a:rPr>
-              <a:t>A scientific instrument that records movements of the chest wall as a person breathes.</a:t>
+              <a:t>An instrument that records the movements of the chest during breathing.</a:t>
             </a:r>
             <a:endParaRPr lang="en-US" sz="1200" dirty="0"/>
           </a:p>
@@ -43277,7 +46397,7 @@
                 <a:ea typeface="Calibri" pitchFamily="34" charset="-122"/>
                 <a:cs typeface="Calibri" pitchFamily="34" charset="-120"/>
               </a:rPr>
-              <a:t>The process of listening to sounds inside the chest or body using a stethoscope.</a:t>
+              <a:t>A device used to measure the movement of the chest when a person breathes.</a:t>
             </a:r>
             <a:endParaRPr lang="en-US" sz="1200" dirty="0"/>
           </a:p>
@@ -43350,7 +46470,7 @@
                 <a:ea typeface="Trebuchet MS" pitchFamily="34" charset="-122"/>
                 <a:cs typeface="Trebuchet MS" pitchFamily="34" charset="-120"/>
               </a:rPr>
-              <a:t>stethoscopy</a:t>
+              <a:t>stethometer</a:t>
             </a:r>
             <a:endParaRPr lang="en-US" sz="1200" dirty="0"/>
           </a:p>
@@ -43416,7 +46536,7 @@
                 <a:ea typeface="Calibri" pitchFamily="34" charset="-122"/>
                 <a:cs typeface="Calibri" pitchFamily="34" charset="-120"/>
               </a:rPr>
-              <a:t>A device that uses a stethoscope-like tool to record the sounds made by the heart.</a:t>
+              <a:t>A special stethoscope that can send heart and lung sounds over a long distance.</a:t>
             </a:r>
             <a:endParaRPr lang="en-US" sz="1200" dirty="0"/>
           </a:p>
@@ -43555,7 +46675,7 @@
                 <a:ea typeface="Calibri" pitchFamily="34" charset="-122"/>
                 <a:cs typeface="Calibri" pitchFamily="34" charset="-120"/>
               </a:rPr>
-              <a:t>In a way that uses a stethoscope to listen to sounds inside the body.</a:t>
+              <a:t>In a way that involves using a stethoscope to examine someone.</a:t>
             </a:r>
             <a:endParaRPr lang="en-US" sz="1200" dirty="0"/>
           </a:p>
@@ -43628,7 +46748,7 @@
                 <a:ea typeface="Trebuchet MS" pitchFamily="34" charset="-122"/>
                 <a:cs typeface="Trebuchet MS" pitchFamily="34" charset="-120"/>
               </a:rPr>
-              <a:t>stethocardiograph</a:t>
+              <a:t>telestethoscope</a:t>
             </a:r>
             <a:endParaRPr lang="en-US" sz="1200" dirty="0"/>
           </a:p>
@@ -43694,7 +46814,7 @@
                 <a:ea typeface="Calibri" pitchFamily="34" charset="-122"/>
                 <a:cs typeface="Calibri" pitchFamily="34" charset="-120"/>
               </a:rPr>
-              <a:t>A medical tool that doctors use to listen to your heartbeat and breathing sounds inside your chest.</a:t>
+              <a:t>A medical tool doctors use to listen to your heart and lungs through your chest.</a:t>
             </a:r>
             <a:endParaRPr lang="en-US" sz="1200" dirty="0"/>
           </a:p>
@@ -43767,7 +46887,7 @@
                 <a:ea typeface="Trebuchet MS" pitchFamily="34" charset="-122"/>
                 <a:cs typeface="Trebuchet MS" pitchFamily="34" charset="-120"/>
               </a:rPr>
-              <a:t>telestethoscope</a:t>
+              <a:t>electrostethoscope</a:t>
             </a:r>
             <a:endParaRPr lang="en-US" sz="1200" dirty="0"/>
           </a:p>
@@ -43833,7 +46953,7 @@
                 <a:ea typeface="Calibri" pitchFamily="34" charset="-122"/>
                 <a:cs typeface="Calibri" pitchFamily="34" charset="-120"/>
               </a:rPr>
-              <a:t>Relating to or done with a stethoscope, such as a stethoscopic examination of the lungs.</a:t>
+              <a:t>Relating to or using a stethoscope to listen to sounds inside the body.</a:t>
             </a:r>
             <a:endParaRPr lang="en-US" sz="1200" dirty="0"/>
           </a:p>
@@ -44125,7 +47245,7 @@
                 <a:ea typeface="Calibri" pitchFamily="34" charset="-122"/>
                 <a:cs typeface="Calibri" pitchFamily="34" charset="-120"/>
               </a:rPr>
-              <a:t>Word Labs  •  wordlabs.app  •  Root: 'stetho' = chest; breast</a:t>
+              <a:t>Word Labs  •  wordlabs.app  •  Root: 'stetho' = chest, breast</a:t>
             </a:r>
             <a:endParaRPr lang="en-US" sz="800" dirty="0"/>
           </a:p>
@@ -44328,7 +47448,7 @@
                 <a:ea typeface="Calibri" pitchFamily="34" charset="-122"/>
                 <a:cs typeface="Calibri" pitchFamily="34" charset="-120"/>
               </a:rPr>
-              <a:t>The doctor placed the stethoscope on my chest to listen to my heartbeat.</a:t>
+              <a:t>The doctor placed the stethoscope on the patient's chest to listen to her heartbeat.</a:t>
             </a:r>
             <a:endParaRPr lang="en-US" sz="1500" dirty="0"/>
           </a:p>
@@ -44492,7 +47612,7 @@
                 <a:ea typeface="Calibri" pitchFamily="34" charset="-122"/>
                 <a:cs typeface="Calibri" pitchFamily="34" charset="-120"/>
               </a:rPr>
-              <a:t>During the check-up, the nurse performed a stethoscopic examination to make sure my lungs were healthy.</a:t>
+              <a:t>During our excursion to the hospital, we learned that a stethoscope helps doctors hear sounds inside your body.</a:t>
             </a:r>
             <a:endParaRPr lang="en-US" sz="1500" dirty="0"/>
           </a:p>
@@ -44656,7 +47776,7 @@
                 <a:ea typeface="Calibri" pitchFamily="34" charset="-122"/>
                 <a:cs typeface="Calibri" pitchFamily="34" charset="-120"/>
               </a:rPr>
-              <a:t>Scientists once used a stethograph to record how a patient's chest moved while they were breathing.</a:t>
+              <a:t>A stethometric reading showed how deeply the swimmer was breathing after the race.</a:t>
             </a:r>
             <a:endParaRPr lang="en-US" sz="1500" dirty="0"/>
           </a:p>
